--- a/kombinatorik-praesentation/kombinatorik_praesentation.pptx
+++ b/kombinatorik-praesentation/kombinatorik_praesentation.pptx
@@ -729,7 +729,7 @@
           <a:lstStyle/>
           <a:p>
             <a:r>
-              <a:t>Person B enthüllt die Auflösung: 14! = 87.178.291.200 ≈ 87 Milliarden! Den 'Mittelalter-Vergleich' als Anker verwenden: seit dem Jahr 738 n.Chr. eine Reihenfolge pro Sekunde – und man wäre gerade fertig. Kurzes 'WOW' abwarten. Überleitung zu Person C für Runde 2.</a:t>
+              <a:t>Person B enthüllt die Auflösung: 15! = 1.307.674.368.000 ≈ 1,3 Billionen! Den 'Steinzeit-Vergleich' als Anker verwenden: seit ca. 39.000 v. Chr. eine Reihenfolge pro Sekunde – und man wäre gerade fertig (Homo sapiens war damals gerade auf dem Weg nach Europa!). Kurzes 'WOW' abwarten. Überleitung zu Person C für Runde 2.</a:t>
             </a:r>
           </a:p>
         </p:txBody>
@@ -1499,7 +1499,7 @@
           <a:lstStyle/>
           <a:p>
             <a:r>
-              <a:t>Person B erklärt Kombination ohne Wiederholung am Handynummer-Beispiel: 14 Schüler:innen, Reihenfolge egal → C(14,2) = 91 Austausche! Viele Leute erwarten ~14 oder ~28 – 91 überrascht. Das ist die Auflösung von Frage 2! Dann Kombination MIT Wiederholung (Eisbecher). Überleitung zu Person C.</a:t>
+              <a:t>Person B erklärt Kombination ohne Wiederholung am Handynummer-Beispiel: 15 Schüler:innen, Reihenfolge egal → C(15,2) = 105 Austausche! Viele Leute erwarten ~15 oder ~30 – 105 überrascht. Das ist die Auflösung von Frage 2! Dann Kombination MIT Wiederholung (Eisbecher). Überleitung zu Person C.</a:t>
             </a:r>
           </a:p>
         </p:txBody>
@@ -4711,7 +4711,7 @@
     <p:bg>
       <p:bgPr>
         <a:solidFill>
-          <a:srgbClr val="1B3A5C"/>
+          <a:srgbClr val="1E3A8A"/>
         </a:solidFill>
         <a:effectLst/>
       </p:bgPr>
@@ -4738,7 +4738,7 @@
             <a:avLst/>
           </a:prstGeom>
           <a:solidFill>
-            <a:srgbClr val="3D6EA5"/>
+            <a:srgbClr val="2563EB"/>
           </a:solidFill>
           <a:ln>
             <a:noFill/>
@@ -4782,7 +4782,7 @@
             <a:avLst/>
           </a:prstGeom>
           <a:solidFill>
-            <a:srgbClr val="F28C3C"/>
+            <a:srgbClr val="EA580C"/>
           </a:solidFill>
           <a:ln>
             <a:noFill/>
@@ -4826,7 +4826,7 @@
             <a:avLst/>
           </a:prstGeom>
           <a:solidFill>
-            <a:srgbClr val="F6C84C"/>
+            <a:srgbClr val="FBBF24"/>
           </a:solidFill>
           <a:ln>
             <a:noFill/>
@@ -4883,7 +4883,7 @@
             <a:r>
               <a:rPr sz="1600" b="1" i="0">
                 <a:solidFill>
-                  <a:srgbClr val="F6C84C"/>
+                  <a:srgbClr val="FBBF24"/>
                 </a:solidFill>
                 <a:latin typeface="Calibri"/>
               </a:rPr>
@@ -4957,7 +4957,7 @@
             <a:r>
               <a:rPr sz="2200" b="0" i="1">
                 <a:solidFill>
-                  <a:srgbClr val="E8F1FA"/>
+                  <a:srgbClr val="EFF6FF"/>
                 </a:solidFill>
                 <a:latin typeface="Calibri"/>
               </a:rPr>
@@ -5031,7 +5031,7 @@
             <a:r>
               <a:rPr sz="1300" b="0" i="0">
                 <a:solidFill>
-                  <a:srgbClr val="8A96A6"/>
+                  <a:srgbClr val="64748B"/>
                 </a:solidFill>
                 <a:latin typeface="Calibri"/>
               </a:rPr>
@@ -5054,7 +5054,7 @@
     <p:bg>
       <p:bgPr>
         <a:solidFill>
-          <a:srgbClr val="FAFBFC"/>
+          <a:srgbClr val="F0F4FF"/>
         </a:solidFill>
         <a:effectLst/>
       </p:bgPr>
@@ -5075,13 +5075,13 @@
         <p:spPr>
           <a:xfrm>
             <a:off x="0" y="0"/>
-            <a:ext cx="12191695" cy="1051560"/>
+            <a:ext cx="12191695" cy="1024128"/>
           </a:xfrm>
           <a:prstGeom prst="rect">
             <a:avLst/>
           </a:prstGeom>
           <a:solidFill>
-            <a:srgbClr val="1B3A5C"/>
+            <a:srgbClr val="0F172A"/>
           </a:solidFill>
           <a:ln>
             <a:noFill/>
@@ -5112,13 +5112,57 @@
       </p:sp>
       <p:sp>
         <p:nvSpPr>
-          <p:cNvPr id="3" name="TextBox 2"/>
+          <p:cNvPr id="3" name="Rectangle 2"/>
+          <p:cNvSpPr/>
+          <p:nvPr/>
+        </p:nvSpPr>
+        <p:spPr>
+          <a:xfrm>
+            <a:off x="0" y="0"/>
+            <a:ext cx="64008" cy="1024128"/>
+          </a:xfrm>
+          <a:prstGeom prst="rect">
+            <a:avLst/>
+          </a:prstGeom>
+          <a:solidFill>
+            <a:srgbClr val="EA580C"/>
+          </a:solidFill>
+          <a:ln>
+            <a:noFill/>
+          </a:ln>
+          <a:effectLst/>
+        </p:spPr>
+        <p:style>
+          <a:lnRef idx="1">
+            <a:schemeClr val="accent1"/>
+          </a:lnRef>
+          <a:fillRef idx="3">
+            <a:schemeClr val="accent1"/>
+          </a:fillRef>
+          <a:effectRef idx="2">
+            <a:schemeClr val="accent1"/>
+          </a:effectRef>
+          <a:fontRef idx="minor">
+            <a:schemeClr val="lt1"/>
+          </a:fontRef>
+        </p:style>
+        <p:txBody>
+          <a:bodyPr rtlCol="0" anchor="ctr"/>
+          <a:lstStyle/>
+          <a:p>
+            <a:pPr algn="ctr"/>
+          </a:p>
+        </p:txBody>
+      </p:sp>
+      <p:sp>
+        <p:nvSpPr>
+          <p:cNvPr id="4" name="TextBox 3"/>
           <p:cNvSpPr txBox="1"/>
           <p:nvPr/>
         </p:nvSpPr>
         <p:spPr>
           <a:xfrm>
-            <a:off x="457200" y="91440"/>
+            <a:off x="228600" y="73152"/>
             <a:ext cx="9418320" cy="914400"/>
           </a:xfrm>
           <a:prstGeom prst="rect">
@@ -5136,9 +5180,9 @@
               <a:buNone/>
             </a:pPr>
             <a:r>
-              <a:rPr sz="1300" b="1">
-                <a:solidFill>
-                  <a:srgbClr val="F6C84C"/>
+              <a:rPr sz="1200" b="1">
+                <a:solidFill>
+                  <a:srgbClr val="FBBF24"/>
                 </a:solidFill>
                 <a:latin typeface="Calibri"/>
               </a:rPr>
@@ -5163,7 +5207,7 @@
       </p:sp>
       <p:sp>
         <p:nvSpPr>
-          <p:cNvPr id="4" name="Rounded Rectangle 3"/>
+          <p:cNvPr id="5" name="Rounded Rectangle 4"/>
           <p:cNvSpPr/>
           <p:nvPr/>
         </p:nvSpPr>
@@ -5209,7 +5253,7 @@
             <a:r>
               <a:rPr sz="1300" b="1">
                 <a:solidFill>
-                  <a:srgbClr val="3D6EA5"/>
+                  <a:srgbClr val="2563EB"/>
                 </a:solidFill>
                 <a:latin typeface="Calibri"/>
               </a:rPr>
@@ -5220,7 +5264,7 @@
       </p:sp>
       <p:sp>
         <p:nvSpPr>
-          <p:cNvPr id="5" name="TextBox 4"/>
+          <p:cNvPr id="6" name="TextBox 5"/>
           <p:cNvSpPr txBox="1"/>
           <p:nvPr/>
         </p:nvSpPr>
@@ -5246,7 +5290,7 @@
             <a:r>
               <a:rPr sz="4400" b="1" i="0">
                 <a:solidFill>
-                  <a:srgbClr val="1B3A5C"/>
+                  <a:srgbClr val="1E3A8A"/>
                 </a:solidFill>
                 <a:latin typeface="Calibri"/>
               </a:rPr>
@@ -5257,7 +5301,7 @@
       </p:sp>
       <p:sp>
         <p:nvSpPr>
-          <p:cNvPr id="6" name="Rounded Rectangle 5"/>
+          <p:cNvPr id="7" name="Rounded Rectangle 6"/>
           <p:cNvSpPr/>
           <p:nvPr/>
         </p:nvSpPr>
@@ -5270,11 +5314,11 @@
             <a:avLst/>
           </a:prstGeom>
           <a:solidFill>
-            <a:srgbClr val="E8F1FA"/>
+            <a:srgbClr val="EFF6FF"/>
           </a:solidFill>
           <a:ln w="15875">
             <a:solidFill>
-              <a:srgbClr val="3D6EA5"/>
+              <a:srgbClr val="2563EB"/>
             </a:solidFill>
           </a:ln>
           <a:effectLst/>
@@ -5303,7 +5347,7 @@
       </p:sp>
       <p:sp>
         <p:nvSpPr>
-          <p:cNvPr id="7" name="TextBox 6"/>
+          <p:cNvPr id="8" name="TextBox 7"/>
           <p:cNvSpPr txBox="1"/>
           <p:nvPr/>
         </p:nvSpPr>
@@ -5329,7 +5373,7 @@
             <a:r>
               <a:rPr sz="2200" b="1" i="0">
                 <a:solidFill>
-                  <a:srgbClr val="1B3A5C"/>
+                  <a:srgbClr val="1E3A8A"/>
                 </a:solidFill>
                 <a:latin typeface="Calibri"/>
               </a:rPr>
@@ -5340,7 +5384,7 @@
       </p:sp>
       <p:sp>
         <p:nvSpPr>
-          <p:cNvPr id="8" name="TextBox 7"/>
+          <p:cNvPr id="9" name="TextBox 8"/>
           <p:cNvSpPr txBox="1"/>
           <p:nvPr/>
         </p:nvSpPr>
@@ -5365,7 +5409,7 @@
                 <a:spcPts val="1200"/>
               </a:spcAft>
               <a:buClr>
-                <a:srgbClr val="F28C3C"/>
+                <a:srgbClr val="EA580C"/>
               </a:buClr>
               <a:buFont typeface="Arial"/>
               <a:buChar char="•"/>
@@ -5373,7 +5417,7 @@
             <a:r>
               <a:rPr sz="1800">
                 <a:solidFill>
-                  <a:srgbClr val="27303A"/>
+                  <a:srgbClr val="0F172A"/>
                 </a:solidFill>
                 <a:latin typeface="Calibri"/>
               </a:rPr>
@@ -5386,7 +5430,7 @@
                 <a:spcPts val="1200"/>
               </a:spcAft>
               <a:buClr>
-                <a:srgbClr val="F28C3C"/>
+                <a:srgbClr val="EA580C"/>
               </a:buClr>
               <a:buFont typeface="Arial"/>
               <a:buChar char="•"/>
@@ -5394,7 +5438,7 @@
             <a:r>
               <a:rPr sz="1800">
                 <a:solidFill>
-                  <a:srgbClr val="27303A"/>
+                  <a:srgbClr val="0F172A"/>
                 </a:solidFill>
                 <a:latin typeface="Calibri"/>
               </a:rPr>
@@ -5407,7 +5451,7 @@
                 <a:spcPts val="1200"/>
               </a:spcAft>
               <a:buClr>
-                <a:srgbClr val="F28C3C"/>
+                <a:srgbClr val="EA580C"/>
               </a:buClr>
               <a:buFont typeface="Arial"/>
               <a:buChar char="•"/>
@@ -5415,7 +5459,7 @@
             <a:r>
               <a:rPr sz="1800">
                 <a:solidFill>
-                  <a:srgbClr val="27303A"/>
+                  <a:srgbClr val="0F172A"/>
                 </a:solidFill>
                 <a:latin typeface="Calibri"/>
               </a:rPr>
@@ -5428,7 +5472,7 @@
                 <a:spcPts val="1200"/>
               </a:spcAft>
               <a:buClr>
-                <a:srgbClr val="F28C3C"/>
+                <a:srgbClr val="EA580C"/>
               </a:buClr>
               <a:buFont typeface="Arial"/>
               <a:buChar char="•"/>
@@ -5436,7 +5480,7 @@
             <a:r>
               <a:rPr sz="1800">
                 <a:solidFill>
-                  <a:srgbClr val="27303A"/>
+                  <a:srgbClr val="0F172A"/>
                 </a:solidFill>
                 <a:latin typeface="Calibri"/>
               </a:rPr>
@@ -5447,7 +5491,7 @@
       </p:sp>
       <p:sp>
         <p:nvSpPr>
-          <p:cNvPr id="9" name="TextBox 8"/>
+          <p:cNvPr id="10" name="TextBox 9"/>
           <p:cNvSpPr txBox="1"/>
           <p:nvPr/>
         </p:nvSpPr>
@@ -5473,7 +5517,7 @@
             <a:r>
               <a:rPr sz="2400" b="1" i="0">
                 <a:solidFill>
-                  <a:srgbClr val="F28C3C"/>
+                  <a:srgbClr val="EA580C"/>
                 </a:solidFill>
                 <a:latin typeface="Calibri"/>
               </a:rPr>
@@ -5484,7 +5528,7 @@
       </p:sp>
       <p:sp>
         <p:nvSpPr>
-          <p:cNvPr id="10" name="TextBox 9"/>
+          <p:cNvPr id="11" name="TextBox 10"/>
           <p:cNvSpPr txBox="1"/>
           <p:nvPr/>
         </p:nvSpPr>
@@ -5510,7 +5554,7 @@
             <a:r>
               <a:rPr sz="1100" b="0" i="0">
                 <a:solidFill>
-                  <a:srgbClr val="8A96A6"/>
+                  <a:srgbClr val="64748B"/>
                 </a:solidFill>
                 <a:latin typeface="Calibri"/>
               </a:rPr>
@@ -5533,7 +5577,7 @@
     <p:bg>
       <p:bgPr>
         <a:solidFill>
-          <a:srgbClr val="FAFBFC"/>
+          <a:srgbClr val="F0F4FF"/>
         </a:solidFill>
         <a:effectLst/>
       </p:bgPr>
@@ -5554,13 +5598,13 @@
         <p:spPr>
           <a:xfrm>
             <a:off x="0" y="0"/>
-            <a:ext cx="12191695" cy="1051560"/>
+            <a:ext cx="12191695" cy="1024128"/>
           </a:xfrm>
           <a:prstGeom prst="rect">
             <a:avLst/>
           </a:prstGeom>
           <a:solidFill>
-            <a:srgbClr val="1B3A5C"/>
+            <a:srgbClr val="0F172A"/>
           </a:solidFill>
           <a:ln>
             <a:noFill/>
@@ -5591,13 +5635,57 @@
       </p:sp>
       <p:sp>
         <p:nvSpPr>
-          <p:cNvPr id="3" name="TextBox 2"/>
+          <p:cNvPr id="3" name="Rectangle 2"/>
+          <p:cNvSpPr/>
+          <p:nvPr/>
+        </p:nvSpPr>
+        <p:spPr>
+          <a:xfrm>
+            <a:off x="0" y="0"/>
+            <a:ext cx="64008" cy="1024128"/>
+          </a:xfrm>
+          <a:prstGeom prst="rect">
+            <a:avLst/>
+          </a:prstGeom>
+          <a:solidFill>
+            <a:srgbClr val="EA580C"/>
+          </a:solidFill>
+          <a:ln>
+            <a:noFill/>
+          </a:ln>
+          <a:effectLst/>
+        </p:spPr>
+        <p:style>
+          <a:lnRef idx="1">
+            <a:schemeClr val="accent1"/>
+          </a:lnRef>
+          <a:fillRef idx="3">
+            <a:schemeClr val="accent1"/>
+          </a:fillRef>
+          <a:effectRef idx="2">
+            <a:schemeClr val="accent1"/>
+          </a:effectRef>
+          <a:fontRef idx="minor">
+            <a:schemeClr val="lt1"/>
+          </a:fontRef>
+        </p:style>
+        <p:txBody>
+          <a:bodyPr rtlCol="0" anchor="ctr"/>
+          <a:lstStyle/>
+          <a:p>
+            <a:pPr algn="ctr"/>
+          </a:p>
+        </p:txBody>
+      </p:sp>
+      <p:sp>
+        <p:nvSpPr>
+          <p:cNvPr id="4" name="TextBox 3"/>
           <p:cNvSpPr txBox="1"/>
           <p:nvPr/>
         </p:nvSpPr>
         <p:spPr>
           <a:xfrm>
-            <a:off x="457200" y="91440"/>
+            <a:off x="228600" y="73152"/>
             <a:ext cx="9418320" cy="914400"/>
           </a:xfrm>
           <a:prstGeom prst="rect">
@@ -5615,9 +5703,9 @@
               <a:buNone/>
             </a:pPr>
             <a:r>
-              <a:rPr sz="1300" b="1">
-                <a:solidFill>
-                  <a:srgbClr val="F6C84C"/>
+              <a:rPr sz="1200" b="1">
+                <a:solidFill>
+                  <a:srgbClr val="FBBF24"/>
                 </a:solidFill>
                 <a:latin typeface="Calibri"/>
               </a:rPr>
@@ -5642,7 +5730,7 @@
       </p:sp>
       <p:sp>
         <p:nvSpPr>
-          <p:cNvPr id="4" name="Rounded Rectangle 3"/>
+          <p:cNvPr id="5" name="Rounded Rectangle 4"/>
           <p:cNvSpPr/>
           <p:nvPr/>
         </p:nvSpPr>
@@ -5688,7 +5776,7 @@
             <a:r>
               <a:rPr sz="1300" b="1">
                 <a:solidFill>
-                  <a:srgbClr val="1B3A5C"/>
+                  <a:srgbClr val="1E3A8A"/>
                 </a:solidFill>
                 <a:latin typeface="Calibri"/>
               </a:rPr>
@@ -5699,7 +5787,7 @@
       </p:sp>
       <p:sp>
         <p:nvSpPr>
-          <p:cNvPr id="5" name="Rounded Rectangle 4"/>
+          <p:cNvPr id="6" name="Rounded Rectangle 5"/>
           <p:cNvSpPr/>
           <p:nvPr/>
         </p:nvSpPr>
@@ -5712,11 +5800,11 @@
             <a:avLst/>
           </a:prstGeom>
           <a:solidFill>
-            <a:srgbClr val="E8F1FA"/>
+            <a:srgbClr val="EFF6FF"/>
           </a:solidFill>
           <a:ln w="15875">
             <a:solidFill>
-              <a:srgbClr val="3D6EA5"/>
+              <a:srgbClr val="2563EB"/>
             </a:solidFill>
           </a:ln>
           <a:effectLst/>
@@ -5745,7 +5833,7 @@
       </p:sp>
       <p:sp>
         <p:nvSpPr>
-          <p:cNvPr id="6" name="TextBox 5"/>
+          <p:cNvPr id="7" name="TextBox 6"/>
           <p:cNvSpPr txBox="1"/>
           <p:nvPr/>
         </p:nvSpPr>
@@ -5771,7 +5859,7 @@
             <a:r>
               <a:rPr sz="2400" b="1" i="0">
                 <a:solidFill>
-                  <a:srgbClr val="1B3A5C"/>
+                  <a:srgbClr val="1E3A8A"/>
                 </a:solidFill>
                 <a:latin typeface="Calibri"/>
               </a:rPr>
@@ -5782,7 +5870,7 @@
       </p:sp>
       <p:sp>
         <p:nvSpPr>
-          <p:cNvPr id="7" name="TextBox 6"/>
+          <p:cNvPr id="8" name="TextBox 7"/>
           <p:cNvSpPr txBox="1"/>
           <p:nvPr/>
         </p:nvSpPr>
@@ -5808,7 +5896,7 @@
             <a:r>
               <a:rPr sz="2800" b="1" i="0">
                 <a:solidFill>
-                  <a:srgbClr val="27303A"/>
+                  <a:srgbClr val="0F172A"/>
                 </a:solidFill>
                 <a:latin typeface="Calibri"/>
               </a:rPr>
@@ -5822,18 +5910,18 @@
             <a:r>
               <a:rPr sz="2800" b="1" i="0">
                 <a:solidFill>
-                  <a:srgbClr val="27303A"/>
-                </a:solidFill>
-                <a:latin typeface="Calibri"/>
-              </a:rPr>
-              <a:t>für euch 14 Schüler:innen?</a:t>
-            </a:r>
-          </a:p>
-        </p:txBody>
-      </p:sp>
-      <p:sp>
-        <p:nvSpPr>
-          <p:cNvPr id="8" name="TextBox 7"/>
+                  <a:srgbClr val="0F172A"/>
+                </a:solidFill>
+                <a:latin typeface="Calibri"/>
+              </a:rPr>
+              <a:t>für euch 15 Schüler:innen?</a:t>
+            </a:r>
+          </a:p>
+        </p:txBody>
+      </p:sp>
+      <p:sp>
+        <p:nvSpPr>
+          <p:cNvPr id="9" name="TextBox 8"/>
           <p:cNvSpPr txBox="1"/>
           <p:nvPr/>
         </p:nvSpPr>
@@ -5859,7 +5947,7 @@
             <a:r>
               <a:rPr sz="6000" b="1">
                 <a:solidFill>
-                  <a:srgbClr val="F28C3C"/>
+                  <a:srgbClr val="EA580C"/>
                 </a:solidFill>
                 <a:latin typeface="Calibri"/>
               </a:rPr>
@@ -5868,7 +5956,7 @@
             <a:r>
               <a:rPr sz="6000" b="1">
                 <a:solidFill>
-                  <a:srgbClr val="F28C3C"/>
+                  <a:srgbClr val="EA580C"/>
                 </a:solidFill>
                 <a:latin typeface="Calibri"/>
               </a:rPr>
@@ -5877,7 +5965,7 @@
             <a:r>
               <a:rPr sz="6000" b="1">
                 <a:solidFill>
-                  <a:srgbClr val="F28C3C"/>
+                  <a:srgbClr val="EA580C"/>
                 </a:solidFill>
                 <a:latin typeface="Calibri"/>
               </a:rPr>
@@ -5886,7 +5974,7 @@
             <a:r>
               <a:rPr sz="6000" b="1">
                 <a:solidFill>
-                  <a:srgbClr val="F28C3C"/>
+                  <a:srgbClr val="EA580C"/>
                 </a:solidFill>
                 <a:latin typeface="Calibri"/>
               </a:rPr>
@@ -5895,7 +5983,7 @@
             <a:r>
               <a:rPr sz="6000" b="1">
                 <a:solidFill>
-                  <a:srgbClr val="F28C3C"/>
+                  <a:srgbClr val="EA580C"/>
                 </a:solidFill>
                 <a:latin typeface="Calibri"/>
               </a:rPr>
@@ -5906,7 +5994,7 @@
       </p:sp>
       <p:sp>
         <p:nvSpPr>
-          <p:cNvPr id="9" name="TextBox 8"/>
+          <p:cNvPr id="10" name="TextBox 9"/>
           <p:cNvSpPr txBox="1"/>
           <p:nvPr/>
         </p:nvSpPr>
@@ -5932,7 +6020,7 @@
             <a:r>
               <a:rPr sz="1700" b="0" i="1">
                 <a:solidFill>
-                  <a:srgbClr val="8A96A6"/>
+                  <a:srgbClr val="64748B"/>
                 </a:solidFill>
                 <a:latin typeface="Calibri"/>
               </a:rPr>
@@ -5943,7 +6031,7 @@
       </p:sp>
       <p:sp>
         <p:nvSpPr>
-          <p:cNvPr id="10" name="TextBox 9"/>
+          <p:cNvPr id="11" name="TextBox 10"/>
           <p:cNvSpPr txBox="1"/>
           <p:nvPr/>
         </p:nvSpPr>
@@ -5969,7 +6057,7 @@
             <a:r>
               <a:rPr sz="1100" b="0" i="0">
                 <a:solidFill>
-                  <a:srgbClr val="8A96A6"/>
+                  <a:srgbClr val="64748B"/>
                 </a:solidFill>
                 <a:latin typeface="Calibri"/>
               </a:rPr>
@@ -5992,7 +6080,7 @@
     <p:bg>
       <p:bgPr>
         <a:solidFill>
-          <a:srgbClr val="FAFBFC"/>
+          <a:srgbClr val="F0F4FF"/>
         </a:solidFill>
         <a:effectLst/>
       </p:bgPr>
@@ -6013,13 +6101,13 @@
         <p:spPr>
           <a:xfrm>
             <a:off x="0" y="0"/>
-            <a:ext cx="12191695" cy="1051560"/>
+            <a:ext cx="12191695" cy="1024128"/>
           </a:xfrm>
           <a:prstGeom prst="rect">
             <a:avLst/>
           </a:prstGeom>
           <a:solidFill>
-            <a:srgbClr val="1B3A5C"/>
+            <a:srgbClr val="0F172A"/>
           </a:solidFill>
           <a:ln>
             <a:noFill/>
@@ -6050,13 +6138,57 @@
       </p:sp>
       <p:sp>
         <p:nvSpPr>
-          <p:cNvPr id="3" name="TextBox 2"/>
+          <p:cNvPr id="3" name="Rectangle 2"/>
+          <p:cNvSpPr/>
+          <p:nvPr/>
+        </p:nvSpPr>
+        <p:spPr>
+          <a:xfrm>
+            <a:off x="0" y="0"/>
+            <a:ext cx="64008" cy="1024128"/>
+          </a:xfrm>
+          <a:prstGeom prst="rect">
+            <a:avLst/>
+          </a:prstGeom>
+          <a:solidFill>
+            <a:srgbClr val="EA580C"/>
+          </a:solidFill>
+          <a:ln>
+            <a:noFill/>
+          </a:ln>
+          <a:effectLst/>
+        </p:spPr>
+        <p:style>
+          <a:lnRef idx="1">
+            <a:schemeClr val="accent1"/>
+          </a:lnRef>
+          <a:fillRef idx="3">
+            <a:schemeClr val="accent1"/>
+          </a:fillRef>
+          <a:effectRef idx="2">
+            <a:schemeClr val="accent1"/>
+          </a:effectRef>
+          <a:fontRef idx="minor">
+            <a:schemeClr val="lt1"/>
+          </a:fontRef>
+        </p:style>
+        <p:txBody>
+          <a:bodyPr rtlCol="0" anchor="ctr"/>
+          <a:lstStyle/>
+          <a:p>
+            <a:pPr algn="ctr"/>
+          </a:p>
+        </p:txBody>
+      </p:sp>
+      <p:sp>
+        <p:nvSpPr>
+          <p:cNvPr id="4" name="TextBox 3"/>
           <p:cNvSpPr txBox="1"/>
           <p:nvPr/>
         </p:nvSpPr>
         <p:spPr>
           <a:xfrm>
-            <a:off x="457200" y="91440"/>
+            <a:off x="228600" y="73152"/>
             <a:ext cx="9418320" cy="914400"/>
           </a:xfrm>
           <a:prstGeom prst="rect">
@@ -6074,13 +6206,13 @@
               <a:buNone/>
             </a:pPr>
             <a:r>
-              <a:rPr sz="1300" b="1">
-                <a:solidFill>
-                  <a:srgbClr val="F6C84C"/>
-                </a:solidFill>
-                <a:latin typeface="Calibri"/>
-              </a:rPr>
-              <a:t>14! – Permutation</a:t>
+              <a:rPr sz="1200" b="1">
+                <a:solidFill>
+                  <a:srgbClr val="FBBF24"/>
+                </a:solidFill>
+                <a:latin typeface="Calibri"/>
+              </a:rPr>
+              <a:t>15! – Permutation</a:t>
             </a:r>
           </a:p>
           <a:p>
@@ -6101,7 +6233,7 @@
       </p:sp>
       <p:sp>
         <p:nvSpPr>
-          <p:cNvPr id="4" name="Rounded Rectangle 3"/>
+          <p:cNvPr id="5" name="Rounded Rectangle 4"/>
           <p:cNvSpPr/>
           <p:nvPr/>
         </p:nvSpPr>
@@ -6147,7 +6279,7 @@
             <a:r>
               <a:rPr sz="1300" b="1">
                 <a:solidFill>
-                  <a:srgbClr val="F28C3C"/>
+                  <a:srgbClr val="EA580C"/>
                 </a:solidFill>
                 <a:latin typeface="Calibri"/>
               </a:rPr>
@@ -6158,7 +6290,7 @@
       </p:sp>
       <p:pic>
         <p:nvPicPr>
-          <p:cNvPr id="5" name="Picture 4" descr="f_klasse_perm.png"/>
+          <p:cNvPr id="6" name="Picture 5" descr="f_klasse_perm.png"/>
           <p:cNvPicPr>
             <a:picLocks noChangeAspect="1"/>
           </p:cNvPicPr>
@@ -6172,8 +6304,8 @@
         </p:blipFill>
         <p:spPr>
           <a:xfrm>
-            <a:off x="457200" y="1295568"/>
-            <a:ext cx="11277295" cy="1066464"/>
+            <a:off x="457200" y="1335517"/>
+            <a:ext cx="11277295" cy="986566"/>
           </a:xfrm>
           <a:prstGeom prst="rect">
             <a:avLst/>
@@ -6182,7 +6314,7 @@
       </p:pic>
       <p:sp>
         <p:nvSpPr>
-          <p:cNvPr id="6" name="TextBox 5"/>
+          <p:cNvPr id="7" name="TextBox 6"/>
           <p:cNvSpPr txBox="1"/>
           <p:nvPr/>
         </p:nvSpPr>
@@ -6208,18 +6340,18 @@
             <a:r>
               <a:rPr sz="1700" b="0" i="0">
                 <a:solidFill>
-                  <a:srgbClr val="27303A"/>
-                </a:solidFill>
-                <a:latin typeface="Calibri"/>
-              </a:rPr>
-              <a:t>Das entspricht der Permutation von 14 Personen: P(14) = 14!</a:t>
-            </a:r>
-          </a:p>
-        </p:txBody>
-      </p:sp>
-      <p:sp>
-        <p:nvSpPr>
-          <p:cNvPr id="7" name="Rounded Rectangle 6"/>
+                  <a:srgbClr val="0F172A"/>
+                </a:solidFill>
+                <a:latin typeface="Calibri"/>
+              </a:rPr>
+              <a:t>Das entspricht der Permutation von 15 Personen: P(15) = 15!</a:t>
+            </a:r>
+          </a:p>
+        </p:txBody>
+      </p:sp>
+      <p:sp>
+        <p:nvSpPr>
+          <p:cNvPr id="8" name="Rounded Rectangle 7"/>
           <p:cNvSpPr/>
           <p:nvPr/>
         </p:nvSpPr>
@@ -6232,11 +6364,11 @@
             <a:avLst/>
           </a:prstGeom>
           <a:solidFill>
-            <a:srgbClr val="E8F1FA"/>
+            <a:srgbClr val="EFF6FF"/>
           </a:solidFill>
           <a:ln w="15875">
             <a:solidFill>
-              <a:srgbClr val="3D6EA5"/>
+              <a:srgbClr val="2563EB"/>
             </a:solidFill>
           </a:ln>
           <a:effectLst/>
@@ -6265,7 +6397,7 @@
       </p:sp>
       <p:sp>
         <p:nvSpPr>
-          <p:cNvPr id="8" name="Rounded Rectangle 7"/>
+          <p:cNvPr id="9" name="Rounded Rectangle 8"/>
           <p:cNvSpPr/>
           <p:nvPr/>
         </p:nvSpPr>
@@ -6280,7 +6412,7 @@
             </a:avLst>
           </a:prstGeom>
           <a:solidFill>
-            <a:srgbClr val="1B3A5C"/>
+            <a:srgbClr val="1E3A8A"/>
           </a:solidFill>
           <a:ln>
             <a:noFill/>
@@ -6322,7 +6454,7 @@
       </p:sp>
       <p:sp>
         <p:nvSpPr>
-          <p:cNvPr id="9" name="TextBox 8"/>
+          <p:cNvPr id="10" name="TextBox 9"/>
           <p:cNvSpPr txBox="1"/>
           <p:nvPr/>
         </p:nvSpPr>
@@ -6347,7 +6479,7 @@
                 <a:spcPts val="1000"/>
               </a:spcAft>
               <a:buClr>
-                <a:srgbClr val="F28C3C"/>
+                <a:srgbClr val="EA580C"/>
               </a:buClr>
               <a:buFont typeface="Arial"/>
               <a:buChar char="•"/>
@@ -6355,7 +6487,7 @@
             <a:r>
               <a:rPr sz="1600">
                 <a:solidFill>
-                  <a:srgbClr val="27303A"/>
+                  <a:srgbClr val="0F172A"/>
                 </a:solidFill>
                 <a:latin typeface="Calibri"/>
               </a:rPr>
@@ -6368,7 +6500,7 @@
                 <a:spcPts val="1000"/>
               </a:spcAft>
               <a:buClr>
-                <a:srgbClr val="F28C3C"/>
+                <a:srgbClr val="EA580C"/>
               </a:buClr>
               <a:buFont typeface="Arial"/>
               <a:buChar char="•"/>
@@ -6376,11 +6508,11 @@
             <a:r>
               <a:rPr sz="1600">
                 <a:solidFill>
-                  <a:srgbClr val="27303A"/>
-                </a:solidFill>
-                <a:latin typeface="Calibri"/>
-              </a:rPr>
-              <a:t>≈ 2.764 Jahre, um alle durchzuprobieren</a:t>
+                  <a:srgbClr val="0F172A"/>
+                </a:solidFill>
+                <a:latin typeface="Calibri"/>
+              </a:rPr>
+              <a:t>≈ 41.466 Jahre, um alle durchzuprobieren</a:t>
             </a:r>
           </a:p>
           <a:p>
@@ -6389,7 +6521,7 @@
                 <a:spcPts val="1000"/>
               </a:spcAft>
               <a:buClr>
-                <a:srgbClr val="F28C3C"/>
+                <a:srgbClr val="EA580C"/>
               </a:buClr>
               <a:buFont typeface="Arial"/>
               <a:buChar char="•"/>
@@ -6397,11 +6529,11 @@
             <a:r>
               <a:rPr sz="1600">
                 <a:solidFill>
-                  <a:srgbClr val="27303A"/>
-                </a:solidFill>
-                <a:latin typeface="Calibri"/>
-              </a:rPr>
-              <a:t>Beginn: ca. 738 n. Chr. (Mittelalter!)</a:t>
+                  <a:srgbClr val="0F172A"/>
+                </a:solidFill>
+                <a:latin typeface="Calibri"/>
+              </a:rPr>
+              <a:t>Beginn: ca. 39.000 v. Chr. (Steinzeit!)</a:t>
             </a:r>
           </a:p>
           <a:p>
@@ -6410,7 +6542,7 @@
                 <a:spcPts val="1000"/>
               </a:spcAft>
               <a:buClr>
-                <a:srgbClr val="F28C3C"/>
+                <a:srgbClr val="EA580C"/>
               </a:buClr>
               <a:buFont typeface="Arial"/>
               <a:buChar char="•"/>
@@ -6418,7 +6550,7 @@
             <a:r>
               <a:rPr sz="1600">
                 <a:solidFill>
-                  <a:srgbClr val="27303A"/>
+                  <a:srgbClr val="0F172A"/>
                 </a:solidFill>
                 <a:latin typeface="Calibri"/>
               </a:rPr>
@@ -6429,7 +6561,7 @@
       </p:sp>
       <p:sp>
         <p:nvSpPr>
-          <p:cNvPr id="10" name="Rounded Rectangle 9"/>
+          <p:cNvPr id="11" name="Rounded Rectangle 10"/>
           <p:cNvSpPr/>
           <p:nvPr/>
         </p:nvSpPr>
@@ -6442,11 +6574,11 @@
             <a:avLst/>
           </a:prstGeom>
           <a:solidFill>
-            <a:srgbClr val="F6C84C"/>
+            <a:srgbClr val="FBBF24"/>
           </a:solidFill>
           <a:ln w="15875">
             <a:solidFill>
-              <a:srgbClr val="F28C3C"/>
+              <a:srgbClr val="EA580C"/>
             </a:solidFill>
           </a:ln>
           <a:effectLst/>
@@ -6475,7 +6607,7 @@
       </p:sp>
       <p:sp>
         <p:nvSpPr>
-          <p:cNvPr id="11" name="Rounded Rectangle 10"/>
+          <p:cNvPr id="12" name="Rounded Rectangle 11"/>
           <p:cNvSpPr/>
           <p:nvPr/>
         </p:nvSpPr>
@@ -6490,7 +6622,7 @@
             </a:avLst>
           </a:prstGeom>
           <a:solidFill>
-            <a:srgbClr val="F28C3C"/>
+            <a:srgbClr val="EA580C"/>
           </a:solidFill>
           <a:ln>
             <a:noFill/>
@@ -6532,7 +6664,7 @@
       </p:sp>
       <p:sp>
         <p:nvSpPr>
-          <p:cNvPr id="12" name="TextBox 11"/>
+          <p:cNvPr id="13" name="TextBox 12"/>
           <p:cNvSpPr txBox="1"/>
           <p:nvPr/>
         </p:nvSpPr>
@@ -6558,11 +6690,11 @@
             <a:r>
               <a:rPr sz="1700" b="0" i="0">
                 <a:solidFill>
-                  <a:srgbClr val="1B3A5C"/>
-                </a:solidFill>
-                <a:latin typeface="Calibri"/>
-              </a:rPr>
-              <a:t>14! = 14 · 13 · 12 · ... · 2 · 1</a:t>
+                  <a:srgbClr val="1E3A8A"/>
+                </a:solidFill>
+                <a:latin typeface="Calibri"/>
+              </a:rPr>
+              <a:t>15! = 15 · 14 · 13 · ... · 2 · 1</a:t>
             </a:r>
           </a:p>
           <a:p>
@@ -6572,7 +6704,7 @@
             <a:r>
               <a:rPr sz="1700" b="0" i="0">
                 <a:solidFill>
-                  <a:srgbClr val="1B3A5C"/>
+                  <a:srgbClr val="1E3A8A"/>
                 </a:solidFill>
                 <a:latin typeface="Calibri"/>
               </a:rPr>
@@ -6586,7 +6718,7 @@
             <a:r>
               <a:rPr sz="1700" b="0" i="0">
                 <a:solidFill>
-                  <a:srgbClr val="1B3A5C"/>
+                  <a:srgbClr val="1E3A8A"/>
                 </a:solidFill>
                 <a:latin typeface="Calibri"/>
               </a:rPr>
@@ -6600,18 +6732,18 @@
             <a:r>
               <a:rPr sz="1700" b="0" i="0">
                 <a:solidFill>
-                  <a:srgbClr val="1B3A5C"/>
-                </a:solidFill>
-                <a:latin typeface="Calibri"/>
-              </a:rPr>
-              <a:t>schon 14! übersteigt 87 Milliarden!</a:t>
-            </a:r>
-          </a:p>
-        </p:txBody>
-      </p:sp>
-      <p:sp>
-        <p:nvSpPr>
-          <p:cNvPr id="13" name="TextBox 12"/>
+                  <a:srgbClr val="1E3A8A"/>
+                </a:solidFill>
+                <a:latin typeface="Calibri"/>
+              </a:rPr>
+              <a:t>schon 15! übersteigt 1,3 Billionen!</a:t>
+            </a:r>
+          </a:p>
+        </p:txBody>
+      </p:sp>
+      <p:sp>
+        <p:nvSpPr>
+          <p:cNvPr id="14" name="TextBox 13"/>
           <p:cNvSpPr txBox="1"/>
           <p:nvPr/>
         </p:nvSpPr>
@@ -6637,7 +6769,7 @@
             <a:r>
               <a:rPr sz="1100" b="0" i="0">
                 <a:solidFill>
-                  <a:srgbClr val="8A96A6"/>
+                  <a:srgbClr val="64748B"/>
                 </a:solidFill>
                 <a:latin typeface="Calibri"/>
               </a:rPr>
@@ -6660,7 +6792,7 @@
     <p:bg>
       <p:bgPr>
         <a:solidFill>
-          <a:srgbClr val="FAFBFC"/>
+          <a:srgbClr val="F0F4FF"/>
         </a:solidFill>
         <a:effectLst/>
       </p:bgPr>
@@ -6681,13 +6813,13 @@
         <p:spPr>
           <a:xfrm>
             <a:off x="0" y="0"/>
-            <a:ext cx="12191695" cy="1051560"/>
+            <a:ext cx="12191695" cy="1024128"/>
           </a:xfrm>
           <a:prstGeom prst="rect">
             <a:avLst/>
           </a:prstGeom>
           <a:solidFill>
-            <a:srgbClr val="1B3A5C"/>
+            <a:srgbClr val="0F172A"/>
           </a:solidFill>
           <a:ln>
             <a:noFill/>
@@ -6718,13 +6850,57 @@
       </p:sp>
       <p:sp>
         <p:nvSpPr>
-          <p:cNvPr id="3" name="TextBox 2"/>
+          <p:cNvPr id="3" name="Rectangle 2"/>
+          <p:cNvSpPr/>
+          <p:nvPr/>
+        </p:nvSpPr>
+        <p:spPr>
+          <a:xfrm>
+            <a:off x="0" y="0"/>
+            <a:ext cx="64008" cy="1024128"/>
+          </a:xfrm>
+          <a:prstGeom prst="rect">
+            <a:avLst/>
+          </a:prstGeom>
+          <a:solidFill>
+            <a:srgbClr val="EA580C"/>
+          </a:solidFill>
+          <a:ln>
+            <a:noFill/>
+          </a:ln>
+          <a:effectLst/>
+        </p:spPr>
+        <p:style>
+          <a:lnRef idx="1">
+            <a:schemeClr val="accent1"/>
+          </a:lnRef>
+          <a:fillRef idx="3">
+            <a:schemeClr val="accent1"/>
+          </a:fillRef>
+          <a:effectRef idx="2">
+            <a:schemeClr val="accent1"/>
+          </a:effectRef>
+          <a:fontRef idx="minor">
+            <a:schemeClr val="lt1"/>
+          </a:fontRef>
+        </p:style>
+        <p:txBody>
+          <a:bodyPr rtlCol="0" anchor="ctr"/>
+          <a:lstStyle/>
+          <a:p>
+            <a:pPr algn="ctr"/>
+          </a:p>
+        </p:txBody>
+      </p:sp>
+      <p:sp>
+        <p:nvSpPr>
+          <p:cNvPr id="4" name="TextBox 3"/>
           <p:cNvSpPr txBox="1"/>
           <p:nvPr/>
         </p:nvSpPr>
         <p:spPr>
           <a:xfrm>
-            <a:off x="457200" y="91440"/>
+            <a:off x="228600" y="73152"/>
             <a:ext cx="9418320" cy="914400"/>
           </a:xfrm>
           <a:prstGeom prst="rect">
@@ -6742,9 +6918,9 @@
               <a:buNone/>
             </a:pPr>
             <a:r>
-              <a:rPr sz="1300" b="1">
-                <a:solidFill>
-                  <a:srgbClr val="F6C84C"/>
+              <a:rPr sz="1200" b="1">
+                <a:solidFill>
+                  <a:srgbClr val="FBBF24"/>
                 </a:solidFill>
                 <a:latin typeface="Calibri"/>
               </a:rPr>
@@ -6769,7 +6945,7 @@
       </p:sp>
       <p:sp>
         <p:nvSpPr>
-          <p:cNvPr id="4" name="Rounded Rectangle 3"/>
+          <p:cNvPr id="5" name="Rounded Rectangle 4"/>
           <p:cNvSpPr/>
           <p:nvPr/>
         </p:nvSpPr>
@@ -6815,7 +6991,7 @@
             <a:r>
               <a:rPr sz="1300" b="1">
                 <a:solidFill>
-                  <a:srgbClr val="3D6EA5"/>
+                  <a:srgbClr val="2563EB"/>
                 </a:solidFill>
                 <a:latin typeface="Calibri"/>
               </a:rPr>
@@ -6826,7 +7002,7 @@
       </p:sp>
       <p:sp>
         <p:nvSpPr>
-          <p:cNvPr id="5" name="Rounded Rectangle 4"/>
+          <p:cNvPr id="6" name="Rounded Rectangle 5"/>
           <p:cNvSpPr/>
           <p:nvPr/>
         </p:nvSpPr>
@@ -6839,11 +7015,11 @@
             <a:avLst/>
           </a:prstGeom>
           <a:solidFill>
-            <a:srgbClr val="E8F1FA"/>
+            <a:srgbClr val="EFF6FF"/>
           </a:solidFill>
           <a:ln w="15875">
             <a:solidFill>
-              <a:srgbClr val="3D6EA5"/>
+              <a:srgbClr val="2563EB"/>
             </a:solidFill>
           </a:ln>
           <a:effectLst/>
@@ -6872,7 +7048,7 @@
       </p:sp>
       <p:sp>
         <p:nvSpPr>
-          <p:cNvPr id="6" name="TextBox 5"/>
+          <p:cNvPr id="7" name="TextBox 6"/>
           <p:cNvSpPr txBox="1"/>
           <p:nvPr/>
         </p:nvSpPr>
@@ -6898,7 +7074,7 @@
             <a:r>
               <a:rPr sz="2400" b="1" i="0">
                 <a:solidFill>
-                  <a:srgbClr val="1B3A5C"/>
+                  <a:srgbClr val="1E3A8A"/>
                 </a:solidFill>
                 <a:latin typeface="Calibri"/>
               </a:rPr>
@@ -6909,7 +7085,7 @@
       </p:sp>
       <p:sp>
         <p:nvSpPr>
-          <p:cNvPr id="7" name="TextBox 6"/>
+          <p:cNvPr id="8" name="TextBox 7"/>
           <p:cNvSpPr txBox="1"/>
           <p:nvPr/>
         </p:nvSpPr>
@@ -6935,7 +7111,7 @@
             <a:r>
               <a:rPr sz="2800" b="1" i="0">
                 <a:solidFill>
-                  <a:srgbClr val="27303A"/>
+                  <a:srgbClr val="0F172A"/>
                 </a:solidFill>
                 <a:latin typeface="Calibri"/>
               </a:rPr>
@@ -6949,7 +7125,7 @@
             <a:r>
               <a:rPr sz="2800" b="1" i="0">
                 <a:solidFill>
-                  <a:srgbClr val="27303A"/>
+                  <a:srgbClr val="0F172A"/>
                 </a:solidFill>
                 <a:latin typeface="Calibri"/>
               </a:rPr>
@@ -6960,7 +7136,7 @@
       </p:sp>
       <p:sp>
         <p:nvSpPr>
-          <p:cNvPr id="8" name="TextBox 7"/>
+          <p:cNvPr id="9" name="TextBox 8"/>
           <p:cNvSpPr txBox="1"/>
           <p:nvPr/>
         </p:nvSpPr>
@@ -6986,7 +7162,7 @@
             <a:r>
               <a:rPr sz="6000" b="1">
                 <a:solidFill>
-                  <a:srgbClr val="F28C3C"/>
+                  <a:srgbClr val="EA580C"/>
                 </a:solidFill>
                 <a:latin typeface="Calibri"/>
               </a:rPr>
@@ -6995,7 +7171,7 @@
             <a:r>
               <a:rPr sz="6000" b="1">
                 <a:solidFill>
-                  <a:srgbClr val="F28C3C"/>
+                  <a:srgbClr val="EA580C"/>
                 </a:solidFill>
                 <a:latin typeface="Calibri"/>
               </a:rPr>
@@ -7004,7 +7180,7 @@
             <a:r>
               <a:rPr sz="6000" b="1">
                 <a:solidFill>
-                  <a:srgbClr val="F28C3C"/>
+                  <a:srgbClr val="EA580C"/>
                 </a:solidFill>
                 <a:latin typeface="Calibri"/>
               </a:rPr>
@@ -7013,7 +7189,7 @@
             <a:r>
               <a:rPr sz="6000" b="1">
                 <a:solidFill>
-                  <a:srgbClr val="F28C3C"/>
+                  <a:srgbClr val="EA580C"/>
                 </a:solidFill>
                 <a:latin typeface="Calibri"/>
               </a:rPr>
@@ -7022,7 +7198,7 @@
             <a:r>
               <a:rPr sz="6000" b="1">
                 <a:solidFill>
-                  <a:srgbClr val="F28C3C"/>
+                  <a:srgbClr val="EA580C"/>
                 </a:solidFill>
                 <a:latin typeface="Calibri"/>
               </a:rPr>
@@ -7033,7 +7209,7 @@
       </p:sp>
       <p:sp>
         <p:nvSpPr>
-          <p:cNvPr id="9" name="TextBox 8"/>
+          <p:cNvPr id="10" name="TextBox 9"/>
           <p:cNvSpPr txBox="1"/>
           <p:nvPr/>
         </p:nvSpPr>
@@ -7059,7 +7235,7 @@
             <a:r>
               <a:rPr sz="1700" b="0" i="1">
                 <a:solidFill>
-                  <a:srgbClr val="8A96A6"/>
+                  <a:srgbClr val="64748B"/>
                 </a:solidFill>
                 <a:latin typeface="Calibri"/>
               </a:rPr>
@@ -7070,7 +7246,7 @@
       </p:sp>
       <p:sp>
         <p:nvSpPr>
-          <p:cNvPr id="10" name="TextBox 9"/>
+          <p:cNvPr id="11" name="TextBox 10"/>
           <p:cNvSpPr txBox="1"/>
           <p:nvPr/>
         </p:nvSpPr>
@@ -7096,7 +7272,7 @@
             <a:r>
               <a:rPr sz="1100" b="0" i="0">
                 <a:solidFill>
-                  <a:srgbClr val="8A96A6"/>
+                  <a:srgbClr val="64748B"/>
                 </a:solidFill>
                 <a:latin typeface="Calibri"/>
               </a:rPr>
@@ -7119,7 +7295,7 @@
     <p:bg>
       <p:bgPr>
         <a:solidFill>
-          <a:srgbClr val="FAFBFC"/>
+          <a:srgbClr val="F0F4FF"/>
         </a:solidFill>
         <a:effectLst/>
       </p:bgPr>
@@ -7140,13 +7316,13 @@
         <p:spPr>
           <a:xfrm>
             <a:off x="0" y="0"/>
-            <a:ext cx="12191695" cy="1051560"/>
+            <a:ext cx="12191695" cy="1024128"/>
           </a:xfrm>
           <a:prstGeom prst="rect">
             <a:avLst/>
           </a:prstGeom>
           <a:solidFill>
-            <a:srgbClr val="1B3A5C"/>
+            <a:srgbClr val="0F172A"/>
           </a:solidFill>
           <a:ln>
             <a:noFill/>
@@ -7177,13 +7353,57 @@
       </p:sp>
       <p:sp>
         <p:nvSpPr>
-          <p:cNvPr id="3" name="TextBox 2"/>
+          <p:cNvPr id="3" name="Rectangle 2"/>
+          <p:cNvSpPr/>
+          <p:nvPr/>
+        </p:nvSpPr>
+        <p:spPr>
+          <a:xfrm>
+            <a:off x="0" y="0"/>
+            <a:ext cx="64008" cy="1024128"/>
+          </a:xfrm>
+          <a:prstGeom prst="rect">
+            <a:avLst/>
+          </a:prstGeom>
+          <a:solidFill>
+            <a:srgbClr val="EA580C"/>
+          </a:solidFill>
+          <a:ln>
+            <a:noFill/>
+          </a:ln>
+          <a:effectLst/>
+        </p:spPr>
+        <p:style>
+          <a:lnRef idx="1">
+            <a:schemeClr val="accent1"/>
+          </a:lnRef>
+          <a:fillRef idx="3">
+            <a:schemeClr val="accent1"/>
+          </a:fillRef>
+          <a:effectRef idx="2">
+            <a:schemeClr val="accent1"/>
+          </a:effectRef>
+          <a:fontRef idx="minor">
+            <a:schemeClr val="lt1"/>
+          </a:fontRef>
+        </p:style>
+        <p:txBody>
+          <a:bodyPr rtlCol="0" anchor="ctr"/>
+          <a:lstStyle/>
+          <a:p>
+            <a:pPr algn="ctr"/>
+          </a:p>
+        </p:txBody>
+      </p:sp>
+      <p:sp>
+        <p:nvSpPr>
+          <p:cNvPr id="4" name="TextBox 3"/>
           <p:cNvSpPr txBox="1"/>
           <p:nvPr/>
         </p:nvSpPr>
         <p:spPr>
           <a:xfrm>
-            <a:off x="457200" y="91440"/>
+            <a:off x="228600" y="73152"/>
             <a:ext cx="9418320" cy="914400"/>
           </a:xfrm>
           <a:prstGeom prst="rect">
@@ -7201,9 +7421,9 @@
               <a:buNone/>
             </a:pPr>
             <a:r>
-              <a:rPr sz="1300" b="1">
-                <a:solidFill>
-                  <a:srgbClr val="F6C84C"/>
+              <a:rPr sz="1200" b="1">
+                <a:solidFill>
+                  <a:srgbClr val="FBBF24"/>
                 </a:solidFill>
                 <a:latin typeface="Calibri"/>
               </a:rPr>
@@ -7228,7 +7448,7 @@
       </p:sp>
       <p:sp>
         <p:nvSpPr>
-          <p:cNvPr id="4" name="Rounded Rectangle 3"/>
+          <p:cNvPr id="5" name="Rounded Rectangle 4"/>
           <p:cNvSpPr/>
           <p:nvPr/>
         </p:nvSpPr>
@@ -7274,7 +7494,7 @@
             <a:r>
               <a:rPr sz="1300" b="1">
                 <a:solidFill>
-                  <a:srgbClr val="1B3A5C"/>
+                  <a:srgbClr val="1E3A8A"/>
                 </a:solidFill>
                 <a:latin typeface="Calibri"/>
               </a:rPr>
@@ -7285,7 +7505,7 @@
       </p:sp>
       <p:pic>
         <p:nvPicPr>
-          <p:cNvPr id="5" name="Picture 4" descr="f_kartenspiel.png"/>
+          <p:cNvPr id="6" name="Picture 5" descr="f_kartenspiel.png"/>
           <p:cNvPicPr>
             <a:picLocks noChangeAspect="1"/>
           </p:cNvPicPr>
@@ -7309,7 +7529,7 @@
       </p:pic>
       <p:sp>
         <p:nvSpPr>
-          <p:cNvPr id="6" name="Rounded Rectangle 5"/>
+          <p:cNvPr id="7" name="Rounded Rectangle 6"/>
           <p:cNvSpPr/>
           <p:nvPr/>
         </p:nvSpPr>
@@ -7322,11 +7542,11 @@
             <a:avLst/>
           </a:prstGeom>
           <a:solidFill>
-            <a:srgbClr val="E8F1FA"/>
+            <a:srgbClr val="EFF6FF"/>
           </a:solidFill>
           <a:ln w="15875">
             <a:solidFill>
-              <a:srgbClr val="3D6EA5"/>
+              <a:srgbClr val="2563EB"/>
             </a:solidFill>
           </a:ln>
           <a:effectLst/>
@@ -7355,7 +7575,7 @@
       </p:sp>
       <p:sp>
         <p:nvSpPr>
-          <p:cNvPr id="7" name="Rounded Rectangle 6"/>
+          <p:cNvPr id="8" name="Rounded Rectangle 7"/>
           <p:cNvSpPr/>
           <p:nvPr/>
         </p:nvSpPr>
@@ -7370,7 +7590,7 @@
             </a:avLst>
           </a:prstGeom>
           <a:solidFill>
-            <a:srgbClr val="1B3A5C"/>
+            <a:srgbClr val="1E3A8A"/>
           </a:solidFill>
           <a:ln>
             <a:noFill/>
@@ -7412,7 +7632,7 @@
       </p:sp>
       <p:sp>
         <p:nvSpPr>
-          <p:cNvPr id="8" name="TextBox 7"/>
+          <p:cNvPr id="9" name="TextBox 8"/>
           <p:cNvSpPr txBox="1"/>
           <p:nvPr/>
         </p:nvSpPr>
@@ -7437,7 +7657,7 @@
                 <a:spcPts val="800"/>
               </a:spcAft>
               <a:buClr>
-                <a:srgbClr val="F28C3C"/>
+                <a:srgbClr val="EA580C"/>
               </a:buClr>
               <a:buFont typeface="Arial"/>
               <a:buChar char="•"/>
@@ -7445,7 +7665,7 @@
             <a:r>
               <a:rPr sz="1600">
                 <a:solidFill>
-                  <a:srgbClr val="27303A"/>
+                  <a:srgbClr val="0F172A"/>
                 </a:solidFill>
                 <a:latin typeface="Calibri"/>
               </a:rPr>
@@ -7458,7 +7678,7 @@
                 <a:spcPts val="800"/>
               </a:spcAft>
               <a:buClr>
-                <a:srgbClr val="F28C3C"/>
+                <a:srgbClr val="EA580C"/>
               </a:buClr>
               <a:buFont typeface="Arial"/>
               <a:buChar char="•"/>
@@ -7466,7 +7686,7 @@
             <a:r>
               <a:rPr sz="1600">
                 <a:solidFill>
-                  <a:srgbClr val="27303A"/>
+                  <a:srgbClr val="0F172A"/>
                 </a:solidFill>
                 <a:latin typeface="Calibri"/>
               </a:rPr>
@@ -7479,7 +7699,7 @@
                 <a:spcPts val="800"/>
               </a:spcAft>
               <a:buClr>
-                <a:srgbClr val="F28C3C"/>
+                <a:srgbClr val="EA580C"/>
               </a:buClr>
               <a:buFont typeface="Arial"/>
               <a:buChar char="•"/>
@@ -7487,7 +7707,7 @@
             <a:r>
               <a:rPr sz="1600">
                 <a:solidFill>
-                  <a:srgbClr val="27303A"/>
+                  <a:srgbClr val="0F172A"/>
                 </a:solidFill>
                 <a:latin typeface="Calibri"/>
               </a:rPr>
@@ -7498,7 +7718,7 @@
       </p:sp>
       <p:sp>
         <p:nvSpPr>
-          <p:cNvPr id="9" name="Rounded Rectangle 8"/>
+          <p:cNvPr id="10" name="Rounded Rectangle 9"/>
           <p:cNvSpPr/>
           <p:nvPr/>
         </p:nvSpPr>
@@ -7511,11 +7731,11 @@
             <a:avLst/>
           </a:prstGeom>
           <a:solidFill>
-            <a:srgbClr val="F6C84C"/>
+            <a:srgbClr val="FBBF24"/>
           </a:solidFill>
           <a:ln w="15875">
             <a:solidFill>
-              <a:srgbClr val="F28C3C"/>
+              <a:srgbClr val="EA580C"/>
             </a:solidFill>
           </a:ln>
           <a:effectLst/>
@@ -7544,7 +7764,7 @@
       </p:sp>
       <p:sp>
         <p:nvSpPr>
-          <p:cNvPr id="10" name="TextBox 9"/>
+          <p:cNvPr id="11" name="TextBox 10"/>
           <p:cNvSpPr txBox="1"/>
           <p:nvPr/>
         </p:nvSpPr>
@@ -7570,7 +7790,7 @@
             <a:r>
               <a:rPr sz="1800" b="1" i="0">
                 <a:solidFill>
-                  <a:srgbClr val="1B3A5C"/>
+                  <a:srgbClr val="1E3A8A"/>
                 </a:solidFill>
                 <a:latin typeface="Calibri"/>
               </a:rPr>
@@ -7584,7 +7804,7 @@
             <a:r>
               <a:rPr sz="1800" b="1" i="0">
                 <a:solidFill>
-                  <a:srgbClr val="1B3A5C"/>
+                  <a:srgbClr val="1E3A8A"/>
                 </a:solidFill>
                 <a:latin typeface="Calibri"/>
               </a:rPr>
@@ -7595,7 +7815,7 @@
       </p:sp>
       <p:sp>
         <p:nvSpPr>
-          <p:cNvPr id="11" name="TextBox 10"/>
+          <p:cNvPr id="12" name="TextBox 11"/>
           <p:cNvSpPr txBox="1"/>
           <p:nvPr/>
         </p:nvSpPr>
@@ -7621,7 +7841,7 @@
             <a:r>
               <a:rPr sz="1100" b="0" i="0">
                 <a:solidFill>
-                  <a:srgbClr val="8A96A6"/>
+                  <a:srgbClr val="64748B"/>
                 </a:solidFill>
                 <a:latin typeface="Calibri"/>
               </a:rPr>
@@ -7644,7 +7864,7 @@
     <p:bg>
       <p:bgPr>
         <a:solidFill>
-          <a:srgbClr val="FAFBFC"/>
+          <a:srgbClr val="F0F4FF"/>
         </a:solidFill>
         <a:effectLst/>
       </p:bgPr>
@@ -7665,13 +7885,13 @@
         <p:spPr>
           <a:xfrm>
             <a:off x="0" y="0"/>
-            <a:ext cx="12191695" cy="1051560"/>
+            <a:ext cx="12191695" cy="1024128"/>
           </a:xfrm>
           <a:prstGeom prst="rect">
             <a:avLst/>
           </a:prstGeom>
           <a:solidFill>
-            <a:srgbClr val="1B3A5C"/>
+            <a:srgbClr val="0F172A"/>
           </a:solidFill>
           <a:ln>
             <a:noFill/>
@@ -7702,13 +7922,57 @@
       </p:sp>
       <p:sp>
         <p:nvSpPr>
-          <p:cNvPr id="3" name="TextBox 2"/>
+          <p:cNvPr id="3" name="Rectangle 2"/>
+          <p:cNvSpPr/>
+          <p:nvPr/>
+        </p:nvSpPr>
+        <p:spPr>
+          <a:xfrm>
+            <a:off x="0" y="0"/>
+            <a:ext cx="64008" cy="1024128"/>
+          </a:xfrm>
+          <a:prstGeom prst="rect">
+            <a:avLst/>
+          </a:prstGeom>
+          <a:solidFill>
+            <a:srgbClr val="EA580C"/>
+          </a:solidFill>
+          <a:ln>
+            <a:noFill/>
+          </a:ln>
+          <a:effectLst/>
+        </p:spPr>
+        <p:style>
+          <a:lnRef idx="1">
+            <a:schemeClr val="accent1"/>
+          </a:lnRef>
+          <a:fillRef idx="3">
+            <a:schemeClr val="accent1"/>
+          </a:fillRef>
+          <a:effectRef idx="2">
+            <a:schemeClr val="accent1"/>
+          </a:effectRef>
+          <a:fontRef idx="minor">
+            <a:schemeClr val="lt1"/>
+          </a:fontRef>
+        </p:style>
+        <p:txBody>
+          <a:bodyPr rtlCol="0" anchor="ctr"/>
+          <a:lstStyle/>
+          <a:p>
+            <a:pPr algn="ctr"/>
+          </a:p>
+        </p:txBody>
+      </p:sp>
+      <p:sp>
+        <p:nvSpPr>
+          <p:cNvPr id="4" name="TextBox 3"/>
           <p:cNvSpPr txBox="1"/>
           <p:nvPr/>
         </p:nvSpPr>
         <p:spPr>
           <a:xfrm>
-            <a:off x="457200" y="91440"/>
+            <a:off x="228600" y="73152"/>
             <a:ext cx="9418320" cy="914400"/>
           </a:xfrm>
           <a:prstGeom prst="rect">
@@ -7726,9 +7990,9 @@
               <a:buNone/>
             </a:pPr>
             <a:r>
-              <a:rPr sz="1300" b="1">
-                <a:solidFill>
-                  <a:srgbClr val="F6C84C"/>
+              <a:rPr sz="1200" b="1">
+                <a:solidFill>
+                  <a:srgbClr val="FBBF24"/>
                 </a:solidFill>
                 <a:latin typeface="Calibri"/>
               </a:rPr>
@@ -7753,7 +8017,7 @@
       </p:sp>
       <p:sp>
         <p:nvSpPr>
-          <p:cNvPr id="4" name="Rounded Rectangle 3"/>
+          <p:cNvPr id="5" name="Rounded Rectangle 4"/>
           <p:cNvSpPr/>
           <p:nvPr/>
         </p:nvSpPr>
@@ -7799,7 +8063,7 @@
             <a:r>
               <a:rPr sz="1300" b="1">
                 <a:solidFill>
-                  <a:srgbClr val="F28C3C"/>
+                  <a:srgbClr val="EA580C"/>
                 </a:solidFill>
                 <a:latin typeface="Calibri"/>
               </a:rPr>
@@ -7810,7 +8074,7 @@
       </p:sp>
       <p:graphicFrame>
         <p:nvGraphicFramePr>
-          <p:cNvPr id="5" name="Table 4"/>
+          <p:cNvPr id="6" name="Table 5"/>
           <p:cNvGraphicFramePr>
             <a:graphicFrameLocks noGrp="1"/>
           </p:cNvGraphicFramePr>
@@ -7852,7 +8116,7 @@
                   </a:txBody>
                   <a:tcPr marL="109728" marR="109728" marT="36576" marB="36576" anchor="ctr">
                     <a:solidFill>
-                      <a:srgbClr val="1B3A5C"/>
+                      <a:srgbClr val="1E3A8A"/>
                     </a:solidFill>
                   </a:tcPr>
                 </a:tc>
@@ -7875,7 +8139,7 @@
                   </a:txBody>
                   <a:tcPr marL="109728" marR="109728" marT="36576" marB="36576" anchor="ctr">
                     <a:solidFill>
-                      <a:srgbClr val="1B3A5C"/>
+                      <a:srgbClr val="1E3A8A"/>
                     </a:solidFill>
                   </a:tcPr>
                 </a:tc>
@@ -7898,7 +8162,7 @@
                   </a:txBody>
                   <a:tcPr marL="109728" marR="109728" marT="36576" marB="36576" anchor="ctr">
                     <a:solidFill>
-                      <a:srgbClr val="1B3A5C"/>
+                      <a:srgbClr val="1E3A8A"/>
                     </a:solidFill>
                   </a:tcPr>
                 </a:tc>
@@ -7921,7 +8185,7 @@
                   </a:txBody>
                   <a:tcPr marL="109728" marR="109728" marT="36576" marB="36576" anchor="ctr">
                     <a:solidFill>
-                      <a:srgbClr val="1B3A5C"/>
+                      <a:srgbClr val="1E3A8A"/>
                     </a:solidFill>
                   </a:tcPr>
                 </a:tc>
@@ -7936,7 +8200,7 @@
                       <a:r>
                         <a:rPr sz="1400" b="1">
                           <a:solidFill>
-                            <a:srgbClr val="1B3A5C"/>
+                            <a:srgbClr val="1E3A8A"/>
                           </a:solidFill>
                           <a:latin typeface="Calibri"/>
                         </a:rPr>
@@ -7946,7 +8210,7 @@
                   </a:txBody>
                   <a:tcPr marL="109728" marR="109728" marT="36576" marB="36576" anchor="ctr">
                     <a:solidFill>
-                      <a:srgbClr val="E8F1FA"/>
+                      <a:srgbClr val="EFF6FF"/>
                     </a:solidFill>
                   </a:tcPr>
                 </a:tc>
@@ -7959,7 +8223,7 @@
                       <a:r>
                         <a:rPr sz="1400" b="0">
                           <a:solidFill>
-                            <a:srgbClr val="27303A"/>
+                            <a:srgbClr val="0F172A"/>
                           </a:solidFill>
                           <a:latin typeface="Calibri"/>
                         </a:rPr>
@@ -7969,7 +8233,7 @@
                   </a:txBody>
                   <a:tcPr marL="109728" marR="109728" marT="36576" marB="36576" anchor="ctr">
                     <a:solidFill>
-                      <a:srgbClr val="E8F1FA"/>
+                      <a:srgbClr val="EFF6FF"/>
                     </a:solidFill>
                   </a:tcPr>
                 </a:tc>
@@ -7982,7 +8246,7 @@
                       <a:r>
                         <a:rPr sz="1400" b="0">
                           <a:solidFill>
-                            <a:srgbClr val="27303A"/>
+                            <a:srgbClr val="0F172A"/>
                           </a:solidFill>
                           <a:latin typeface="Calibri"/>
                         </a:rPr>
@@ -7992,7 +8256,7 @@
                   </a:txBody>
                   <a:tcPr marL="109728" marR="109728" marT="36576" marB="36576" anchor="ctr">
                     <a:solidFill>
-                      <a:srgbClr val="E8F1FA"/>
+                      <a:srgbClr val="EFF6FF"/>
                     </a:solidFill>
                   </a:tcPr>
                 </a:tc>
@@ -8005,7 +8269,7 @@
                       <a:r>
                         <a:rPr sz="1400" b="0">
                           <a:solidFill>
-                            <a:srgbClr val="27303A"/>
+                            <a:srgbClr val="0F172A"/>
                           </a:solidFill>
                           <a:latin typeface="Calibri"/>
                         </a:rPr>
@@ -8015,7 +8279,7 @@
                   </a:txBody>
                   <a:tcPr marL="109728" marR="109728" marT="36576" marB="36576" anchor="ctr">
                     <a:solidFill>
-                      <a:srgbClr val="E8F1FA"/>
+                      <a:srgbClr val="EFF6FF"/>
                     </a:solidFill>
                   </a:tcPr>
                 </a:tc>
@@ -8030,7 +8294,7 @@
                       <a:r>
                         <a:rPr sz="1400" b="1">
                           <a:solidFill>
-                            <a:srgbClr val="1B3A5C"/>
+                            <a:srgbClr val="1E3A8A"/>
                           </a:solidFill>
                           <a:latin typeface="Calibri"/>
                         </a:rPr>
@@ -8053,7 +8317,7 @@
                       <a:r>
                         <a:rPr sz="1400" b="0">
                           <a:solidFill>
-                            <a:srgbClr val="27303A"/>
+                            <a:srgbClr val="0F172A"/>
                           </a:solidFill>
                           <a:latin typeface="Calibri"/>
                         </a:rPr>
@@ -8076,7 +8340,7 @@
                       <a:r>
                         <a:rPr sz="1400" b="0">
                           <a:solidFill>
-                            <a:srgbClr val="27303A"/>
+                            <a:srgbClr val="0F172A"/>
                           </a:solidFill>
                           <a:latin typeface="Calibri"/>
                         </a:rPr>
@@ -8099,7 +8363,7 @@
                       <a:r>
                         <a:rPr sz="1400" b="0">
                           <a:solidFill>
-                            <a:srgbClr val="27303A"/>
+                            <a:srgbClr val="0F172A"/>
                           </a:solidFill>
                           <a:latin typeface="Calibri"/>
                         </a:rPr>
@@ -8124,7 +8388,7 @@
                       <a:r>
                         <a:rPr sz="1400" b="1">
                           <a:solidFill>
-                            <a:srgbClr val="1B3A5C"/>
+                            <a:srgbClr val="1E3A8A"/>
                           </a:solidFill>
                           <a:latin typeface="Calibri"/>
                         </a:rPr>
@@ -8134,7 +8398,7 @@
                   </a:txBody>
                   <a:tcPr marL="109728" marR="109728" marT="36576" marB="36576" anchor="ctr">
                     <a:solidFill>
-                      <a:srgbClr val="E8F1FA"/>
+                      <a:srgbClr val="EFF6FF"/>
                     </a:solidFill>
                   </a:tcPr>
                 </a:tc>
@@ -8147,7 +8411,7 @@
                       <a:r>
                         <a:rPr sz="1400" b="0">
                           <a:solidFill>
-                            <a:srgbClr val="27303A"/>
+                            <a:srgbClr val="0F172A"/>
                           </a:solidFill>
                           <a:latin typeface="Calibri"/>
                         </a:rPr>
@@ -8157,7 +8421,7 @@
                   </a:txBody>
                   <a:tcPr marL="109728" marR="109728" marT="36576" marB="36576" anchor="ctr">
                     <a:solidFill>
-                      <a:srgbClr val="E8F1FA"/>
+                      <a:srgbClr val="EFF6FF"/>
                     </a:solidFill>
                   </a:tcPr>
                 </a:tc>
@@ -8170,7 +8434,7 @@
                       <a:r>
                         <a:rPr sz="1400" b="0">
                           <a:solidFill>
-                            <a:srgbClr val="27303A"/>
+                            <a:srgbClr val="0F172A"/>
                           </a:solidFill>
                           <a:latin typeface="Calibri"/>
                         </a:rPr>
@@ -8180,7 +8444,7 @@
                   </a:txBody>
                   <a:tcPr marL="109728" marR="109728" marT="36576" marB="36576" anchor="ctr">
                     <a:solidFill>
-                      <a:srgbClr val="E8F1FA"/>
+                      <a:srgbClr val="EFF6FF"/>
                     </a:solidFill>
                   </a:tcPr>
                 </a:tc>
@@ -8193,7 +8457,7 @@
                       <a:r>
                         <a:rPr sz="1400" b="0">
                           <a:solidFill>
-                            <a:srgbClr val="27303A"/>
+                            <a:srgbClr val="0F172A"/>
                           </a:solidFill>
                           <a:latin typeface="Calibri"/>
                         </a:rPr>
@@ -8203,7 +8467,7 @@
                   </a:txBody>
                   <a:tcPr marL="109728" marR="109728" marT="36576" marB="36576" anchor="ctr">
                     <a:solidFill>
-                      <a:srgbClr val="E8F1FA"/>
+                      <a:srgbClr val="EFF6FF"/>
                     </a:solidFill>
                   </a:tcPr>
                 </a:tc>
@@ -8218,7 +8482,7 @@
                       <a:r>
                         <a:rPr sz="1400" b="1">
                           <a:solidFill>
-                            <a:srgbClr val="1B3A5C"/>
+                            <a:srgbClr val="1E3A8A"/>
                           </a:solidFill>
                           <a:latin typeface="Calibri"/>
                         </a:rPr>
@@ -8241,7 +8505,7 @@
                       <a:r>
                         <a:rPr sz="1400" b="0">
                           <a:solidFill>
-                            <a:srgbClr val="27303A"/>
+                            <a:srgbClr val="0F172A"/>
                           </a:solidFill>
                           <a:latin typeface="Calibri"/>
                         </a:rPr>
@@ -8264,7 +8528,7 @@
                       <a:r>
                         <a:rPr sz="1400" b="0">
                           <a:solidFill>
-                            <a:srgbClr val="27303A"/>
+                            <a:srgbClr val="0F172A"/>
                           </a:solidFill>
                           <a:latin typeface="Calibri"/>
                         </a:rPr>
@@ -8287,7 +8551,7 @@
                       <a:r>
                         <a:rPr sz="1400" b="0">
                           <a:solidFill>
-                            <a:srgbClr val="27303A"/>
+                            <a:srgbClr val="0F172A"/>
                           </a:solidFill>
                           <a:latin typeface="Calibri"/>
                         </a:rPr>
@@ -8312,7 +8576,7 @@
                       <a:r>
                         <a:rPr sz="1400" b="1">
                           <a:solidFill>
-                            <a:srgbClr val="1B3A5C"/>
+                            <a:srgbClr val="1E3A8A"/>
                           </a:solidFill>
                           <a:latin typeface="Calibri"/>
                         </a:rPr>
@@ -8322,7 +8586,7 @@
                   </a:txBody>
                   <a:tcPr marL="109728" marR="109728" marT="36576" marB="36576" anchor="ctr">
                     <a:solidFill>
-                      <a:srgbClr val="E8F1FA"/>
+                      <a:srgbClr val="EFF6FF"/>
                     </a:solidFill>
                   </a:tcPr>
                 </a:tc>
@@ -8335,7 +8599,7 @@
                       <a:r>
                         <a:rPr sz="1400" b="0">
                           <a:solidFill>
-                            <a:srgbClr val="27303A"/>
+                            <a:srgbClr val="0F172A"/>
                           </a:solidFill>
                           <a:latin typeface="Calibri"/>
                         </a:rPr>
@@ -8345,7 +8609,7 @@
                   </a:txBody>
                   <a:tcPr marL="109728" marR="109728" marT="36576" marB="36576" anchor="ctr">
                     <a:solidFill>
-                      <a:srgbClr val="E8F1FA"/>
+                      <a:srgbClr val="EFF6FF"/>
                     </a:solidFill>
                   </a:tcPr>
                 </a:tc>
@@ -8358,7 +8622,7 @@
                       <a:r>
                         <a:rPr sz="1400" b="0">
                           <a:solidFill>
-                            <a:srgbClr val="27303A"/>
+                            <a:srgbClr val="0F172A"/>
                           </a:solidFill>
                           <a:latin typeface="Calibri"/>
                         </a:rPr>
@@ -8368,7 +8632,7 @@
                   </a:txBody>
                   <a:tcPr marL="109728" marR="109728" marT="36576" marB="36576" anchor="ctr">
                     <a:solidFill>
-                      <a:srgbClr val="E8F1FA"/>
+                      <a:srgbClr val="EFF6FF"/>
                     </a:solidFill>
                   </a:tcPr>
                 </a:tc>
@@ -8381,7 +8645,7 @@
                       <a:r>
                         <a:rPr sz="1400" b="0">
                           <a:solidFill>
-                            <a:srgbClr val="27303A"/>
+                            <a:srgbClr val="0F172A"/>
                           </a:solidFill>
                           <a:latin typeface="Calibri"/>
                         </a:rPr>
@@ -8391,7 +8655,7 @@
                   </a:txBody>
                   <a:tcPr marL="109728" marR="109728" marT="36576" marB="36576" anchor="ctr">
                     <a:solidFill>
-                      <a:srgbClr val="E8F1FA"/>
+                      <a:srgbClr val="EFF6FF"/>
                     </a:solidFill>
                   </a:tcPr>
                 </a:tc>
@@ -8402,7 +8666,7 @@
       </p:graphicFrame>
       <p:sp>
         <p:nvSpPr>
-          <p:cNvPr id="6" name="TextBox 5"/>
+          <p:cNvPr id="7" name="TextBox 6"/>
           <p:cNvSpPr txBox="1"/>
           <p:nvPr/>
         </p:nvSpPr>
@@ -8428,7 +8692,7 @@
             <a:r>
               <a:rPr sz="1300" b="0" i="1">
                 <a:solidFill>
-                  <a:srgbClr val="8A96A6"/>
+                  <a:srgbClr val="64748B"/>
                 </a:solidFill>
                 <a:latin typeface="Calibri"/>
               </a:rPr>
@@ -8439,7 +8703,7 @@
       </p:sp>
       <p:sp>
         <p:nvSpPr>
-          <p:cNvPr id="7" name="TextBox 6"/>
+          <p:cNvPr id="8" name="TextBox 7"/>
           <p:cNvSpPr txBox="1"/>
           <p:nvPr/>
         </p:nvSpPr>
@@ -8465,7 +8729,7 @@
             <a:r>
               <a:rPr sz="1100" b="0" i="0">
                 <a:solidFill>
-                  <a:srgbClr val="8A96A6"/>
+                  <a:srgbClr val="64748B"/>
                 </a:solidFill>
                 <a:latin typeface="Calibri"/>
               </a:rPr>
@@ -8488,7 +8752,7 @@
     <p:bg>
       <p:bgPr>
         <a:solidFill>
-          <a:srgbClr val="FAFBFC"/>
+          <a:srgbClr val="F0F4FF"/>
         </a:solidFill>
         <a:effectLst/>
       </p:bgPr>
@@ -8509,13 +8773,13 @@
         <p:spPr>
           <a:xfrm>
             <a:off x="0" y="0"/>
-            <a:ext cx="12191695" cy="1051560"/>
+            <a:ext cx="12191695" cy="1024128"/>
           </a:xfrm>
           <a:prstGeom prst="rect">
             <a:avLst/>
           </a:prstGeom>
           <a:solidFill>
-            <a:srgbClr val="1B3A5C"/>
+            <a:srgbClr val="0F172A"/>
           </a:solidFill>
           <a:ln>
             <a:noFill/>
@@ -8546,13 +8810,57 @@
       </p:sp>
       <p:sp>
         <p:nvSpPr>
-          <p:cNvPr id="3" name="TextBox 2"/>
+          <p:cNvPr id="3" name="Rectangle 2"/>
+          <p:cNvSpPr/>
+          <p:nvPr/>
+        </p:nvSpPr>
+        <p:spPr>
+          <a:xfrm>
+            <a:off x="0" y="0"/>
+            <a:ext cx="64008" cy="1024128"/>
+          </a:xfrm>
+          <a:prstGeom prst="rect">
+            <a:avLst/>
+          </a:prstGeom>
+          <a:solidFill>
+            <a:srgbClr val="EA580C"/>
+          </a:solidFill>
+          <a:ln>
+            <a:noFill/>
+          </a:ln>
+          <a:effectLst/>
+        </p:spPr>
+        <p:style>
+          <a:lnRef idx="1">
+            <a:schemeClr val="accent1"/>
+          </a:lnRef>
+          <a:fillRef idx="3">
+            <a:schemeClr val="accent1"/>
+          </a:fillRef>
+          <a:effectRef idx="2">
+            <a:schemeClr val="accent1"/>
+          </a:effectRef>
+          <a:fontRef idx="minor">
+            <a:schemeClr val="lt1"/>
+          </a:fontRef>
+        </p:style>
+        <p:txBody>
+          <a:bodyPr rtlCol="0" anchor="ctr"/>
+          <a:lstStyle/>
+          <a:p>
+            <a:pPr algn="ctr"/>
+          </a:p>
+        </p:txBody>
+      </p:sp>
+      <p:sp>
+        <p:nvSpPr>
+          <p:cNvPr id="4" name="TextBox 3"/>
           <p:cNvSpPr txBox="1"/>
           <p:nvPr/>
         </p:nvSpPr>
         <p:spPr>
           <a:xfrm>
-            <a:off x="457200" y="91440"/>
+            <a:off x="228600" y="73152"/>
             <a:ext cx="9418320" cy="914400"/>
           </a:xfrm>
           <a:prstGeom prst="rect">
@@ -8570,9 +8878,9 @@
               <a:buNone/>
             </a:pPr>
             <a:r>
-              <a:rPr sz="1300" b="1">
-                <a:solidFill>
-                  <a:srgbClr val="F6C84C"/>
+              <a:rPr sz="1200" b="1">
+                <a:solidFill>
+                  <a:srgbClr val="FBBF24"/>
                 </a:solidFill>
                 <a:latin typeface="Calibri"/>
               </a:rPr>
@@ -8597,7 +8905,7 @@
       </p:sp>
       <p:sp>
         <p:nvSpPr>
-          <p:cNvPr id="4" name="Rounded Rectangle 3"/>
+          <p:cNvPr id="5" name="Rounded Rectangle 4"/>
           <p:cNvSpPr/>
           <p:nvPr/>
         </p:nvSpPr>
@@ -8643,7 +8951,7 @@
             <a:r>
               <a:rPr sz="1300" b="1">
                 <a:solidFill>
-                  <a:srgbClr val="8A96A6"/>
+                  <a:srgbClr val="64748B"/>
                 </a:solidFill>
                 <a:latin typeface="Calibri"/>
               </a:rPr>
@@ -8654,7 +8962,7 @@
       </p:sp>
       <p:sp>
         <p:nvSpPr>
-          <p:cNvPr id="5" name="Rounded Rectangle 4"/>
+          <p:cNvPr id="6" name="Rounded Rectangle 5"/>
           <p:cNvSpPr/>
           <p:nvPr/>
         </p:nvSpPr>
@@ -8667,11 +8975,11 @@
             <a:avLst/>
           </a:prstGeom>
           <a:solidFill>
-            <a:srgbClr val="E8F1FA"/>
+            <a:srgbClr val="EFF6FF"/>
           </a:solidFill>
           <a:ln w="15875">
             <a:solidFill>
-              <a:srgbClr val="1B3A5C"/>
+              <a:srgbClr val="1E3A8A"/>
             </a:solidFill>
           </a:ln>
           <a:effectLst/>
@@ -8700,7 +9008,7 @@
       </p:sp>
       <p:sp>
         <p:nvSpPr>
-          <p:cNvPr id="6" name="Oval 5"/>
+          <p:cNvPr id="7" name="Oval 6"/>
           <p:cNvSpPr/>
           <p:nvPr/>
         </p:nvSpPr>
@@ -8713,7 +9021,7 @@
             <a:avLst/>
           </a:prstGeom>
           <a:solidFill>
-            <a:srgbClr val="1B3A5C"/>
+            <a:srgbClr val="1E3A8A"/>
           </a:solidFill>
           <a:ln>
             <a:noFill/>
@@ -8755,7 +9063,7 @@
       </p:sp>
       <p:sp>
         <p:nvSpPr>
-          <p:cNvPr id="7" name="TextBox 6"/>
+          <p:cNvPr id="8" name="TextBox 7"/>
           <p:cNvSpPr txBox="1"/>
           <p:nvPr/>
         </p:nvSpPr>
@@ -8781,7 +9089,7 @@
             <a:r>
               <a:rPr sz="1700" b="0" i="0">
                 <a:solidFill>
-                  <a:srgbClr val="27303A"/>
+                  <a:srgbClr val="0F172A"/>
                 </a:solidFill>
                 <a:latin typeface="Calibri"/>
               </a:rPr>
@@ -8792,7 +9100,7 @@
       </p:sp>
       <p:sp>
         <p:nvSpPr>
-          <p:cNvPr id="8" name="Rounded Rectangle 7"/>
+          <p:cNvPr id="9" name="Rounded Rectangle 8"/>
           <p:cNvSpPr/>
           <p:nvPr/>
         </p:nvSpPr>
@@ -8805,11 +9113,11 @@
             <a:avLst/>
           </a:prstGeom>
           <a:solidFill>
-            <a:srgbClr val="E8F1FA"/>
+            <a:srgbClr val="EFF6FF"/>
           </a:solidFill>
           <a:ln w="15875">
             <a:solidFill>
-              <a:srgbClr val="F28C3C"/>
+              <a:srgbClr val="EA580C"/>
             </a:solidFill>
           </a:ln>
           <a:effectLst/>
@@ -8838,7 +9146,7 @@
       </p:sp>
       <p:sp>
         <p:nvSpPr>
-          <p:cNvPr id="9" name="Oval 8"/>
+          <p:cNvPr id="10" name="Oval 9"/>
           <p:cNvSpPr/>
           <p:nvPr/>
         </p:nvSpPr>
@@ -8851,7 +9159,7 @@
             <a:avLst/>
           </a:prstGeom>
           <a:solidFill>
-            <a:srgbClr val="F28C3C"/>
+            <a:srgbClr val="EA580C"/>
           </a:solidFill>
           <a:ln>
             <a:noFill/>
@@ -8893,7 +9201,7 @@
       </p:sp>
       <p:sp>
         <p:nvSpPr>
-          <p:cNvPr id="10" name="TextBox 9"/>
+          <p:cNvPr id="11" name="TextBox 10"/>
           <p:cNvSpPr txBox="1"/>
           <p:nvPr/>
         </p:nvSpPr>
@@ -8919,7 +9227,7 @@
             <a:r>
               <a:rPr sz="1700" b="0" i="0">
                 <a:solidFill>
-                  <a:srgbClr val="27303A"/>
+                  <a:srgbClr val="0F172A"/>
                 </a:solidFill>
                 <a:latin typeface="Calibri"/>
               </a:rPr>
@@ -8930,7 +9238,7 @@
       </p:sp>
       <p:sp>
         <p:nvSpPr>
-          <p:cNvPr id="11" name="Rounded Rectangle 10"/>
+          <p:cNvPr id="12" name="Rounded Rectangle 11"/>
           <p:cNvSpPr/>
           <p:nvPr/>
         </p:nvSpPr>
@@ -8943,11 +9251,11 @@
             <a:avLst/>
           </a:prstGeom>
           <a:solidFill>
-            <a:srgbClr val="E8F1FA"/>
+            <a:srgbClr val="EFF6FF"/>
           </a:solidFill>
           <a:ln w="15875">
             <a:solidFill>
-              <a:srgbClr val="3D6EA5"/>
+              <a:srgbClr val="2563EB"/>
             </a:solidFill>
           </a:ln>
           <a:effectLst/>
@@ -8976,7 +9284,7 @@
       </p:sp>
       <p:sp>
         <p:nvSpPr>
-          <p:cNvPr id="12" name="Oval 11"/>
+          <p:cNvPr id="13" name="Oval 12"/>
           <p:cNvSpPr/>
           <p:nvPr/>
         </p:nvSpPr>
@@ -8989,7 +9297,7 @@
             <a:avLst/>
           </a:prstGeom>
           <a:solidFill>
-            <a:srgbClr val="3D6EA5"/>
+            <a:srgbClr val="2563EB"/>
           </a:solidFill>
           <a:ln>
             <a:noFill/>
@@ -9031,7 +9339,7 @@
       </p:sp>
       <p:sp>
         <p:nvSpPr>
-          <p:cNvPr id="13" name="TextBox 12"/>
+          <p:cNvPr id="14" name="TextBox 13"/>
           <p:cNvSpPr txBox="1"/>
           <p:nvPr/>
         </p:nvSpPr>
@@ -9057,7 +9365,7 @@
             <a:r>
               <a:rPr sz="1700" b="0" i="0">
                 <a:solidFill>
-                  <a:srgbClr val="27303A"/>
+                  <a:srgbClr val="0F172A"/>
                 </a:solidFill>
                 <a:latin typeface="Calibri"/>
               </a:rPr>
@@ -9068,7 +9376,7 @@
       </p:sp>
       <p:sp>
         <p:nvSpPr>
-          <p:cNvPr id="14" name="TextBox 13"/>
+          <p:cNvPr id="15" name="TextBox 14"/>
           <p:cNvSpPr txBox="1"/>
           <p:nvPr/>
         </p:nvSpPr>
@@ -9094,7 +9402,7 @@
             <a:r>
               <a:rPr sz="1100" b="0" i="0">
                 <a:solidFill>
-                  <a:srgbClr val="8A96A6"/>
+                  <a:srgbClr val="64748B"/>
                 </a:solidFill>
                 <a:latin typeface="Calibri"/>
               </a:rPr>
@@ -9117,7 +9425,7 @@
     <p:bg>
       <p:bgPr>
         <a:solidFill>
-          <a:srgbClr val="FAFBFC"/>
+          <a:srgbClr val="F0F4FF"/>
         </a:solidFill>
         <a:effectLst/>
       </p:bgPr>
@@ -9138,13 +9446,13 @@
         <p:spPr>
           <a:xfrm>
             <a:off x="0" y="0"/>
-            <a:ext cx="12191695" cy="1051560"/>
+            <a:ext cx="12191695" cy="1024128"/>
           </a:xfrm>
           <a:prstGeom prst="rect">
             <a:avLst/>
           </a:prstGeom>
           <a:solidFill>
-            <a:srgbClr val="1B3A5C"/>
+            <a:srgbClr val="0F172A"/>
           </a:solidFill>
           <a:ln>
             <a:noFill/>
@@ -9175,13 +9483,57 @@
       </p:sp>
       <p:sp>
         <p:nvSpPr>
-          <p:cNvPr id="3" name="TextBox 2"/>
+          <p:cNvPr id="3" name="Rectangle 2"/>
+          <p:cNvSpPr/>
+          <p:nvPr/>
+        </p:nvSpPr>
+        <p:spPr>
+          <a:xfrm>
+            <a:off x="0" y="0"/>
+            <a:ext cx="64008" cy="1024128"/>
+          </a:xfrm>
+          <a:prstGeom prst="rect">
+            <a:avLst/>
+          </a:prstGeom>
+          <a:solidFill>
+            <a:srgbClr val="EA580C"/>
+          </a:solidFill>
+          <a:ln>
+            <a:noFill/>
+          </a:ln>
+          <a:effectLst/>
+        </p:spPr>
+        <p:style>
+          <a:lnRef idx="1">
+            <a:schemeClr val="accent1"/>
+          </a:lnRef>
+          <a:fillRef idx="3">
+            <a:schemeClr val="accent1"/>
+          </a:fillRef>
+          <a:effectRef idx="2">
+            <a:schemeClr val="accent1"/>
+          </a:effectRef>
+          <a:fontRef idx="minor">
+            <a:schemeClr val="lt1"/>
+          </a:fontRef>
+        </p:style>
+        <p:txBody>
+          <a:bodyPr rtlCol="0" anchor="ctr"/>
+          <a:lstStyle/>
+          <a:p>
+            <a:pPr algn="ctr"/>
+          </a:p>
+        </p:txBody>
+      </p:sp>
+      <p:sp>
+        <p:nvSpPr>
+          <p:cNvPr id="4" name="TextBox 3"/>
           <p:cNvSpPr txBox="1"/>
           <p:nvPr/>
         </p:nvSpPr>
         <p:spPr>
           <a:xfrm>
-            <a:off x="457200" y="91440"/>
+            <a:off x="228600" y="73152"/>
             <a:ext cx="9418320" cy="914400"/>
           </a:xfrm>
           <a:prstGeom prst="rect">
@@ -9199,9 +9551,9 @@
               <a:buNone/>
             </a:pPr>
             <a:r>
-              <a:rPr sz="1300" b="1">
-                <a:solidFill>
-                  <a:srgbClr val="F6C84C"/>
+              <a:rPr sz="1200" b="1">
+                <a:solidFill>
+                  <a:srgbClr val="FBBF24"/>
                 </a:solidFill>
                 <a:latin typeface="Calibri"/>
               </a:rPr>
@@ -9226,7 +9578,7 @@
       </p:sp>
       <p:sp>
         <p:nvSpPr>
-          <p:cNvPr id="4" name="Rounded Rectangle 3"/>
+          <p:cNvPr id="5" name="Rounded Rectangle 4"/>
           <p:cNvSpPr/>
           <p:nvPr/>
         </p:nvSpPr>
@@ -9272,7 +9624,7 @@
             <a:r>
               <a:rPr sz="1300" b="1">
                 <a:solidFill>
-                  <a:srgbClr val="8A96A6"/>
+                  <a:srgbClr val="64748B"/>
                 </a:solidFill>
                 <a:latin typeface="Calibri"/>
               </a:rPr>
@@ -9283,7 +9635,7 @@
       </p:sp>
       <p:sp>
         <p:nvSpPr>
-          <p:cNvPr id="5" name="TextBox 4"/>
+          <p:cNvPr id="6" name="TextBox 5"/>
           <p:cNvSpPr txBox="1"/>
           <p:nvPr/>
         </p:nvSpPr>
@@ -9308,7 +9660,7 @@
                 <a:spcPts val="1800"/>
               </a:spcAft>
               <a:buClr>
-                <a:srgbClr val="F28C3C"/>
+                <a:srgbClr val="EA580C"/>
               </a:buClr>
               <a:buFont typeface="Arial"/>
               <a:buChar char="•"/>
@@ -9316,7 +9668,7 @@
             <a:r>
               <a:rPr sz="2000">
                 <a:solidFill>
-                  <a:srgbClr val="27303A"/>
+                  <a:srgbClr val="0F172A"/>
                 </a:solidFill>
                 <a:latin typeface="Calibri"/>
               </a:rPr>
@@ -9329,7 +9681,7 @@
                 <a:spcPts val="1800"/>
               </a:spcAft>
               <a:buClr>
-                <a:srgbClr val="F28C3C"/>
+                <a:srgbClr val="EA580C"/>
               </a:buClr>
               <a:buFont typeface="Arial"/>
               <a:buChar char="•"/>
@@ -9337,7 +9689,7 @@
             <a:r>
               <a:rPr sz="2000">
                 <a:solidFill>
-                  <a:srgbClr val="27303A"/>
+                  <a:srgbClr val="0F172A"/>
                 </a:solidFill>
                 <a:latin typeface="Calibri"/>
               </a:rPr>
@@ -9350,7 +9702,7 @@
                 <a:spcPts val="1800"/>
               </a:spcAft>
               <a:buClr>
-                <a:srgbClr val="F28C3C"/>
+                <a:srgbClr val="EA580C"/>
               </a:buClr>
               <a:buFont typeface="Arial"/>
               <a:buChar char="•"/>
@@ -9358,7 +9710,7 @@
             <a:r>
               <a:rPr sz="2000">
                 <a:solidFill>
-                  <a:srgbClr val="27303A"/>
+                  <a:srgbClr val="0F172A"/>
                 </a:solidFill>
                 <a:latin typeface="Calibri"/>
               </a:rPr>
@@ -9371,7 +9723,7 @@
                 <a:spcPts val="1800"/>
               </a:spcAft>
               <a:buClr>
-                <a:srgbClr val="F28C3C"/>
+                <a:srgbClr val="EA580C"/>
               </a:buClr>
               <a:buFont typeface="Arial"/>
               <a:buChar char="•"/>
@@ -9379,7 +9731,7 @@
             <a:r>
               <a:rPr sz="2000">
                 <a:solidFill>
-                  <a:srgbClr val="27303A"/>
+                  <a:srgbClr val="0F172A"/>
                 </a:solidFill>
                 <a:latin typeface="Calibri"/>
               </a:rPr>
@@ -9392,7 +9744,7 @@
                 <a:spcPts val="1800"/>
               </a:spcAft>
               <a:buClr>
-                <a:srgbClr val="F28C3C"/>
+                <a:srgbClr val="EA580C"/>
               </a:buClr>
               <a:buFont typeface="Arial"/>
               <a:buChar char="•"/>
@@ -9400,7 +9752,7 @@
             <a:r>
               <a:rPr sz="2000">
                 <a:solidFill>
-                  <a:srgbClr val="27303A"/>
+                  <a:srgbClr val="0F172A"/>
                 </a:solidFill>
                 <a:latin typeface="Calibri"/>
               </a:rPr>
@@ -9413,7 +9765,7 @@
                 <a:spcPts val="1800"/>
               </a:spcAft>
               <a:buClr>
-                <a:srgbClr val="F28C3C"/>
+                <a:srgbClr val="EA580C"/>
               </a:buClr>
               <a:buFont typeface="Arial"/>
               <a:buChar char="•"/>
@@ -9421,7 +9773,7 @@
             <a:r>
               <a:rPr sz="2000">
                 <a:solidFill>
-                  <a:srgbClr val="27303A"/>
+                  <a:srgbClr val="0F172A"/>
                 </a:solidFill>
                 <a:latin typeface="Calibri"/>
               </a:rPr>
@@ -9432,7 +9784,7 @@
       </p:sp>
       <p:sp>
         <p:nvSpPr>
-          <p:cNvPr id="6" name="TextBox 5"/>
+          <p:cNvPr id="7" name="TextBox 6"/>
           <p:cNvSpPr txBox="1"/>
           <p:nvPr/>
         </p:nvSpPr>
@@ -9458,7 +9810,7 @@
             <a:r>
               <a:rPr sz="1100" b="0" i="0">
                 <a:solidFill>
-                  <a:srgbClr val="8A96A6"/>
+                  <a:srgbClr val="64748B"/>
                 </a:solidFill>
                 <a:latin typeface="Calibri"/>
               </a:rPr>
@@ -9481,7 +9833,7 @@
     <p:bg>
       <p:bgPr>
         <a:solidFill>
-          <a:srgbClr val="1B3A5C"/>
+          <a:srgbClr val="1E3A8A"/>
         </a:solidFill>
         <a:effectLst/>
       </p:bgPr>
@@ -9508,7 +9860,7 @@
             <a:avLst/>
           </a:prstGeom>
           <a:solidFill>
-            <a:srgbClr val="F28C3C"/>
+            <a:srgbClr val="EA580C"/>
           </a:solidFill>
           <a:ln>
             <a:noFill/>
@@ -9552,7 +9904,7 @@
             <a:avLst/>
           </a:prstGeom>
           <a:solidFill>
-            <a:srgbClr val="3D6EA5"/>
+            <a:srgbClr val="2563EB"/>
           </a:solidFill>
           <a:ln>
             <a:noFill/>
@@ -9596,7 +9948,7 @@
             <a:avLst/>
           </a:prstGeom>
           <a:solidFill>
-            <a:srgbClr val="F6C84C"/>
+            <a:srgbClr val="FBBF24"/>
           </a:solidFill>
           <a:ln>
             <a:noFill/>
@@ -9690,7 +10042,7 @@
             <a:r>
               <a:rPr sz="3200" b="1" i="0">
                 <a:solidFill>
-                  <a:srgbClr val="F6C84C"/>
+                  <a:srgbClr val="FBBF24"/>
                 </a:solidFill>
                 <a:latin typeface="Calibri"/>
               </a:rPr>
@@ -9727,7 +10079,7 @@
             <a:r>
               <a:rPr sz="1600" b="0" i="0">
                 <a:solidFill>
-                  <a:srgbClr val="E8F1FA"/>
+                  <a:srgbClr val="EFF6FF"/>
                 </a:solidFill>
                 <a:latin typeface="Calibri"/>
               </a:rPr>
@@ -9750,7 +10102,7 @@
     <p:bg>
       <p:bgPr>
         <a:solidFill>
-          <a:srgbClr val="FAFBFC"/>
+          <a:srgbClr val="F0F4FF"/>
         </a:solidFill>
         <a:effectLst/>
       </p:bgPr>
@@ -9771,13 +10123,13 @@
         <p:spPr>
           <a:xfrm>
             <a:off x="0" y="0"/>
-            <a:ext cx="12191695" cy="1051560"/>
+            <a:ext cx="12191695" cy="1024128"/>
           </a:xfrm>
           <a:prstGeom prst="rect">
             <a:avLst/>
           </a:prstGeom>
           <a:solidFill>
-            <a:srgbClr val="1B3A5C"/>
+            <a:srgbClr val="0F172A"/>
           </a:solidFill>
           <a:ln>
             <a:noFill/>
@@ -9808,13 +10160,57 @@
       </p:sp>
       <p:sp>
         <p:nvSpPr>
-          <p:cNvPr id="3" name="TextBox 2"/>
+          <p:cNvPr id="3" name="Rectangle 2"/>
+          <p:cNvSpPr/>
+          <p:nvPr/>
+        </p:nvSpPr>
+        <p:spPr>
+          <a:xfrm>
+            <a:off x="0" y="0"/>
+            <a:ext cx="64008" cy="1024128"/>
+          </a:xfrm>
+          <a:prstGeom prst="rect">
+            <a:avLst/>
+          </a:prstGeom>
+          <a:solidFill>
+            <a:srgbClr val="EA580C"/>
+          </a:solidFill>
+          <a:ln>
+            <a:noFill/>
+          </a:ln>
+          <a:effectLst/>
+        </p:spPr>
+        <p:style>
+          <a:lnRef idx="1">
+            <a:schemeClr val="accent1"/>
+          </a:lnRef>
+          <a:fillRef idx="3">
+            <a:schemeClr val="accent1"/>
+          </a:fillRef>
+          <a:effectRef idx="2">
+            <a:schemeClr val="accent1"/>
+          </a:effectRef>
+          <a:fontRef idx="minor">
+            <a:schemeClr val="lt1"/>
+          </a:fontRef>
+        </p:style>
+        <p:txBody>
+          <a:bodyPr rtlCol="0" anchor="ctr"/>
+          <a:lstStyle/>
+          <a:p>
+            <a:pPr algn="ctr"/>
+          </a:p>
+        </p:txBody>
+      </p:sp>
+      <p:sp>
+        <p:nvSpPr>
+          <p:cNvPr id="4" name="TextBox 3"/>
           <p:cNvSpPr txBox="1"/>
           <p:nvPr/>
         </p:nvSpPr>
         <p:spPr>
           <a:xfrm>
-            <a:off x="457200" y="91440"/>
+            <a:off x="228600" y="73152"/>
             <a:ext cx="9418320" cy="914400"/>
           </a:xfrm>
           <a:prstGeom prst="rect">
@@ -9832,9 +10228,9 @@
               <a:buNone/>
             </a:pPr>
             <a:r>
-              <a:rPr sz="1300" b="1">
-                <a:solidFill>
-                  <a:srgbClr val="F6C84C"/>
+              <a:rPr sz="1200" b="1">
+                <a:solidFill>
+                  <a:srgbClr val="FBBF24"/>
                 </a:solidFill>
                 <a:latin typeface="Calibri"/>
               </a:rPr>
@@ -9859,7 +10255,7 @@
       </p:sp>
       <p:sp>
         <p:nvSpPr>
-          <p:cNvPr id="4" name="Rounded Rectangle 3"/>
+          <p:cNvPr id="5" name="Rounded Rectangle 4"/>
           <p:cNvSpPr/>
           <p:nvPr/>
         </p:nvSpPr>
@@ -9905,7 +10301,7 @@
             <a:r>
               <a:rPr sz="1300" b="1">
                 <a:solidFill>
-                  <a:srgbClr val="1B3A5C"/>
+                  <a:srgbClr val="1E3A8A"/>
                 </a:solidFill>
                 <a:latin typeface="Calibri"/>
               </a:rPr>
@@ -9916,7 +10312,7 @@
       </p:sp>
       <p:sp>
         <p:nvSpPr>
-          <p:cNvPr id="5" name="TextBox 4"/>
+          <p:cNvPr id="6" name="TextBox 5"/>
           <p:cNvSpPr txBox="1"/>
           <p:nvPr/>
         </p:nvSpPr>
@@ -9941,7 +10337,7 @@
                 <a:spcPts val="1800"/>
               </a:spcAft>
               <a:buClr>
-                <a:srgbClr val="F28C3C"/>
+                <a:srgbClr val="EA580C"/>
               </a:buClr>
               <a:buFont typeface="Arial"/>
               <a:buChar char="•"/>
@@ -9949,7 +10345,7 @@
             <a:r>
               <a:rPr sz="1900">
                 <a:solidFill>
-                  <a:srgbClr val="27303A"/>
+                  <a:srgbClr val="0F172A"/>
                 </a:solidFill>
                 <a:latin typeface="Calibri"/>
               </a:rPr>
@@ -9962,7 +10358,7 @@
                 <a:spcPts val="1800"/>
               </a:spcAft>
               <a:buClr>
-                <a:srgbClr val="F28C3C"/>
+                <a:srgbClr val="EA580C"/>
               </a:buClr>
               <a:buFont typeface="Arial"/>
               <a:buChar char="•"/>
@@ -9970,7 +10366,7 @@
             <a:r>
               <a:rPr sz="1900">
                 <a:solidFill>
-                  <a:srgbClr val="27303A"/>
+                  <a:srgbClr val="0F172A"/>
                 </a:solidFill>
                 <a:latin typeface="Calibri"/>
               </a:rPr>
@@ -9983,7 +10379,7 @@
                 <a:spcPts val="1800"/>
               </a:spcAft>
               <a:buClr>
-                <a:srgbClr val="F28C3C"/>
+                <a:srgbClr val="EA580C"/>
               </a:buClr>
               <a:buFont typeface="Arial"/>
               <a:buChar char="•"/>
@@ -9991,7 +10387,7 @@
             <a:r>
               <a:rPr sz="1900">
                 <a:solidFill>
-                  <a:srgbClr val="27303A"/>
+                  <a:srgbClr val="0F172A"/>
                 </a:solidFill>
                 <a:latin typeface="Calibri"/>
               </a:rPr>
@@ -10004,7 +10400,7 @@
                 <a:spcPts val="1800"/>
               </a:spcAft>
               <a:buClr>
-                <a:srgbClr val="F28C3C"/>
+                <a:srgbClr val="EA580C"/>
               </a:buClr>
               <a:buFont typeface="Arial"/>
               <a:buChar char="•"/>
@@ -10012,7 +10408,7 @@
             <a:r>
               <a:rPr sz="1900">
                 <a:solidFill>
-                  <a:srgbClr val="27303A"/>
+                  <a:srgbClr val="0F172A"/>
                 </a:solidFill>
                 <a:latin typeface="Calibri"/>
               </a:rPr>
@@ -10025,7 +10421,7 @@
                 <a:spcPts val="1800"/>
               </a:spcAft>
               <a:buClr>
-                <a:srgbClr val="F28C3C"/>
+                <a:srgbClr val="EA580C"/>
               </a:buClr>
               <a:buFont typeface="Arial"/>
               <a:buChar char="•"/>
@@ -10033,7 +10429,7 @@
             <a:r>
               <a:rPr sz="1900">
                 <a:solidFill>
-                  <a:srgbClr val="27303A"/>
+                  <a:srgbClr val="0F172A"/>
                 </a:solidFill>
                 <a:latin typeface="Calibri"/>
               </a:rPr>
@@ -10044,7 +10440,7 @@
       </p:sp>
       <p:sp>
         <p:nvSpPr>
-          <p:cNvPr id="6" name="Rounded Rectangle 5"/>
+          <p:cNvPr id="7" name="Rounded Rectangle 6"/>
           <p:cNvSpPr/>
           <p:nvPr/>
         </p:nvSpPr>
@@ -10057,11 +10453,11 @@
             <a:avLst/>
           </a:prstGeom>
           <a:solidFill>
-            <a:srgbClr val="E8F1FA"/>
+            <a:srgbClr val="EFF6FF"/>
           </a:solidFill>
           <a:ln w="15875">
             <a:solidFill>
-              <a:srgbClr val="3D6EA5"/>
+              <a:srgbClr val="2563EB"/>
             </a:solidFill>
           </a:ln>
           <a:effectLst/>
@@ -10090,7 +10486,7 @@
       </p:sp>
       <p:sp>
         <p:nvSpPr>
-          <p:cNvPr id="7" name="Rounded Rectangle 6"/>
+          <p:cNvPr id="8" name="Rounded Rectangle 7"/>
           <p:cNvSpPr/>
           <p:nvPr/>
         </p:nvSpPr>
@@ -10105,7 +10501,7 @@
             </a:avLst>
           </a:prstGeom>
           <a:solidFill>
-            <a:srgbClr val="F28C3C"/>
+            <a:srgbClr val="EA580C"/>
           </a:solidFill>
           <a:ln>
             <a:noFill/>
@@ -10147,7 +10543,7 @@
       </p:sp>
       <p:sp>
         <p:nvSpPr>
-          <p:cNvPr id="8" name="TextBox 7"/>
+          <p:cNvPr id="9" name="TextBox 8"/>
           <p:cNvSpPr txBox="1"/>
           <p:nvPr/>
         </p:nvSpPr>
@@ -10173,7 +10569,7 @@
             <a:r>
               <a:rPr sz="1600" b="1" i="0">
                 <a:solidFill>
-                  <a:srgbClr val="27303A"/>
+                  <a:srgbClr val="0F172A"/>
                 </a:solidFill>
                 <a:latin typeface="Calibri"/>
               </a:rPr>
@@ -10184,7 +10580,7 @@
       </p:sp>
       <p:sp>
         <p:nvSpPr>
-          <p:cNvPr id="9" name="Oval 8"/>
+          <p:cNvPr id="10" name="Oval 9"/>
           <p:cNvSpPr/>
           <p:nvPr/>
         </p:nvSpPr>
@@ -10197,7 +10593,7 @@
             <a:avLst/>
           </a:prstGeom>
           <a:solidFill>
-            <a:srgbClr val="1B3A5C"/>
+            <a:srgbClr val="1E3A8A"/>
           </a:solidFill>
           <a:ln>
             <a:noFill/>
@@ -10239,7 +10635,7 @@
       </p:sp>
       <p:sp>
         <p:nvSpPr>
-          <p:cNvPr id="10" name="TextBox 9"/>
+          <p:cNvPr id="11" name="TextBox 10"/>
           <p:cNvSpPr txBox="1"/>
           <p:nvPr/>
         </p:nvSpPr>
@@ -10265,7 +10661,7 @@
             <a:r>
               <a:rPr sz="1500" b="0" i="0">
                 <a:solidFill>
-                  <a:srgbClr val="27303A"/>
+                  <a:srgbClr val="0F172A"/>
                 </a:solidFill>
                 <a:latin typeface="Calibri"/>
               </a:rPr>
@@ -10276,7 +10672,7 @@
       </p:sp>
       <p:sp>
         <p:nvSpPr>
-          <p:cNvPr id="11" name="Oval 10"/>
+          <p:cNvPr id="12" name="Oval 11"/>
           <p:cNvSpPr/>
           <p:nvPr/>
         </p:nvSpPr>
@@ -10289,7 +10685,7 @@
             <a:avLst/>
           </a:prstGeom>
           <a:solidFill>
-            <a:srgbClr val="1B3A5C"/>
+            <a:srgbClr val="1E3A8A"/>
           </a:solidFill>
           <a:ln>
             <a:noFill/>
@@ -10331,7 +10727,7 @@
       </p:sp>
       <p:sp>
         <p:nvSpPr>
-          <p:cNvPr id="12" name="TextBox 11"/>
+          <p:cNvPr id="13" name="TextBox 12"/>
           <p:cNvSpPr txBox="1"/>
           <p:nvPr/>
         </p:nvSpPr>
@@ -10357,7 +10753,7 @@
             <a:r>
               <a:rPr sz="1500" b="0" i="0">
                 <a:solidFill>
-                  <a:srgbClr val="27303A"/>
+                  <a:srgbClr val="0F172A"/>
                 </a:solidFill>
                 <a:latin typeface="Calibri"/>
               </a:rPr>
@@ -10371,7 +10767,7 @@
             <a:r>
               <a:rPr sz="1500" b="0" i="0">
                 <a:solidFill>
-                  <a:srgbClr val="27303A"/>
+                  <a:srgbClr val="0F172A"/>
                 </a:solidFill>
                 <a:latin typeface="Calibri"/>
               </a:rPr>
@@ -10382,7 +10778,7 @@
       </p:sp>
       <p:sp>
         <p:nvSpPr>
-          <p:cNvPr id="13" name="Oval 12"/>
+          <p:cNvPr id="14" name="Oval 13"/>
           <p:cNvSpPr/>
           <p:nvPr/>
         </p:nvSpPr>
@@ -10395,7 +10791,7 @@
             <a:avLst/>
           </a:prstGeom>
           <a:solidFill>
-            <a:srgbClr val="1B3A5C"/>
+            <a:srgbClr val="1E3A8A"/>
           </a:solidFill>
           <a:ln>
             <a:noFill/>
@@ -10437,7 +10833,7 @@
       </p:sp>
       <p:sp>
         <p:nvSpPr>
-          <p:cNvPr id="14" name="TextBox 13"/>
+          <p:cNvPr id="15" name="TextBox 14"/>
           <p:cNvSpPr txBox="1"/>
           <p:nvPr/>
         </p:nvSpPr>
@@ -10463,7 +10859,7 @@
             <a:r>
               <a:rPr sz="1500" b="0" i="0">
                 <a:solidFill>
-                  <a:srgbClr val="27303A"/>
+                  <a:srgbClr val="0F172A"/>
                 </a:solidFill>
                 <a:latin typeface="Calibri"/>
               </a:rPr>
@@ -10474,7 +10870,7 @@
       </p:sp>
       <p:sp>
         <p:nvSpPr>
-          <p:cNvPr id="15" name="TextBox 14"/>
+          <p:cNvPr id="16" name="TextBox 15"/>
           <p:cNvSpPr txBox="1"/>
           <p:nvPr/>
         </p:nvSpPr>
@@ -10500,7 +10896,7 @@
             <a:r>
               <a:rPr sz="1100" b="0" i="0">
                 <a:solidFill>
-                  <a:srgbClr val="8A96A6"/>
+                  <a:srgbClr val="64748B"/>
                 </a:solidFill>
                 <a:latin typeface="Calibri"/>
               </a:rPr>
@@ -10523,7 +10919,7 @@
     <p:bg>
       <p:bgPr>
         <a:solidFill>
-          <a:srgbClr val="FAFBFC"/>
+          <a:srgbClr val="F0F4FF"/>
         </a:solidFill>
         <a:effectLst/>
       </p:bgPr>
@@ -10544,13 +10940,13 @@
         <p:spPr>
           <a:xfrm>
             <a:off x="0" y="0"/>
-            <a:ext cx="12191695" cy="1051560"/>
+            <a:ext cx="12191695" cy="1024128"/>
           </a:xfrm>
           <a:prstGeom prst="rect">
             <a:avLst/>
           </a:prstGeom>
           <a:solidFill>
-            <a:srgbClr val="1B3A5C"/>
+            <a:srgbClr val="0F172A"/>
           </a:solidFill>
           <a:ln>
             <a:noFill/>
@@ -10581,13 +10977,57 @@
       </p:sp>
       <p:sp>
         <p:nvSpPr>
-          <p:cNvPr id="3" name="TextBox 2"/>
+          <p:cNvPr id="3" name="Rectangle 2"/>
+          <p:cNvSpPr/>
+          <p:nvPr/>
+        </p:nvSpPr>
+        <p:spPr>
+          <a:xfrm>
+            <a:off x="0" y="0"/>
+            <a:ext cx="64008" cy="1024128"/>
+          </a:xfrm>
+          <a:prstGeom prst="rect">
+            <a:avLst/>
+          </a:prstGeom>
+          <a:solidFill>
+            <a:srgbClr val="EA580C"/>
+          </a:solidFill>
+          <a:ln>
+            <a:noFill/>
+          </a:ln>
+          <a:effectLst/>
+        </p:spPr>
+        <p:style>
+          <a:lnRef idx="1">
+            <a:schemeClr val="accent1"/>
+          </a:lnRef>
+          <a:fillRef idx="3">
+            <a:schemeClr val="accent1"/>
+          </a:fillRef>
+          <a:effectRef idx="2">
+            <a:schemeClr val="accent1"/>
+          </a:effectRef>
+          <a:fontRef idx="minor">
+            <a:schemeClr val="lt1"/>
+          </a:fontRef>
+        </p:style>
+        <p:txBody>
+          <a:bodyPr rtlCol="0" anchor="ctr"/>
+          <a:lstStyle/>
+          <a:p>
+            <a:pPr algn="ctr"/>
+          </a:p>
+        </p:txBody>
+      </p:sp>
+      <p:sp>
+        <p:nvSpPr>
+          <p:cNvPr id="4" name="TextBox 3"/>
           <p:cNvSpPr txBox="1"/>
           <p:nvPr/>
         </p:nvSpPr>
         <p:spPr>
           <a:xfrm>
-            <a:off x="457200" y="91440"/>
+            <a:off x="228600" y="73152"/>
             <a:ext cx="9418320" cy="914400"/>
           </a:xfrm>
           <a:prstGeom prst="rect">
@@ -10605,9 +11045,9 @@
               <a:buNone/>
             </a:pPr>
             <a:r>
-              <a:rPr sz="1300" b="1">
-                <a:solidFill>
-                  <a:srgbClr val="F6C84C"/>
+              <a:rPr sz="1200" b="1">
+                <a:solidFill>
+                  <a:srgbClr val="FBBF24"/>
                 </a:solidFill>
                 <a:latin typeface="Calibri"/>
               </a:rPr>
@@ -10632,7 +11072,7 @@
       </p:sp>
       <p:sp>
         <p:nvSpPr>
-          <p:cNvPr id="4" name="Rounded Rectangle 3"/>
+          <p:cNvPr id="5" name="Rounded Rectangle 4"/>
           <p:cNvSpPr/>
           <p:nvPr/>
         </p:nvSpPr>
@@ -10678,7 +11118,7 @@
             <a:r>
               <a:rPr sz="1300" b="1">
                 <a:solidFill>
-                  <a:srgbClr val="F28C3C"/>
+                  <a:srgbClr val="EA580C"/>
                 </a:solidFill>
                 <a:latin typeface="Calibri"/>
               </a:rPr>
@@ -10689,7 +11129,7 @@
       </p:sp>
       <p:sp>
         <p:nvSpPr>
-          <p:cNvPr id="5" name="TextBox 4"/>
+          <p:cNvPr id="6" name="TextBox 5"/>
           <p:cNvSpPr txBox="1"/>
           <p:nvPr/>
         </p:nvSpPr>
@@ -10715,7 +11155,7 @@
             <a:r>
               <a:rPr sz="1800" b="0" i="0">
                 <a:solidFill>
-                  <a:srgbClr val="27303A"/>
+                  <a:srgbClr val="0F172A"/>
                 </a:solidFill>
                 <a:latin typeface="Calibri"/>
               </a:rPr>
@@ -10726,7 +11166,7 @@
       </p:sp>
       <p:pic>
         <p:nvPicPr>
-          <p:cNvPr id="6" name="Picture 5" descr="f_zaehlprinzip.png"/>
+          <p:cNvPr id="7" name="Picture 6" descr="f_zaehlprinzip.png"/>
           <p:cNvPicPr>
             <a:picLocks noChangeAspect="1"/>
           </p:cNvPicPr>
@@ -10750,7 +11190,7 @@
       </p:pic>
       <p:sp>
         <p:nvSpPr>
-          <p:cNvPr id="7" name="Rounded Rectangle 6"/>
+          <p:cNvPr id="8" name="Rounded Rectangle 7"/>
           <p:cNvSpPr/>
           <p:nvPr/>
         </p:nvSpPr>
@@ -10763,11 +11203,11 @@
             <a:avLst/>
           </a:prstGeom>
           <a:solidFill>
-            <a:srgbClr val="E8F1FA"/>
+            <a:srgbClr val="EFF6FF"/>
           </a:solidFill>
           <a:ln w="15875">
             <a:solidFill>
-              <a:srgbClr val="3D6EA5"/>
+              <a:srgbClr val="2563EB"/>
             </a:solidFill>
           </a:ln>
           <a:effectLst/>
@@ -10796,7 +11236,7 @@
       </p:sp>
       <p:sp>
         <p:nvSpPr>
-          <p:cNvPr id="8" name="Rounded Rectangle 7"/>
+          <p:cNvPr id="9" name="Rounded Rectangle 8"/>
           <p:cNvSpPr/>
           <p:nvPr/>
         </p:nvSpPr>
@@ -10811,7 +11251,7 @@
             </a:avLst>
           </a:prstGeom>
           <a:solidFill>
-            <a:srgbClr val="F28C3C"/>
+            <a:srgbClr val="EA580C"/>
           </a:solidFill>
           <a:ln>
             <a:noFill/>
@@ -10853,7 +11293,7 @@
       </p:sp>
       <p:sp>
         <p:nvSpPr>
-          <p:cNvPr id="9" name="TextBox 8"/>
+          <p:cNvPr id="10" name="TextBox 9"/>
           <p:cNvSpPr txBox="1"/>
           <p:nvPr/>
         </p:nvSpPr>
@@ -10879,7 +11319,7 @@
             <a:r>
               <a:rPr sz="1600" b="0" i="0">
                 <a:solidFill>
-                  <a:srgbClr val="27303A"/>
+                  <a:srgbClr val="0F172A"/>
                 </a:solidFill>
                 <a:latin typeface="Calibri"/>
               </a:rPr>
@@ -10893,7 +11333,7 @@
             <a:r>
               <a:rPr sz="1600" b="0" i="0">
                 <a:solidFill>
-                  <a:srgbClr val="27303A"/>
+                  <a:srgbClr val="0F172A"/>
                 </a:solidFill>
                 <a:latin typeface="Calibri"/>
               </a:rPr>
@@ -10904,7 +11344,7 @@
       </p:sp>
       <p:pic>
         <p:nvPicPr>
-          <p:cNvPr id="10" name="Picture 9" descr="outfit_grid.png"/>
+          <p:cNvPr id="11" name="Picture 10" descr="outfit_grid.png"/>
           <p:cNvPicPr>
             <a:picLocks noChangeAspect="1"/>
           </p:cNvPicPr>
@@ -10928,7 +11368,7 @@
       </p:pic>
       <p:sp>
         <p:nvSpPr>
-          <p:cNvPr id="11" name="TextBox 10"/>
+          <p:cNvPr id="12" name="TextBox 11"/>
           <p:cNvSpPr txBox="1"/>
           <p:nvPr/>
         </p:nvSpPr>
@@ -10954,7 +11394,7 @@
             <a:r>
               <a:rPr sz="1600" b="1" i="0">
                 <a:solidFill>
-                  <a:srgbClr val="27303A"/>
+                  <a:srgbClr val="0F172A"/>
                 </a:solidFill>
                 <a:latin typeface="Calibri"/>
               </a:rPr>
@@ -10965,7 +11405,7 @@
       </p:sp>
       <p:pic>
         <p:nvPicPr>
-          <p:cNvPr id="12" name="Picture 11" descr="f_beispiel_outfits.png"/>
+          <p:cNvPr id="13" name="Picture 12" descr="f_beispiel_outfits.png"/>
           <p:cNvPicPr>
             <a:picLocks noChangeAspect="1"/>
           </p:cNvPicPr>
@@ -10989,7 +11429,7 @@
       </p:pic>
       <p:sp>
         <p:nvSpPr>
-          <p:cNvPr id="13" name="TextBox 12"/>
+          <p:cNvPr id="14" name="TextBox 13"/>
           <p:cNvSpPr txBox="1"/>
           <p:nvPr/>
         </p:nvSpPr>
@@ -11015,7 +11455,7 @@
             <a:r>
               <a:rPr sz="1100" b="0" i="0">
                 <a:solidFill>
-                  <a:srgbClr val="8A96A6"/>
+                  <a:srgbClr val="64748B"/>
                 </a:solidFill>
                 <a:latin typeface="Calibri"/>
               </a:rPr>
@@ -11038,7 +11478,7 @@
     <p:bg>
       <p:bgPr>
         <a:solidFill>
-          <a:srgbClr val="FAFBFC"/>
+          <a:srgbClr val="F0F4FF"/>
         </a:solidFill>
         <a:effectLst/>
       </p:bgPr>
@@ -11059,13 +11499,13 @@
         <p:spPr>
           <a:xfrm>
             <a:off x="0" y="0"/>
-            <a:ext cx="12191695" cy="1051560"/>
+            <a:ext cx="12191695" cy="1024128"/>
           </a:xfrm>
           <a:prstGeom prst="rect">
             <a:avLst/>
           </a:prstGeom>
           <a:solidFill>
-            <a:srgbClr val="1B3A5C"/>
+            <a:srgbClr val="0F172A"/>
           </a:solidFill>
           <a:ln>
             <a:noFill/>
@@ -11096,13 +11536,57 @@
       </p:sp>
       <p:sp>
         <p:nvSpPr>
-          <p:cNvPr id="3" name="TextBox 2"/>
+          <p:cNvPr id="3" name="Rectangle 2"/>
+          <p:cNvSpPr/>
+          <p:nvPr/>
+        </p:nvSpPr>
+        <p:spPr>
+          <a:xfrm>
+            <a:off x="0" y="0"/>
+            <a:ext cx="64008" cy="1024128"/>
+          </a:xfrm>
+          <a:prstGeom prst="rect">
+            <a:avLst/>
+          </a:prstGeom>
+          <a:solidFill>
+            <a:srgbClr val="EA580C"/>
+          </a:solidFill>
+          <a:ln>
+            <a:noFill/>
+          </a:ln>
+          <a:effectLst/>
+        </p:spPr>
+        <p:style>
+          <a:lnRef idx="1">
+            <a:schemeClr val="accent1"/>
+          </a:lnRef>
+          <a:fillRef idx="3">
+            <a:schemeClr val="accent1"/>
+          </a:fillRef>
+          <a:effectRef idx="2">
+            <a:schemeClr val="accent1"/>
+          </a:effectRef>
+          <a:fontRef idx="minor">
+            <a:schemeClr val="lt1"/>
+          </a:fontRef>
+        </p:style>
+        <p:txBody>
+          <a:bodyPr rtlCol="0" anchor="ctr"/>
+          <a:lstStyle/>
+          <a:p>
+            <a:pPr algn="ctr"/>
+          </a:p>
+        </p:txBody>
+      </p:sp>
+      <p:sp>
+        <p:nvSpPr>
+          <p:cNvPr id="4" name="TextBox 3"/>
           <p:cNvSpPr txBox="1"/>
           <p:nvPr/>
         </p:nvSpPr>
         <p:spPr>
           <a:xfrm>
-            <a:off x="457200" y="91440"/>
+            <a:off x="228600" y="73152"/>
             <a:ext cx="9418320" cy="914400"/>
           </a:xfrm>
           <a:prstGeom prst="rect">
@@ -11120,9 +11604,9 @@
               <a:buNone/>
             </a:pPr>
             <a:r>
-              <a:rPr sz="1300" b="1">
-                <a:solidFill>
-                  <a:srgbClr val="F6C84C"/>
+              <a:rPr sz="1200" b="1">
+                <a:solidFill>
+                  <a:srgbClr val="FBBF24"/>
                 </a:solidFill>
                 <a:latin typeface="Calibri"/>
               </a:rPr>
@@ -11147,7 +11631,7 @@
       </p:sp>
       <p:sp>
         <p:nvSpPr>
-          <p:cNvPr id="4" name="Rounded Rectangle 3"/>
+          <p:cNvPr id="5" name="Rounded Rectangle 4"/>
           <p:cNvSpPr/>
           <p:nvPr/>
         </p:nvSpPr>
@@ -11193,7 +11677,7 @@
             <a:r>
               <a:rPr sz="1300" b="1">
                 <a:solidFill>
-                  <a:srgbClr val="3D6EA5"/>
+                  <a:srgbClr val="2563EB"/>
                 </a:solidFill>
                 <a:latin typeface="Calibri"/>
               </a:rPr>
@@ -11204,7 +11688,7 @@
       </p:sp>
       <p:sp>
         <p:nvSpPr>
-          <p:cNvPr id="5" name="Rounded Rectangle 4"/>
+          <p:cNvPr id="6" name="Rounded Rectangle 5"/>
           <p:cNvSpPr/>
           <p:nvPr/>
         </p:nvSpPr>
@@ -11219,7 +11703,7 @@
             </a:avLst>
           </a:prstGeom>
           <a:solidFill>
-            <a:srgbClr val="1B3A5C"/>
+            <a:srgbClr val="1E3A8A"/>
           </a:solidFill>
           <a:ln>
             <a:noFill/>
@@ -11261,7 +11745,7 @@
       </p:sp>
       <p:pic>
         <p:nvPicPr>
-          <p:cNvPr id="6" name="Picture 5" descr="f_permutation_ohne.png"/>
+          <p:cNvPr id="7" name="Picture 6" descr="f_permutation_ohne.png"/>
           <p:cNvPicPr>
             <a:picLocks noChangeAspect="1"/>
           </p:cNvPicPr>
@@ -11285,7 +11769,7 @@
       </p:pic>
       <p:sp>
         <p:nvSpPr>
-          <p:cNvPr id="7" name="TextBox 6"/>
+          <p:cNvPr id="8" name="TextBox 7"/>
           <p:cNvSpPr txBox="1"/>
           <p:nvPr/>
         </p:nvSpPr>
@@ -11311,7 +11795,7 @@
             <a:r>
               <a:rPr sz="1400" b="0" i="0">
                 <a:solidFill>
-                  <a:srgbClr val="27303A"/>
+                  <a:srgbClr val="0F172A"/>
                 </a:solidFill>
                 <a:latin typeface="Calibri"/>
               </a:rPr>
@@ -11322,7 +11806,7 @@
       </p:sp>
       <p:sp>
         <p:nvSpPr>
-          <p:cNvPr id="8" name="TextBox 7"/>
+          <p:cNvPr id="9" name="TextBox 8"/>
           <p:cNvSpPr txBox="1"/>
           <p:nvPr/>
         </p:nvSpPr>
@@ -11348,7 +11832,7 @@
             <a:r>
               <a:rPr sz="1400" b="0" i="0">
                 <a:solidFill>
-                  <a:srgbClr val="27303A"/>
+                  <a:srgbClr val="0F172A"/>
                 </a:solidFill>
                 <a:latin typeface="Calibri"/>
               </a:rPr>
@@ -11359,7 +11843,7 @@
       </p:sp>
       <p:pic>
         <p:nvPicPr>
-          <p:cNvPr id="9" name="Picture 8" descr="f_beispiel_5fakultaet.png"/>
+          <p:cNvPr id="10" name="Picture 9" descr="f_beispiel_5fakultaet.png"/>
           <p:cNvPicPr>
             <a:picLocks noChangeAspect="1"/>
           </p:cNvPicPr>
@@ -11383,7 +11867,7 @@
       </p:pic>
       <p:pic>
         <p:nvPicPr>
-          <p:cNvPr id="10" name="Picture 9" descr="permutation_tree.png"/>
+          <p:cNvPr id="11" name="Picture 10" descr="permutation_tree.png"/>
           <p:cNvPicPr>
             <a:picLocks noChangeAspect="1"/>
           </p:cNvPicPr>
@@ -11407,7 +11891,7 @@
       </p:pic>
       <p:sp>
         <p:nvSpPr>
-          <p:cNvPr id="11" name="TextBox 10"/>
+          <p:cNvPr id="12" name="TextBox 11"/>
           <p:cNvSpPr txBox="1"/>
           <p:nvPr/>
         </p:nvSpPr>
@@ -11433,7 +11917,7 @@
             <a:r>
               <a:rPr sz="1300" b="0" i="0">
                 <a:solidFill>
-                  <a:srgbClr val="8A96A6"/>
+                  <a:srgbClr val="64748B"/>
                 </a:solidFill>
                 <a:latin typeface="Calibri"/>
               </a:rPr>
@@ -11444,7 +11928,7 @@
       </p:sp>
       <p:sp>
         <p:nvSpPr>
-          <p:cNvPr id="12" name="Rounded Rectangle 11"/>
+          <p:cNvPr id="13" name="Rounded Rectangle 12"/>
           <p:cNvSpPr/>
           <p:nvPr/>
         </p:nvSpPr>
@@ -11459,7 +11943,7 @@
             </a:avLst>
           </a:prstGeom>
           <a:solidFill>
-            <a:srgbClr val="F28C3C"/>
+            <a:srgbClr val="EA580C"/>
           </a:solidFill>
           <a:ln>
             <a:noFill/>
@@ -11501,7 +11985,7 @@
       </p:sp>
       <p:pic>
         <p:nvPicPr>
-          <p:cNvPr id="13" name="Picture 12" descr="f_permutation_mit.png"/>
+          <p:cNvPr id="14" name="Picture 13" descr="f_permutation_mit.png"/>
           <p:cNvPicPr>
             <a:picLocks noChangeAspect="1"/>
           </p:cNvPicPr>
@@ -11525,7 +12009,7 @@
       </p:pic>
       <p:sp>
         <p:nvSpPr>
-          <p:cNvPr id="14" name="TextBox 13"/>
+          <p:cNvPr id="15" name="TextBox 14"/>
           <p:cNvSpPr txBox="1"/>
           <p:nvPr/>
         </p:nvSpPr>
@@ -11551,7 +12035,7 @@
             <a:r>
               <a:rPr sz="1400" b="0" i="0">
                 <a:solidFill>
-                  <a:srgbClr val="27303A"/>
+                  <a:srgbClr val="0F172A"/>
                 </a:solidFill>
                 <a:latin typeface="Calibri"/>
               </a:rPr>
@@ -11562,7 +12046,7 @@
       </p:sp>
       <p:sp>
         <p:nvSpPr>
-          <p:cNvPr id="15" name="Rounded Rectangle 14"/>
+          <p:cNvPr id="16" name="Rounded Rectangle 15"/>
           <p:cNvSpPr/>
           <p:nvPr/>
         </p:nvSpPr>
@@ -11577,7 +12061,7 @@
             </a:avLst>
           </a:prstGeom>
           <a:solidFill>
-            <a:srgbClr val="3D6EA5"/>
+            <a:srgbClr val="2563EB"/>
           </a:solidFill>
           <a:ln>
             <a:noFill/>
@@ -11619,7 +12103,7 @@
       </p:sp>
       <p:sp>
         <p:nvSpPr>
-          <p:cNvPr id="16" name="TextBox 15"/>
+          <p:cNvPr id="17" name="TextBox 16"/>
           <p:cNvSpPr txBox="1"/>
           <p:nvPr/>
         </p:nvSpPr>
@@ -11645,7 +12129,7 @@
             <a:r>
               <a:rPr sz="4000" b="1">
                 <a:solidFill>
-                  <a:srgbClr val="1B3A5C"/>
+                  <a:srgbClr val="1E3A8A"/>
                 </a:solidFill>
                 <a:latin typeface="Calibri"/>
               </a:rPr>
@@ -11654,7 +12138,7 @@
             <a:r>
               <a:rPr sz="4000" b="1">
                 <a:solidFill>
-                  <a:srgbClr val="F28C3C"/>
+                  <a:srgbClr val="EA580C"/>
                 </a:solidFill>
                 <a:latin typeface="Calibri"/>
               </a:rPr>
@@ -11663,7 +12147,7 @@
             <a:r>
               <a:rPr sz="4000" b="1">
                 <a:solidFill>
-                  <a:srgbClr val="1B3A5C"/>
+                  <a:srgbClr val="1E3A8A"/>
                 </a:solidFill>
                 <a:latin typeface="Calibri"/>
               </a:rPr>
@@ -11672,7 +12156,7 @@
             <a:r>
               <a:rPr sz="4000" b="1">
                 <a:solidFill>
-                  <a:srgbClr val="F28C3C"/>
+                  <a:srgbClr val="EA580C"/>
                 </a:solidFill>
                 <a:latin typeface="Calibri"/>
               </a:rPr>
@@ -11681,7 +12165,7 @@
             <a:r>
               <a:rPr sz="4000" b="1">
                 <a:solidFill>
-                  <a:srgbClr val="1B3A5C"/>
+                  <a:srgbClr val="1E3A8A"/>
                 </a:solidFill>
                 <a:latin typeface="Calibri"/>
               </a:rPr>
@@ -11690,7 +12174,7 @@
             <a:r>
               <a:rPr sz="4000" b="1">
                 <a:solidFill>
-                  <a:srgbClr val="3D6EA5"/>
+                  <a:srgbClr val="2563EB"/>
                 </a:solidFill>
                 <a:latin typeface="Calibri"/>
               </a:rPr>
@@ -11701,7 +12185,7 @@
       </p:sp>
       <p:sp>
         <p:nvSpPr>
-          <p:cNvPr id="17" name="TextBox 16"/>
+          <p:cNvPr id="18" name="TextBox 17"/>
           <p:cNvSpPr txBox="1"/>
           <p:nvPr/>
         </p:nvSpPr>
@@ -11727,7 +12211,7 @@
             <a:r>
               <a:rPr sz="1400" b="0" i="0">
                 <a:solidFill>
-                  <a:srgbClr val="27303A"/>
+                  <a:srgbClr val="0F172A"/>
                 </a:solidFill>
                 <a:latin typeface="Calibri"/>
               </a:rPr>
@@ -11738,7 +12222,7 @@
       </p:sp>
       <p:pic>
         <p:nvPicPr>
-          <p:cNvPr id="18" name="Picture 17" descr="f_beispiel_ananas.png"/>
+          <p:cNvPr id="19" name="Picture 18" descr="f_beispiel_ananas.png"/>
           <p:cNvPicPr>
             <a:picLocks noChangeAspect="1"/>
           </p:cNvPicPr>
@@ -11762,7 +12246,7 @@
       </p:pic>
       <p:sp>
         <p:nvSpPr>
-          <p:cNvPr id="19" name="TextBox 18"/>
+          <p:cNvPr id="20" name="TextBox 19"/>
           <p:cNvSpPr txBox="1"/>
           <p:nvPr/>
         </p:nvSpPr>
@@ -11788,7 +12272,7 @@
             <a:r>
               <a:rPr sz="1100" b="0" i="0">
                 <a:solidFill>
-                  <a:srgbClr val="8A96A6"/>
+                  <a:srgbClr val="64748B"/>
                 </a:solidFill>
                 <a:latin typeface="Calibri"/>
               </a:rPr>
@@ -11811,7 +12295,7 @@
     <p:bg>
       <p:bgPr>
         <a:solidFill>
-          <a:srgbClr val="FAFBFC"/>
+          <a:srgbClr val="F0F4FF"/>
         </a:solidFill>
         <a:effectLst/>
       </p:bgPr>
@@ -11832,13 +12316,13 @@
         <p:spPr>
           <a:xfrm>
             <a:off x="0" y="0"/>
-            <a:ext cx="12191695" cy="1051560"/>
+            <a:ext cx="12191695" cy="1024128"/>
           </a:xfrm>
           <a:prstGeom prst="rect">
             <a:avLst/>
           </a:prstGeom>
           <a:solidFill>
-            <a:srgbClr val="1B3A5C"/>
+            <a:srgbClr val="0F172A"/>
           </a:solidFill>
           <a:ln>
             <a:noFill/>
@@ -11869,13 +12353,57 @@
       </p:sp>
       <p:sp>
         <p:nvSpPr>
-          <p:cNvPr id="3" name="TextBox 2"/>
+          <p:cNvPr id="3" name="Rectangle 2"/>
+          <p:cNvSpPr/>
+          <p:nvPr/>
+        </p:nvSpPr>
+        <p:spPr>
+          <a:xfrm>
+            <a:off x="0" y="0"/>
+            <a:ext cx="64008" cy="1024128"/>
+          </a:xfrm>
+          <a:prstGeom prst="rect">
+            <a:avLst/>
+          </a:prstGeom>
+          <a:solidFill>
+            <a:srgbClr val="EA580C"/>
+          </a:solidFill>
+          <a:ln>
+            <a:noFill/>
+          </a:ln>
+          <a:effectLst/>
+        </p:spPr>
+        <p:style>
+          <a:lnRef idx="1">
+            <a:schemeClr val="accent1"/>
+          </a:lnRef>
+          <a:fillRef idx="3">
+            <a:schemeClr val="accent1"/>
+          </a:fillRef>
+          <a:effectRef idx="2">
+            <a:schemeClr val="accent1"/>
+          </a:effectRef>
+          <a:fontRef idx="minor">
+            <a:schemeClr val="lt1"/>
+          </a:fontRef>
+        </p:style>
+        <p:txBody>
+          <a:bodyPr rtlCol="0" anchor="ctr"/>
+          <a:lstStyle/>
+          <a:p>
+            <a:pPr algn="ctr"/>
+          </a:p>
+        </p:txBody>
+      </p:sp>
+      <p:sp>
+        <p:nvSpPr>
+          <p:cNvPr id="4" name="TextBox 3"/>
           <p:cNvSpPr txBox="1"/>
           <p:nvPr/>
         </p:nvSpPr>
         <p:spPr>
           <a:xfrm>
-            <a:off x="457200" y="91440"/>
+            <a:off x="228600" y="73152"/>
             <a:ext cx="9418320" cy="914400"/>
           </a:xfrm>
           <a:prstGeom prst="rect">
@@ -11893,9 +12421,9 @@
               <a:buNone/>
             </a:pPr>
             <a:r>
-              <a:rPr sz="1300" b="1">
-                <a:solidFill>
-                  <a:srgbClr val="F6C84C"/>
+              <a:rPr sz="1200" b="1">
+                <a:solidFill>
+                  <a:srgbClr val="FBBF24"/>
                 </a:solidFill>
                 <a:latin typeface="Calibri"/>
               </a:rPr>
@@ -11920,7 +12448,7 @@
       </p:sp>
       <p:sp>
         <p:nvSpPr>
-          <p:cNvPr id="4" name="Rounded Rectangle 3"/>
+          <p:cNvPr id="5" name="Rounded Rectangle 4"/>
           <p:cNvSpPr/>
           <p:nvPr/>
         </p:nvSpPr>
@@ -11966,7 +12494,7 @@
             <a:r>
               <a:rPr sz="1300" b="1">
                 <a:solidFill>
-                  <a:srgbClr val="1B3A5C"/>
+                  <a:srgbClr val="1E3A8A"/>
                 </a:solidFill>
                 <a:latin typeface="Calibri"/>
               </a:rPr>
@@ -11977,7 +12505,7 @@
       </p:sp>
       <p:sp>
         <p:nvSpPr>
-          <p:cNvPr id="5" name="Rounded Rectangle 4"/>
+          <p:cNvPr id="6" name="Rounded Rectangle 5"/>
           <p:cNvSpPr/>
           <p:nvPr/>
         </p:nvSpPr>
@@ -11992,7 +12520,7 @@
             </a:avLst>
           </a:prstGeom>
           <a:solidFill>
-            <a:srgbClr val="1B3A5C"/>
+            <a:srgbClr val="1E3A8A"/>
           </a:solidFill>
           <a:ln>
             <a:noFill/>
@@ -12034,7 +12562,7 @@
       </p:sp>
       <p:pic>
         <p:nvPicPr>
-          <p:cNvPr id="6" name="Picture 5" descr="f_variation_ohne.png"/>
+          <p:cNvPr id="7" name="Picture 6" descr="f_variation_ohne.png"/>
           <p:cNvPicPr>
             <a:picLocks noChangeAspect="1"/>
           </p:cNvPicPr>
@@ -12058,7 +12586,7 @@
       </p:pic>
       <p:sp>
         <p:nvSpPr>
-          <p:cNvPr id="7" name="TextBox 6"/>
+          <p:cNvPr id="8" name="TextBox 7"/>
           <p:cNvSpPr txBox="1"/>
           <p:nvPr/>
         </p:nvSpPr>
@@ -12084,7 +12612,7 @@
             <a:r>
               <a:rPr sz="1400" b="0" i="0">
                 <a:solidFill>
-                  <a:srgbClr val="27303A"/>
+                  <a:srgbClr val="0F172A"/>
                 </a:solidFill>
                 <a:latin typeface="Calibri"/>
               </a:rPr>
@@ -12095,7 +12623,7 @@
       </p:sp>
       <p:pic>
         <p:nvPicPr>
-          <p:cNvPr id="8" name="Picture 7" descr="f_beispiel_stockerl.png"/>
+          <p:cNvPr id="9" name="Picture 8" descr="f_beispiel_stockerl.png"/>
           <p:cNvPicPr>
             <a:picLocks noChangeAspect="1"/>
           </p:cNvPicPr>
@@ -12119,7 +12647,7 @@
       </p:pic>
       <p:pic>
         <p:nvPicPr>
-          <p:cNvPr id="9" name="Picture 8" descr="podium.png"/>
+          <p:cNvPr id="10" name="Picture 9" descr="podium.png"/>
           <p:cNvPicPr>
             <a:picLocks noChangeAspect="1"/>
           </p:cNvPicPr>
@@ -12143,7 +12671,7 @@
       </p:pic>
       <p:sp>
         <p:nvSpPr>
-          <p:cNvPr id="10" name="TextBox 9"/>
+          <p:cNvPr id="11" name="TextBox 10"/>
           <p:cNvSpPr txBox="1"/>
           <p:nvPr/>
         </p:nvSpPr>
@@ -12169,7 +12697,7 @@
             <a:r>
               <a:rPr sz="1300" b="0" i="0">
                 <a:solidFill>
-                  <a:srgbClr val="8A96A6"/>
+                  <a:srgbClr val="64748B"/>
                 </a:solidFill>
                 <a:latin typeface="Calibri"/>
               </a:rPr>
@@ -12180,7 +12708,7 @@
       </p:sp>
       <p:sp>
         <p:nvSpPr>
-          <p:cNvPr id="11" name="Rounded Rectangle 10"/>
+          <p:cNvPr id="12" name="Rounded Rectangle 11"/>
           <p:cNvSpPr/>
           <p:nvPr/>
         </p:nvSpPr>
@@ -12195,7 +12723,7 @@
             </a:avLst>
           </a:prstGeom>
           <a:solidFill>
-            <a:srgbClr val="F28C3C"/>
+            <a:srgbClr val="EA580C"/>
           </a:solidFill>
           <a:ln>
             <a:noFill/>
@@ -12237,7 +12765,7 @@
       </p:sp>
       <p:pic>
         <p:nvPicPr>
-          <p:cNvPr id="12" name="Picture 11" descr="f_variation_mit.png"/>
+          <p:cNvPr id="13" name="Picture 12" descr="f_variation_mit.png"/>
           <p:cNvPicPr>
             <a:picLocks noChangeAspect="1"/>
           </p:cNvPicPr>
@@ -12261,7 +12789,7 @@
       </p:pic>
       <p:sp>
         <p:nvSpPr>
-          <p:cNvPr id="13" name="TextBox 12"/>
+          <p:cNvPr id="14" name="TextBox 13"/>
           <p:cNvSpPr txBox="1"/>
           <p:nvPr/>
         </p:nvSpPr>
@@ -12287,7 +12815,7 @@
             <a:r>
               <a:rPr sz="1400" b="0" i="0">
                 <a:solidFill>
-                  <a:srgbClr val="27303A"/>
+                  <a:srgbClr val="0F172A"/>
                 </a:solidFill>
                 <a:latin typeface="Calibri"/>
               </a:rPr>
@@ -12298,7 +12826,7 @@
       </p:sp>
       <p:sp>
         <p:nvSpPr>
-          <p:cNvPr id="14" name="Rounded Rectangle 13"/>
+          <p:cNvPr id="15" name="Rounded Rectangle 14"/>
           <p:cNvSpPr/>
           <p:nvPr/>
         </p:nvSpPr>
@@ -12313,7 +12841,7 @@
             </a:avLst>
           </a:prstGeom>
           <a:solidFill>
-            <a:srgbClr val="3D6EA5"/>
+            <a:srgbClr val="2563EB"/>
           </a:solidFill>
           <a:ln>
             <a:noFill/>
@@ -12355,7 +12883,7 @@
       </p:sp>
       <p:sp>
         <p:nvSpPr>
-          <p:cNvPr id="15" name="Rounded Rectangle 14"/>
+          <p:cNvPr id="16" name="Rounded Rectangle 15"/>
           <p:cNvSpPr/>
           <p:nvPr/>
         </p:nvSpPr>
@@ -12368,11 +12896,11 @@
             <a:avLst/>
           </a:prstGeom>
           <a:solidFill>
-            <a:srgbClr val="E8F1FA"/>
+            <a:srgbClr val="EFF6FF"/>
           </a:solidFill>
           <a:ln w="19050">
             <a:solidFill>
-              <a:srgbClr val="1B3A5C"/>
+              <a:srgbClr val="1E3A8A"/>
             </a:solidFill>
           </a:ln>
           <a:effectLst/>
@@ -12401,7 +12929,7 @@
       </p:sp>
       <p:sp>
         <p:nvSpPr>
-          <p:cNvPr id="16" name="TextBox 15"/>
+          <p:cNvPr id="17" name="TextBox 16"/>
           <p:cNvSpPr txBox="1"/>
           <p:nvPr/>
         </p:nvSpPr>
@@ -12427,7 +12955,7 @@
             <a:r>
               <a:rPr sz="3600" b="1" i="0">
                 <a:solidFill>
-                  <a:srgbClr val="1B3A5C"/>
+                  <a:srgbClr val="1E3A8A"/>
                 </a:solidFill>
                 <a:latin typeface="Calibri"/>
               </a:rPr>
@@ -12438,7 +12966,7 @@
       </p:sp>
       <p:sp>
         <p:nvSpPr>
-          <p:cNvPr id="17" name="Rounded Rectangle 16"/>
+          <p:cNvPr id="18" name="Rounded Rectangle 17"/>
           <p:cNvSpPr/>
           <p:nvPr/>
         </p:nvSpPr>
@@ -12451,11 +12979,11 @@
             <a:avLst/>
           </a:prstGeom>
           <a:solidFill>
-            <a:srgbClr val="E8F1FA"/>
+            <a:srgbClr val="EFF6FF"/>
           </a:solidFill>
           <a:ln w="19050">
             <a:solidFill>
-              <a:srgbClr val="1B3A5C"/>
+              <a:srgbClr val="1E3A8A"/>
             </a:solidFill>
           </a:ln>
           <a:effectLst/>
@@ -12484,7 +13012,7 @@
       </p:sp>
       <p:sp>
         <p:nvSpPr>
-          <p:cNvPr id="18" name="TextBox 17"/>
+          <p:cNvPr id="19" name="TextBox 18"/>
           <p:cNvSpPr txBox="1"/>
           <p:nvPr/>
         </p:nvSpPr>
@@ -12510,7 +13038,7 @@
             <a:r>
               <a:rPr sz="3600" b="1" i="0">
                 <a:solidFill>
-                  <a:srgbClr val="1B3A5C"/>
+                  <a:srgbClr val="1E3A8A"/>
                 </a:solidFill>
                 <a:latin typeface="Calibri"/>
               </a:rPr>
@@ -12521,7 +13049,7 @@
       </p:sp>
       <p:sp>
         <p:nvSpPr>
-          <p:cNvPr id="19" name="Rounded Rectangle 18"/>
+          <p:cNvPr id="20" name="Rounded Rectangle 19"/>
           <p:cNvSpPr/>
           <p:nvPr/>
         </p:nvSpPr>
@@ -12534,11 +13062,11 @@
             <a:avLst/>
           </a:prstGeom>
           <a:solidFill>
-            <a:srgbClr val="E8F1FA"/>
+            <a:srgbClr val="EFF6FF"/>
           </a:solidFill>
           <a:ln w="19050">
             <a:solidFill>
-              <a:srgbClr val="1B3A5C"/>
+              <a:srgbClr val="1E3A8A"/>
             </a:solidFill>
           </a:ln>
           <a:effectLst/>
@@ -12567,7 +13095,7 @@
       </p:sp>
       <p:sp>
         <p:nvSpPr>
-          <p:cNvPr id="20" name="TextBox 19"/>
+          <p:cNvPr id="21" name="TextBox 20"/>
           <p:cNvSpPr txBox="1"/>
           <p:nvPr/>
         </p:nvSpPr>
@@ -12593,7 +13121,7 @@
             <a:r>
               <a:rPr sz="3600" b="1" i="0">
                 <a:solidFill>
-                  <a:srgbClr val="1B3A5C"/>
+                  <a:srgbClr val="1E3A8A"/>
                 </a:solidFill>
                 <a:latin typeface="Calibri"/>
               </a:rPr>
@@ -12604,7 +13132,7 @@
       </p:sp>
       <p:sp>
         <p:nvSpPr>
-          <p:cNvPr id="21" name="Rounded Rectangle 20"/>
+          <p:cNvPr id="22" name="Rounded Rectangle 21"/>
           <p:cNvSpPr/>
           <p:nvPr/>
         </p:nvSpPr>
@@ -12617,11 +13145,11 @@
             <a:avLst/>
           </a:prstGeom>
           <a:solidFill>
-            <a:srgbClr val="E8F1FA"/>
+            <a:srgbClr val="EFF6FF"/>
           </a:solidFill>
           <a:ln w="19050">
             <a:solidFill>
-              <a:srgbClr val="1B3A5C"/>
+              <a:srgbClr val="1E3A8A"/>
             </a:solidFill>
           </a:ln>
           <a:effectLst/>
@@ -12650,7 +13178,7 @@
       </p:sp>
       <p:sp>
         <p:nvSpPr>
-          <p:cNvPr id="22" name="TextBox 21"/>
+          <p:cNvPr id="23" name="TextBox 22"/>
           <p:cNvSpPr txBox="1"/>
           <p:nvPr/>
         </p:nvSpPr>
@@ -12676,7 +13204,7 @@
             <a:r>
               <a:rPr sz="3600" b="1" i="0">
                 <a:solidFill>
-                  <a:srgbClr val="1B3A5C"/>
+                  <a:srgbClr val="1E3A8A"/>
                 </a:solidFill>
                 <a:latin typeface="Calibri"/>
               </a:rPr>
@@ -12687,7 +13215,7 @@
       </p:sp>
       <p:sp>
         <p:nvSpPr>
-          <p:cNvPr id="23" name="TextBox 22"/>
+          <p:cNvPr id="24" name="TextBox 23"/>
           <p:cNvSpPr txBox="1"/>
           <p:nvPr/>
         </p:nvSpPr>
@@ -12713,7 +13241,7 @@
             <a:r>
               <a:rPr sz="1300" b="0" i="0">
                 <a:solidFill>
-                  <a:srgbClr val="27303A"/>
+                  <a:srgbClr val="0F172A"/>
                 </a:solidFill>
                 <a:latin typeface="Calibri"/>
               </a:rPr>
@@ -12724,7 +13252,7 @@
       </p:sp>
       <p:pic>
         <p:nvPicPr>
-          <p:cNvPr id="24" name="Picture 23" descr="f_beispiel_pin.png"/>
+          <p:cNvPr id="25" name="Picture 24" descr="f_beispiel_pin.png"/>
           <p:cNvPicPr>
             <a:picLocks noChangeAspect="1"/>
           </p:cNvPicPr>
@@ -12748,7 +13276,7 @@
       </p:pic>
       <p:sp>
         <p:nvSpPr>
-          <p:cNvPr id="25" name="TextBox 24"/>
+          <p:cNvPr id="26" name="TextBox 25"/>
           <p:cNvSpPr txBox="1"/>
           <p:nvPr/>
         </p:nvSpPr>
@@ -12774,7 +13302,7 @@
             <a:r>
               <a:rPr sz="1100" b="0" i="0">
                 <a:solidFill>
-                  <a:srgbClr val="8A96A6"/>
+                  <a:srgbClr val="64748B"/>
                 </a:solidFill>
                 <a:latin typeface="Calibri"/>
               </a:rPr>
@@ -12797,7 +13325,7 @@
     <p:bg>
       <p:bgPr>
         <a:solidFill>
-          <a:srgbClr val="FAFBFC"/>
+          <a:srgbClr val="F0F4FF"/>
         </a:solidFill>
         <a:effectLst/>
       </p:bgPr>
@@ -12818,13 +13346,13 @@
         <p:spPr>
           <a:xfrm>
             <a:off x="0" y="0"/>
-            <a:ext cx="12191695" cy="1051560"/>
+            <a:ext cx="12191695" cy="1024128"/>
           </a:xfrm>
           <a:prstGeom prst="rect">
             <a:avLst/>
           </a:prstGeom>
           <a:solidFill>
-            <a:srgbClr val="1B3A5C"/>
+            <a:srgbClr val="0F172A"/>
           </a:solidFill>
           <a:ln>
             <a:noFill/>
@@ -12855,13 +13383,57 @@
       </p:sp>
       <p:sp>
         <p:nvSpPr>
-          <p:cNvPr id="3" name="TextBox 2"/>
+          <p:cNvPr id="3" name="Rectangle 2"/>
+          <p:cNvSpPr/>
+          <p:nvPr/>
+        </p:nvSpPr>
+        <p:spPr>
+          <a:xfrm>
+            <a:off x="0" y="0"/>
+            <a:ext cx="64008" cy="1024128"/>
+          </a:xfrm>
+          <a:prstGeom prst="rect">
+            <a:avLst/>
+          </a:prstGeom>
+          <a:solidFill>
+            <a:srgbClr val="EA580C"/>
+          </a:solidFill>
+          <a:ln>
+            <a:noFill/>
+          </a:ln>
+          <a:effectLst/>
+        </p:spPr>
+        <p:style>
+          <a:lnRef idx="1">
+            <a:schemeClr val="accent1"/>
+          </a:lnRef>
+          <a:fillRef idx="3">
+            <a:schemeClr val="accent1"/>
+          </a:fillRef>
+          <a:effectRef idx="2">
+            <a:schemeClr val="accent1"/>
+          </a:effectRef>
+          <a:fontRef idx="minor">
+            <a:schemeClr val="lt1"/>
+          </a:fontRef>
+        </p:style>
+        <p:txBody>
+          <a:bodyPr rtlCol="0" anchor="ctr"/>
+          <a:lstStyle/>
+          <a:p>
+            <a:pPr algn="ctr"/>
+          </a:p>
+        </p:txBody>
+      </p:sp>
+      <p:sp>
+        <p:nvSpPr>
+          <p:cNvPr id="4" name="TextBox 3"/>
           <p:cNvSpPr txBox="1"/>
           <p:nvPr/>
         </p:nvSpPr>
         <p:spPr>
           <a:xfrm>
-            <a:off x="457200" y="91440"/>
+            <a:off x="228600" y="73152"/>
             <a:ext cx="9418320" cy="914400"/>
           </a:xfrm>
           <a:prstGeom prst="rect">
@@ -12879,9 +13451,9 @@
               <a:buNone/>
             </a:pPr>
             <a:r>
-              <a:rPr sz="1300" b="1">
-                <a:solidFill>
-                  <a:srgbClr val="F6C84C"/>
+              <a:rPr sz="1200" b="1">
+                <a:solidFill>
+                  <a:srgbClr val="FBBF24"/>
                 </a:solidFill>
                 <a:latin typeface="Calibri"/>
               </a:rPr>
@@ -12906,7 +13478,7 @@
       </p:sp>
       <p:sp>
         <p:nvSpPr>
-          <p:cNvPr id="4" name="Rounded Rectangle 3"/>
+          <p:cNvPr id="5" name="Rounded Rectangle 4"/>
           <p:cNvSpPr/>
           <p:nvPr/>
         </p:nvSpPr>
@@ -12952,7 +13524,7 @@
             <a:r>
               <a:rPr sz="1300" b="1">
                 <a:solidFill>
-                  <a:srgbClr val="F28C3C"/>
+                  <a:srgbClr val="EA580C"/>
                 </a:solidFill>
                 <a:latin typeface="Calibri"/>
               </a:rPr>
@@ -12963,7 +13535,7 @@
       </p:sp>
       <p:sp>
         <p:nvSpPr>
-          <p:cNvPr id="5" name="Rounded Rectangle 4"/>
+          <p:cNvPr id="6" name="Rounded Rectangle 5"/>
           <p:cNvSpPr/>
           <p:nvPr/>
         </p:nvSpPr>
@@ -12978,7 +13550,7 @@
             </a:avLst>
           </a:prstGeom>
           <a:solidFill>
-            <a:srgbClr val="1B3A5C"/>
+            <a:srgbClr val="1E3A8A"/>
           </a:solidFill>
           <a:ln>
             <a:noFill/>
@@ -13020,7 +13592,7 @@
       </p:sp>
       <p:pic>
         <p:nvPicPr>
-          <p:cNvPr id="6" name="Picture 5" descr="f_kombination_ohne.png"/>
+          <p:cNvPr id="7" name="Picture 6" descr="f_kombination_ohne.png"/>
           <p:cNvPicPr>
             <a:picLocks noChangeAspect="1"/>
           </p:cNvPicPr>
@@ -13044,7 +13616,7 @@
       </p:pic>
       <p:sp>
         <p:nvSpPr>
-          <p:cNvPr id="7" name="TextBox 6"/>
+          <p:cNvPr id="8" name="TextBox 7"/>
           <p:cNvSpPr txBox="1"/>
           <p:nvPr/>
         </p:nvSpPr>
@@ -13070,7 +13642,7 @@
             <a:r>
               <a:rPr sz="1400" b="0" i="0">
                 <a:solidFill>
-                  <a:srgbClr val="27303A"/>
+                  <a:srgbClr val="0F172A"/>
                 </a:solidFill>
                 <a:latin typeface="Calibri"/>
               </a:rPr>
@@ -13081,7 +13653,7 @@
       </p:sp>
       <p:sp>
         <p:nvSpPr>
-          <p:cNvPr id="8" name="Rounded Rectangle 7"/>
+          <p:cNvPr id="9" name="Rounded Rectangle 8"/>
           <p:cNvSpPr/>
           <p:nvPr/>
         </p:nvSpPr>
@@ -13096,7 +13668,7 @@
             </a:avLst>
           </a:prstGeom>
           <a:solidFill>
-            <a:srgbClr val="3D6EA5"/>
+            <a:srgbClr val="2563EB"/>
           </a:solidFill>
           <a:ln>
             <a:noFill/>
@@ -13138,7 +13710,7 @@
       </p:sp>
       <p:sp>
         <p:nvSpPr>
-          <p:cNvPr id="9" name="TextBox 8"/>
+          <p:cNvPr id="10" name="TextBox 9"/>
           <p:cNvSpPr txBox="1"/>
           <p:nvPr/>
         </p:nvSpPr>
@@ -13164,11 +13736,11 @@
             <a:r>
               <a:rPr sz="1600" b="1" i="0">
                 <a:solidFill>
-                  <a:srgbClr val="1B3A5C"/>
-                </a:solidFill>
-                <a:latin typeface="Calibri"/>
-              </a:rPr>
-              <a:t>Ihr 14 Schüler:innen tauscht gegenseitig</a:t>
+                  <a:srgbClr val="1E3A8A"/>
+                </a:solidFill>
+                <a:latin typeface="Calibri"/>
+              </a:rPr>
+              <a:t>Ihr 15 Schüler:innen tauscht gegenseitig</a:t>
             </a:r>
           </a:p>
           <a:p>
@@ -13178,7 +13750,7 @@
             <a:r>
               <a:rPr sz="1600" b="1" i="0">
                 <a:solidFill>
-                  <a:srgbClr val="1B3A5C"/>
+                  <a:srgbClr val="1E3A8A"/>
                 </a:solidFill>
                 <a:latin typeface="Calibri"/>
               </a:rPr>
@@ -13189,7 +13761,7 @@
       </p:sp>
       <p:sp>
         <p:nvSpPr>
-          <p:cNvPr id="10" name="TextBox 9"/>
+          <p:cNvPr id="11" name="TextBox 10"/>
           <p:cNvSpPr txBox="1"/>
           <p:nvPr/>
         </p:nvSpPr>
@@ -13215,7 +13787,7 @@
             <a:r>
               <a:rPr sz="1400" b="0" i="0">
                 <a:solidFill>
-                  <a:srgbClr val="27303A"/>
+                  <a:srgbClr val="0F172A"/>
                 </a:solidFill>
                 <a:latin typeface="Calibri"/>
               </a:rPr>
@@ -13226,7 +13798,7 @@
       </p:sp>
       <p:pic>
         <p:nvPicPr>
-          <p:cNvPr id="11" name="Picture 10" descr="f_handshake.png"/>
+          <p:cNvPr id="12" name="Picture 11" descr="f_handshake.png"/>
           <p:cNvPicPr>
             <a:picLocks noChangeAspect="1"/>
           </p:cNvPicPr>
@@ -13240,8 +13812,8 @@
         </p:blipFill>
         <p:spPr>
           <a:xfrm>
-            <a:off x="7749711" y="3200400"/>
-            <a:ext cx="2620327" cy="640080"/>
+            <a:off x="7692629" y="3200400"/>
+            <a:ext cx="2734491" cy="640080"/>
           </a:xfrm>
           <a:prstGeom prst="rect">
             <a:avLst/>
@@ -13250,7 +13822,7 @@
       </p:pic>
       <p:sp>
         <p:nvSpPr>
-          <p:cNvPr id="12" name="Rounded Rectangle 11"/>
+          <p:cNvPr id="13" name="Rounded Rectangle 12"/>
           <p:cNvSpPr/>
           <p:nvPr/>
         </p:nvSpPr>
@@ -13265,7 +13837,7 @@
             </a:avLst>
           </a:prstGeom>
           <a:solidFill>
-            <a:srgbClr val="F28C3C"/>
+            <a:srgbClr val="EA580C"/>
           </a:solidFill>
           <a:ln>
             <a:noFill/>
@@ -13307,7 +13879,7 @@
       </p:sp>
       <p:pic>
         <p:nvPicPr>
-          <p:cNvPr id="13" name="Picture 12" descr="f_kombination_mit.png"/>
+          <p:cNvPr id="14" name="Picture 13" descr="f_kombination_mit.png"/>
           <p:cNvPicPr>
             <a:picLocks noChangeAspect="1"/>
           </p:cNvPicPr>
@@ -13331,7 +13903,7 @@
       </p:pic>
       <p:sp>
         <p:nvSpPr>
-          <p:cNvPr id="14" name="TextBox 13"/>
+          <p:cNvPr id="15" name="TextBox 14"/>
           <p:cNvSpPr txBox="1"/>
           <p:nvPr/>
         </p:nvSpPr>
@@ -13357,7 +13929,7 @@
             <a:r>
               <a:rPr sz="1400" b="0" i="0">
                 <a:solidFill>
-                  <a:srgbClr val="27303A"/>
+                  <a:srgbClr val="0F172A"/>
                 </a:solidFill>
                 <a:latin typeface="Calibri"/>
               </a:rPr>
@@ -13368,7 +13940,7 @@
       </p:sp>
       <p:sp>
         <p:nvSpPr>
-          <p:cNvPr id="15" name="Rounded Rectangle 14"/>
+          <p:cNvPr id="16" name="Rounded Rectangle 15"/>
           <p:cNvSpPr/>
           <p:nvPr/>
         </p:nvSpPr>
@@ -13383,7 +13955,7 @@
             </a:avLst>
           </a:prstGeom>
           <a:solidFill>
-            <a:srgbClr val="F28C3C"/>
+            <a:srgbClr val="EA580C"/>
           </a:solidFill>
           <a:ln>
             <a:noFill/>
@@ -13425,7 +13997,7 @@
       </p:sp>
       <p:pic>
         <p:nvPicPr>
-          <p:cNvPr id="16" name="Picture 15" descr="icecream.png"/>
+          <p:cNvPr id="17" name="Picture 16" descr="icecream.png"/>
           <p:cNvPicPr>
             <a:picLocks noChangeAspect="1"/>
           </p:cNvPicPr>
@@ -13449,7 +14021,7 @@
       </p:pic>
       <p:sp>
         <p:nvSpPr>
-          <p:cNvPr id="17" name="TextBox 16"/>
+          <p:cNvPr id="18" name="TextBox 17"/>
           <p:cNvSpPr txBox="1"/>
           <p:nvPr/>
         </p:nvSpPr>
@@ -13475,7 +14047,7 @@
             <a:r>
               <a:rPr sz="1300" b="0" i="0">
                 <a:solidFill>
-                  <a:srgbClr val="27303A"/>
+                  <a:srgbClr val="0F172A"/>
                 </a:solidFill>
                 <a:latin typeface="Calibri"/>
               </a:rPr>
@@ -13486,7 +14058,7 @@
       </p:sp>
       <p:pic>
         <p:nvPicPr>
-          <p:cNvPr id="18" name="Picture 17" descr="f_beispiel_eis.png"/>
+          <p:cNvPr id="19" name="Picture 18" descr="f_beispiel_eis.png"/>
           <p:cNvPicPr>
             <a:picLocks noChangeAspect="1"/>
           </p:cNvPicPr>
@@ -13510,7 +14082,7 @@
       </p:pic>
       <p:sp>
         <p:nvSpPr>
-          <p:cNvPr id="19" name="TextBox 18"/>
+          <p:cNvPr id="20" name="TextBox 19"/>
           <p:cNvSpPr txBox="1"/>
           <p:nvPr/>
         </p:nvSpPr>
@@ -13536,7 +14108,7 @@
             <a:r>
               <a:rPr sz="1100" b="0" i="0">
                 <a:solidFill>
-                  <a:srgbClr val="8A96A6"/>
+                  <a:srgbClr val="64748B"/>
                 </a:solidFill>
                 <a:latin typeface="Calibri"/>
               </a:rPr>
@@ -13559,7 +14131,7 @@
     <p:bg>
       <p:bgPr>
         <a:solidFill>
-          <a:srgbClr val="FAFBFC"/>
+          <a:srgbClr val="F0F4FF"/>
         </a:solidFill>
         <a:effectLst/>
       </p:bgPr>
@@ -13580,13 +14152,13 @@
         <p:spPr>
           <a:xfrm>
             <a:off x="0" y="0"/>
-            <a:ext cx="12191695" cy="1051560"/>
+            <a:ext cx="12191695" cy="1024128"/>
           </a:xfrm>
           <a:prstGeom prst="rect">
             <a:avLst/>
           </a:prstGeom>
           <a:solidFill>
-            <a:srgbClr val="1B3A5C"/>
+            <a:srgbClr val="0F172A"/>
           </a:solidFill>
           <a:ln>
             <a:noFill/>
@@ -13617,13 +14189,57 @@
       </p:sp>
       <p:sp>
         <p:nvSpPr>
-          <p:cNvPr id="3" name="TextBox 2"/>
+          <p:cNvPr id="3" name="Rectangle 2"/>
+          <p:cNvSpPr/>
+          <p:nvPr/>
+        </p:nvSpPr>
+        <p:spPr>
+          <a:xfrm>
+            <a:off x="0" y="0"/>
+            <a:ext cx="64008" cy="1024128"/>
+          </a:xfrm>
+          <a:prstGeom prst="rect">
+            <a:avLst/>
+          </a:prstGeom>
+          <a:solidFill>
+            <a:srgbClr val="EA580C"/>
+          </a:solidFill>
+          <a:ln>
+            <a:noFill/>
+          </a:ln>
+          <a:effectLst/>
+        </p:spPr>
+        <p:style>
+          <a:lnRef idx="1">
+            <a:schemeClr val="accent1"/>
+          </a:lnRef>
+          <a:fillRef idx="3">
+            <a:schemeClr val="accent1"/>
+          </a:fillRef>
+          <a:effectRef idx="2">
+            <a:schemeClr val="accent1"/>
+          </a:effectRef>
+          <a:fontRef idx="minor">
+            <a:schemeClr val="lt1"/>
+          </a:fontRef>
+        </p:style>
+        <p:txBody>
+          <a:bodyPr rtlCol="0" anchor="ctr"/>
+          <a:lstStyle/>
+          <a:p>
+            <a:pPr algn="ctr"/>
+          </a:p>
+        </p:txBody>
+      </p:sp>
+      <p:sp>
+        <p:nvSpPr>
+          <p:cNvPr id="4" name="TextBox 3"/>
           <p:cNvSpPr txBox="1"/>
           <p:nvPr/>
         </p:nvSpPr>
         <p:spPr>
           <a:xfrm>
-            <a:off x="457200" y="91440"/>
+            <a:off x="228600" y="73152"/>
             <a:ext cx="9418320" cy="914400"/>
           </a:xfrm>
           <a:prstGeom prst="rect">
@@ -13641,9 +14257,9 @@
               <a:buNone/>
             </a:pPr>
             <a:r>
-              <a:rPr sz="1300" b="1">
-                <a:solidFill>
-                  <a:srgbClr val="F6C84C"/>
+              <a:rPr sz="1200" b="1">
+                <a:solidFill>
+                  <a:srgbClr val="FBBF24"/>
                 </a:solidFill>
                 <a:latin typeface="Calibri"/>
               </a:rPr>
@@ -13668,7 +14284,7 @@
       </p:sp>
       <p:sp>
         <p:nvSpPr>
-          <p:cNvPr id="4" name="Rounded Rectangle 3"/>
+          <p:cNvPr id="5" name="Rounded Rectangle 4"/>
           <p:cNvSpPr/>
           <p:nvPr/>
         </p:nvSpPr>
@@ -13714,7 +14330,7 @@
             <a:r>
               <a:rPr sz="1300" b="1">
                 <a:solidFill>
-                  <a:srgbClr val="3D6EA5"/>
+                  <a:srgbClr val="2563EB"/>
                 </a:solidFill>
                 <a:latin typeface="Calibri"/>
               </a:rPr>
@@ -13725,7 +14341,7 @@
       </p:sp>
       <p:pic>
         <p:nvPicPr>
-          <p:cNvPr id="5" name="Picture 4" descr="pascal_triangle.png"/>
+          <p:cNvPr id="6" name="Picture 5" descr="pascal_triangle.png"/>
           <p:cNvPicPr>
             <a:picLocks noChangeAspect="1"/>
           </p:cNvPicPr>
@@ -13749,7 +14365,7 @@
       </p:pic>
       <p:sp>
         <p:nvSpPr>
-          <p:cNvPr id="6" name="Rounded Rectangle 5"/>
+          <p:cNvPr id="7" name="Rounded Rectangle 6"/>
           <p:cNvSpPr/>
           <p:nvPr/>
         </p:nvSpPr>
@@ -13762,11 +14378,11 @@
             <a:avLst/>
           </a:prstGeom>
           <a:solidFill>
-            <a:srgbClr val="E8F1FA"/>
+            <a:srgbClr val="EFF6FF"/>
           </a:solidFill>
           <a:ln w="15875">
             <a:solidFill>
-              <a:srgbClr val="3D6EA5"/>
+              <a:srgbClr val="2563EB"/>
             </a:solidFill>
           </a:ln>
           <a:effectLst/>
@@ -13795,7 +14411,7 @@
       </p:sp>
       <p:sp>
         <p:nvSpPr>
-          <p:cNvPr id="7" name="Rounded Rectangle 6"/>
+          <p:cNvPr id="8" name="Rounded Rectangle 7"/>
           <p:cNvSpPr/>
           <p:nvPr/>
         </p:nvSpPr>
@@ -13810,7 +14426,7 @@
             </a:avLst>
           </a:prstGeom>
           <a:solidFill>
-            <a:srgbClr val="1B3A5C"/>
+            <a:srgbClr val="1E3A8A"/>
           </a:solidFill>
           <a:ln>
             <a:noFill/>
@@ -13852,7 +14468,7 @@
       </p:sp>
       <p:pic>
         <p:nvPicPr>
-          <p:cNvPr id="8" name="Picture 7" descr="f_pascal_link.png"/>
+          <p:cNvPr id="9" name="Picture 8" descr="f_pascal_link.png"/>
           <p:cNvPicPr>
             <a:picLocks noChangeAspect="1"/>
           </p:cNvPicPr>
@@ -13876,7 +14492,7 @@
       </p:pic>
       <p:sp>
         <p:nvSpPr>
-          <p:cNvPr id="9" name="Rounded Rectangle 8"/>
+          <p:cNvPr id="10" name="Rounded Rectangle 9"/>
           <p:cNvSpPr/>
           <p:nvPr/>
         </p:nvSpPr>
@@ -13889,11 +14505,11 @@
             <a:avLst/>
           </a:prstGeom>
           <a:solidFill>
-            <a:srgbClr val="E8F1FA"/>
+            <a:srgbClr val="EFF6FF"/>
           </a:solidFill>
           <a:ln w="15875">
             <a:solidFill>
-              <a:srgbClr val="3D6EA5"/>
+              <a:srgbClr val="2563EB"/>
             </a:solidFill>
           </a:ln>
           <a:effectLst/>
@@ -13922,7 +14538,7 @@
       </p:sp>
       <p:sp>
         <p:nvSpPr>
-          <p:cNvPr id="10" name="Rounded Rectangle 9"/>
+          <p:cNvPr id="11" name="Rounded Rectangle 10"/>
           <p:cNvSpPr/>
           <p:nvPr/>
         </p:nvSpPr>
@@ -13937,7 +14553,7 @@
             </a:avLst>
           </a:prstGeom>
           <a:solidFill>
-            <a:srgbClr val="F28C3C"/>
+            <a:srgbClr val="EA580C"/>
           </a:solidFill>
           <a:ln>
             <a:noFill/>
@@ -13979,7 +14595,7 @@
       </p:sp>
       <p:pic>
         <p:nvPicPr>
-          <p:cNvPr id="11" name="Picture 10" descr="f_beispiel_pascal_62.png"/>
+          <p:cNvPr id="12" name="Picture 11" descr="f_beispiel_pascal_62.png"/>
           <p:cNvPicPr>
             <a:picLocks noChangeAspect="1"/>
           </p:cNvPicPr>
@@ -14003,7 +14619,7 @@
       </p:pic>
       <p:sp>
         <p:nvSpPr>
-          <p:cNvPr id="12" name="TextBox 11"/>
+          <p:cNvPr id="13" name="TextBox 12"/>
           <p:cNvSpPr txBox="1"/>
           <p:nvPr/>
         </p:nvSpPr>
@@ -14029,7 +14645,7 @@
             <a:r>
               <a:rPr sz="1300" b="0" i="0">
                 <a:solidFill>
-                  <a:srgbClr val="27303A"/>
+                  <a:srgbClr val="0F172A"/>
                 </a:solidFill>
                 <a:latin typeface="Calibri"/>
               </a:rPr>
@@ -14043,7 +14659,7 @@
             <a:r>
               <a:rPr sz="1300" b="0" i="0">
                 <a:solidFill>
-                  <a:srgbClr val="27303A"/>
+                  <a:srgbClr val="0F172A"/>
                 </a:solidFill>
                 <a:latin typeface="Calibri"/>
               </a:rPr>
@@ -14054,7 +14670,7 @@
       </p:sp>
       <p:sp>
         <p:nvSpPr>
-          <p:cNvPr id="13" name="TextBox 12"/>
+          <p:cNvPr id="14" name="TextBox 13"/>
           <p:cNvSpPr txBox="1"/>
           <p:nvPr/>
         </p:nvSpPr>
@@ -14080,7 +14696,7 @@
             <a:r>
               <a:rPr sz="1100" b="0" i="0">
                 <a:solidFill>
-                  <a:srgbClr val="8A96A6"/>
+                  <a:srgbClr val="64748B"/>
                 </a:solidFill>
                 <a:latin typeface="Calibri"/>
               </a:rPr>
@@ -14103,7 +14719,7 @@
     <p:bg>
       <p:bgPr>
         <a:solidFill>
-          <a:srgbClr val="FAFBFC"/>
+          <a:srgbClr val="F0F4FF"/>
         </a:solidFill>
         <a:effectLst/>
       </p:bgPr>
@@ -14124,13 +14740,13 @@
         <p:spPr>
           <a:xfrm>
             <a:off x="0" y="0"/>
-            <a:ext cx="12191695" cy="1051560"/>
+            <a:ext cx="12191695" cy="1024128"/>
           </a:xfrm>
           <a:prstGeom prst="rect">
             <a:avLst/>
           </a:prstGeom>
           <a:solidFill>
-            <a:srgbClr val="1B3A5C"/>
+            <a:srgbClr val="0F172A"/>
           </a:solidFill>
           <a:ln>
             <a:noFill/>
@@ -14161,13 +14777,57 @@
       </p:sp>
       <p:sp>
         <p:nvSpPr>
-          <p:cNvPr id="3" name="TextBox 2"/>
+          <p:cNvPr id="3" name="Rectangle 2"/>
+          <p:cNvSpPr/>
+          <p:nvPr/>
+        </p:nvSpPr>
+        <p:spPr>
+          <a:xfrm>
+            <a:off x="0" y="0"/>
+            <a:ext cx="64008" cy="1024128"/>
+          </a:xfrm>
+          <a:prstGeom prst="rect">
+            <a:avLst/>
+          </a:prstGeom>
+          <a:solidFill>
+            <a:srgbClr val="EA580C"/>
+          </a:solidFill>
+          <a:ln>
+            <a:noFill/>
+          </a:ln>
+          <a:effectLst/>
+        </p:spPr>
+        <p:style>
+          <a:lnRef idx="1">
+            <a:schemeClr val="accent1"/>
+          </a:lnRef>
+          <a:fillRef idx="3">
+            <a:schemeClr val="accent1"/>
+          </a:fillRef>
+          <a:effectRef idx="2">
+            <a:schemeClr val="accent1"/>
+          </a:effectRef>
+          <a:fontRef idx="minor">
+            <a:schemeClr val="lt1"/>
+          </a:fontRef>
+        </p:style>
+        <p:txBody>
+          <a:bodyPr rtlCol="0" anchor="ctr"/>
+          <a:lstStyle/>
+          <a:p>
+            <a:pPr algn="ctr"/>
+          </a:p>
+        </p:txBody>
+      </p:sp>
+      <p:sp>
+        <p:nvSpPr>
+          <p:cNvPr id="4" name="TextBox 3"/>
           <p:cNvSpPr txBox="1"/>
           <p:nvPr/>
         </p:nvSpPr>
         <p:spPr>
           <a:xfrm>
-            <a:off x="457200" y="91440"/>
+            <a:off x="228600" y="73152"/>
             <a:ext cx="9418320" cy="914400"/>
           </a:xfrm>
           <a:prstGeom prst="rect">
@@ -14185,9 +14845,9 @@
               <a:buNone/>
             </a:pPr>
             <a:r>
-              <a:rPr sz="1300" b="1">
-                <a:solidFill>
-                  <a:srgbClr val="F6C84C"/>
+              <a:rPr sz="1200" b="1">
+                <a:solidFill>
+                  <a:srgbClr val="FBBF24"/>
                 </a:solidFill>
                 <a:latin typeface="Calibri"/>
               </a:rPr>
@@ -14212,7 +14872,7 @@
       </p:sp>
       <p:sp>
         <p:nvSpPr>
-          <p:cNvPr id="4" name="Rounded Rectangle 3"/>
+          <p:cNvPr id="5" name="Rounded Rectangle 4"/>
           <p:cNvSpPr/>
           <p:nvPr/>
         </p:nvSpPr>
@@ -14258,7 +14918,7 @@
             <a:r>
               <a:rPr sz="1300" b="1">
                 <a:solidFill>
-                  <a:srgbClr val="1B3A5C"/>
+                  <a:srgbClr val="1E3A8A"/>
                 </a:solidFill>
                 <a:latin typeface="Calibri"/>
               </a:rPr>
@@ -14269,7 +14929,7 @@
       </p:sp>
       <p:pic>
         <p:nvPicPr>
-          <p:cNvPr id="5" name="Picture 4" descr="f_laplace.png"/>
+          <p:cNvPr id="6" name="Picture 5" descr="f_laplace.png"/>
           <p:cNvPicPr>
             <a:picLocks noChangeAspect="1"/>
           </p:cNvPicPr>
@@ -14293,7 +14953,7 @@
       </p:pic>
       <p:sp>
         <p:nvSpPr>
-          <p:cNvPr id="6" name="Rounded Rectangle 5"/>
+          <p:cNvPr id="7" name="Rounded Rectangle 6"/>
           <p:cNvSpPr/>
           <p:nvPr/>
         </p:nvSpPr>
@@ -14306,11 +14966,11 @@
             <a:avLst/>
           </a:prstGeom>
           <a:solidFill>
-            <a:srgbClr val="E8F1FA"/>
+            <a:srgbClr val="EFF6FF"/>
           </a:solidFill>
           <a:ln w="15875">
             <a:solidFill>
-              <a:srgbClr val="3D6EA5"/>
+              <a:srgbClr val="2563EB"/>
             </a:solidFill>
           </a:ln>
           <a:effectLst/>
@@ -14339,7 +14999,7 @@
       </p:sp>
       <p:sp>
         <p:nvSpPr>
-          <p:cNvPr id="7" name="Rounded Rectangle 6"/>
+          <p:cNvPr id="8" name="Rounded Rectangle 7"/>
           <p:cNvSpPr/>
           <p:nvPr/>
         </p:nvSpPr>
@@ -14354,7 +15014,7 @@
             </a:avLst>
           </a:prstGeom>
           <a:solidFill>
-            <a:srgbClr val="F28C3C"/>
+            <a:srgbClr val="EA580C"/>
           </a:solidFill>
           <a:ln>
             <a:noFill/>
@@ -14396,7 +15056,7 @@
       </p:sp>
       <p:sp>
         <p:nvSpPr>
-          <p:cNvPr id="8" name="TextBox 7"/>
+          <p:cNvPr id="9" name="TextBox 8"/>
           <p:cNvSpPr txBox="1"/>
           <p:nvPr/>
         </p:nvSpPr>
@@ -14422,7 +15082,7 @@
             <a:r>
               <a:rPr sz="1400" b="0" i="0">
                 <a:solidFill>
-                  <a:srgbClr val="27303A"/>
+                  <a:srgbClr val="0F172A"/>
                 </a:solidFill>
                 <a:latin typeface="Calibri"/>
               </a:rPr>
@@ -14433,7 +15093,7 @@
       </p:sp>
       <p:sp>
         <p:nvSpPr>
-          <p:cNvPr id="9" name="Rounded Rectangle 8"/>
+          <p:cNvPr id="10" name="Rounded Rectangle 9"/>
           <p:cNvSpPr/>
           <p:nvPr/>
         </p:nvSpPr>
@@ -14446,11 +15106,11 @@
             <a:avLst/>
           </a:prstGeom>
           <a:solidFill>
-            <a:srgbClr val="E8F1FA"/>
+            <a:srgbClr val="EFF6FF"/>
           </a:solidFill>
           <a:ln w="15875">
             <a:solidFill>
-              <a:srgbClr val="3D6EA5"/>
+              <a:srgbClr val="2563EB"/>
             </a:solidFill>
           </a:ln>
           <a:effectLst/>
@@ -14479,7 +15139,7 @@
       </p:sp>
       <p:sp>
         <p:nvSpPr>
-          <p:cNvPr id="10" name="Rounded Rectangle 9"/>
+          <p:cNvPr id="11" name="Rounded Rectangle 10"/>
           <p:cNvSpPr/>
           <p:nvPr/>
         </p:nvSpPr>
@@ -14494,7 +15154,7 @@
             </a:avLst>
           </a:prstGeom>
           <a:solidFill>
-            <a:srgbClr val="1B3A5C"/>
+            <a:srgbClr val="1E3A8A"/>
           </a:solidFill>
           <a:ln>
             <a:noFill/>
@@ -14536,7 +15196,7 @@
       </p:sp>
       <p:sp>
         <p:nvSpPr>
-          <p:cNvPr id="11" name="TextBox 10"/>
+          <p:cNvPr id="12" name="TextBox 11"/>
           <p:cNvSpPr txBox="1"/>
           <p:nvPr/>
         </p:nvSpPr>
@@ -14562,7 +15222,7 @@
             <a:r>
               <a:rPr sz="1400" b="0" i="0">
                 <a:solidFill>
-                  <a:srgbClr val="27303A"/>
+                  <a:srgbClr val="0F172A"/>
                 </a:solidFill>
                 <a:latin typeface="Calibri"/>
               </a:rPr>
@@ -14573,7 +15233,7 @@
       </p:sp>
       <p:sp>
         <p:nvSpPr>
-          <p:cNvPr id="12" name="Rounded Rectangle 11"/>
+          <p:cNvPr id="13" name="Rounded Rectangle 12"/>
           <p:cNvSpPr/>
           <p:nvPr/>
         </p:nvSpPr>
@@ -14586,11 +15246,11 @@
             <a:avLst/>
           </a:prstGeom>
           <a:solidFill>
-            <a:srgbClr val="F6C84C"/>
+            <a:srgbClr val="FBBF24"/>
           </a:solidFill>
           <a:ln w="15875">
             <a:solidFill>
-              <a:srgbClr val="F28C3C"/>
+              <a:srgbClr val="EA580C"/>
             </a:solidFill>
           </a:ln>
           <a:effectLst/>
@@ -14619,7 +15279,7 @@
       </p:sp>
       <p:sp>
         <p:nvSpPr>
-          <p:cNvPr id="13" name="TextBox 12"/>
+          <p:cNvPr id="14" name="TextBox 13"/>
           <p:cNvSpPr txBox="1"/>
           <p:nvPr/>
         </p:nvSpPr>
@@ -14645,7 +15305,7 @@
             <a:r>
               <a:rPr sz="1500" b="1" i="0">
                 <a:solidFill>
-                  <a:srgbClr val="1B3A5C"/>
+                  <a:srgbClr val="1E3A8A"/>
                 </a:solidFill>
                 <a:latin typeface="Calibri"/>
               </a:rPr>
@@ -14659,7 +15319,7 @@
             <a:r>
               <a:rPr sz="1500" b="1" i="0">
                 <a:solidFill>
-                  <a:srgbClr val="1B3A5C"/>
+                  <a:srgbClr val="1E3A8A"/>
                 </a:solidFill>
                 <a:latin typeface="Calibri"/>
               </a:rPr>
@@ -14670,7 +15330,7 @@
       </p:sp>
       <p:sp>
         <p:nvSpPr>
-          <p:cNvPr id="14" name="Rounded Rectangle 13"/>
+          <p:cNvPr id="15" name="Rounded Rectangle 14"/>
           <p:cNvSpPr/>
           <p:nvPr/>
         </p:nvSpPr>
@@ -14685,7 +15345,7 @@
             </a:avLst>
           </a:prstGeom>
           <a:solidFill>
-            <a:srgbClr val="3D6EA5"/>
+            <a:srgbClr val="2563EB"/>
           </a:solidFill>
           <a:ln>
             <a:noFill/>
@@ -14727,7 +15387,7 @@
       </p:sp>
       <p:pic>
         <p:nvPicPr>
-          <p:cNvPr id="15" name="Picture 14" descr="dice_grid.png"/>
+          <p:cNvPr id="16" name="Picture 15" descr="dice_grid.png"/>
           <p:cNvPicPr>
             <a:picLocks noChangeAspect="1"/>
           </p:cNvPicPr>
@@ -14751,7 +15411,7 @@
       </p:pic>
       <p:sp>
         <p:nvSpPr>
-          <p:cNvPr id="16" name="TextBox 15"/>
+          <p:cNvPr id="17" name="TextBox 16"/>
           <p:cNvSpPr txBox="1"/>
           <p:nvPr/>
         </p:nvSpPr>
@@ -14777,7 +15437,7 @@
             <a:r>
               <a:rPr sz="1300" b="0" i="0">
                 <a:solidFill>
-                  <a:srgbClr val="27303A"/>
+                  <a:srgbClr val="0F172A"/>
                 </a:solidFill>
                 <a:latin typeface="Calibri"/>
               </a:rPr>
@@ -14788,7 +15448,7 @@
       </p:sp>
       <p:pic>
         <p:nvPicPr>
-          <p:cNvPr id="17" name="Picture 16" descr="f_pasch.png"/>
+          <p:cNvPr id="18" name="Picture 17" descr="f_pasch.png"/>
           <p:cNvPicPr>
             <a:picLocks noChangeAspect="1"/>
           </p:cNvPicPr>
@@ -14812,7 +15472,7 @@
       </p:pic>
       <p:sp>
         <p:nvSpPr>
-          <p:cNvPr id="18" name="TextBox 17"/>
+          <p:cNvPr id="19" name="TextBox 18"/>
           <p:cNvSpPr txBox="1"/>
           <p:nvPr/>
         </p:nvSpPr>
@@ -14838,7 +15498,7 @@
             <a:r>
               <a:rPr sz="1100" b="0" i="0">
                 <a:solidFill>
-                  <a:srgbClr val="8A96A6"/>
+                  <a:srgbClr val="64748B"/>
                 </a:solidFill>
                 <a:latin typeface="Calibri"/>
               </a:rPr>
@@ -14861,7 +15521,7 @@
     <p:bg>
       <p:bgPr>
         <a:solidFill>
-          <a:srgbClr val="FAFBFC"/>
+          <a:srgbClr val="F0F4FF"/>
         </a:solidFill>
         <a:effectLst/>
       </p:bgPr>
@@ -14882,13 +15542,13 @@
         <p:spPr>
           <a:xfrm>
             <a:off x="0" y="0"/>
-            <a:ext cx="12191695" cy="1051560"/>
+            <a:ext cx="12191695" cy="1024128"/>
           </a:xfrm>
           <a:prstGeom prst="rect">
             <a:avLst/>
           </a:prstGeom>
           <a:solidFill>
-            <a:srgbClr val="1B3A5C"/>
+            <a:srgbClr val="0F172A"/>
           </a:solidFill>
           <a:ln>
             <a:noFill/>
@@ -14919,13 +15579,57 @@
       </p:sp>
       <p:sp>
         <p:nvSpPr>
-          <p:cNvPr id="3" name="TextBox 2"/>
+          <p:cNvPr id="3" name="Rectangle 2"/>
+          <p:cNvSpPr/>
+          <p:nvPr/>
+        </p:nvSpPr>
+        <p:spPr>
+          <a:xfrm>
+            <a:off x="0" y="0"/>
+            <a:ext cx="64008" cy="1024128"/>
+          </a:xfrm>
+          <a:prstGeom prst="rect">
+            <a:avLst/>
+          </a:prstGeom>
+          <a:solidFill>
+            <a:srgbClr val="EA580C"/>
+          </a:solidFill>
+          <a:ln>
+            <a:noFill/>
+          </a:ln>
+          <a:effectLst/>
+        </p:spPr>
+        <p:style>
+          <a:lnRef idx="1">
+            <a:schemeClr val="accent1"/>
+          </a:lnRef>
+          <a:fillRef idx="3">
+            <a:schemeClr val="accent1"/>
+          </a:fillRef>
+          <a:effectRef idx="2">
+            <a:schemeClr val="accent1"/>
+          </a:effectRef>
+          <a:fontRef idx="minor">
+            <a:schemeClr val="lt1"/>
+          </a:fontRef>
+        </p:style>
+        <p:txBody>
+          <a:bodyPr rtlCol="0" anchor="ctr"/>
+          <a:lstStyle/>
+          <a:p>
+            <a:pPr algn="ctr"/>
+          </a:p>
+        </p:txBody>
+      </p:sp>
+      <p:sp>
+        <p:nvSpPr>
+          <p:cNvPr id="4" name="TextBox 3"/>
           <p:cNvSpPr txBox="1"/>
           <p:nvPr/>
         </p:nvSpPr>
         <p:spPr>
           <a:xfrm>
-            <a:off x="457200" y="91440"/>
+            <a:off x="228600" y="73152"/>
             <a:ext cx="9418320" cy="914400"/>
           </a:xfrm>
           <a:prstGeom prst="rect">
@@ -14943,9 +15647,9 @@
               <a:buNone/>
             </a:pPr>
             <a:r>
-              <a:rPr sz="1300" b="1">
-                <a:solidFill>
-                  <a:srgbClr val="F6C84C"/>
+              <a:rPr sz="1200" b="1">
+                <a:solidFill>
+                  <a:srgbClr val="FBBF24"/>
                 </a:solidFill>
                 <a:latin typeface="Calibri"/>
               </a:rPr>
@@ -14970,7 +15674,7 @@
       </p:sp>
       <p:sp>
         <p:nvSpPr>
-          <p:cNvPr id="4" name="Rounded Rectangle 3"/>
+          <p:cNvPr id="5" name="Rounded Rectangle 4"/>
           <p:cNvSpPr/>
           <p:nvPr/>
         </p:nvSpPr>
@@ -15016,7 +15720,7 @@
             <a:r>
               <a:rPr sz="1300" b="1">
                 <a:solidFill>
-                  <a:srgbClr val="F28C3C"/>
+                  <a:srgbClr val="EA580C"/>
                 </a:solidFill>
                 <a:latin typeface="Calibri"/>
               </a:rPr>
@@ -15027,7 +15731,7 @@
       </p:sp>
       <p:sp>
         <p:nvSpPr>
-          <p:cNvPr id="5" name="Rounded Rectangle 4"/>
+          <p:cNvPr id="6" name="Rounded Rectangle 5"/>
           <p:cNvSpPr/>
           <p:nvPr/>
         </p:nvSpPr>
@@ -15042,7 +15746,7 @@
             </a:avLst>
           </a:prstGeom>
           <a:solidFill>
-            <a:srgbClr val="F28C3C"/>
+            <a:srgbClr val="EA580C"/>
           </a:solidFill>
           <a:ln>
             <a:noFill/>
@@ -15084,7 +15788,7 @@
       </p:sp>
       <p:pic>
         <p:nvPicPr>
-          <p:cNvPr id="6" name="Picture 5" descr="lotto_balls.png"/>
+          <p:cNvPr id="7" name="Picture 6" descr="lotto_balls.png"/>
           <p:cNvPicPr>
             <a:picLocks noChangeAspect="1"/>
           </p:cNvPicPr>
@@ -15108,7 +15812,7 @@
       </p:pic>
       <p:sp>
         <p:nvSpPr>
-          <p:cNvPr id="7" name="Rounded Rectangle 6"/>
+          <p:cNvPr id="8" name="Rounded Rectangle 7"/>
           <p:cNvSpPr/>
           <p:nvPr/>
         </p:nvSpPr>
@@ -15121,11 +15825,11 @@
             <a:avLst/>
           </a:prstGeom>
           <a:solidFill>
-            <a:srgbClr val="E8F1FA"/>
+            <a:srgbClr val="EFF6FF"/>
           </a:solidFill>
           <a:ln w="15875">
             <a:solidFill>
-              <a:srgbClr val="3D6EA5"/>
+              <a:srgbClr val="2563EB"/>
             </a:solidFill>
           </a:ln>
           <a:effectLst/>
@@ -15154,7 +15858,7 @@
       </p:sp>
       <p:sp>
         <p:nvSpPr>
-          <p:cNvPr id="8" name="Rounded Rectangle 7"/>
+          <p:cNvPr id="9" name="Rounded Rectangle 8"/>
           <p:cNvSpPr/>
           <p:nvPr/>
         </p:nvSpPr>
@@ -15169,7 +15873,7 @@
             </a:avLst>
           </a:prstGeom>
           <a:solidFill>
-            <a:srgbClr val="1B3A5C"/>
+            <a:srgbClr val="1E3A8A"/>
           </a:solidFill>
           <a:ln>
             <a:noFill/>
@@ -15211,7 +15915,7 @@
       </p:sp>
       <p:pic>
         <p:nvPicPr>
-          <p:cNvPr id="9" name="Picture 8" descr="f_lotto_komb.png"/>
+          <p:cNvPr id="10" name="Picture 9" descr="f_lotto_komb.png"/>
           <p:cNvPicPr>
             <a:picLocks noChangeAspect="1"/>
           </p:cNvPicPr>
@@ -15235,7 +15939,7 @@
       </p:pic>
       <p:sp>
         <p:nvSpPr>
-          <p:cNvPr id="10" name="Rounded Rectangle 9"/>
+          <p:cNvPr id="11" name="Rounded Rectangle 10"/>
           <p:cNvSpPr/>
           <p:nvPr/>
         </p:nvSpPr>
@@ -15248,11 +15952,11 @@
             <a:avLst/>
           </a:prstGeom>
           <a:solidFill>
-            <a:srgbClr val="E8F1FA"/>
+            <a:srgbClr val="EFF6FF"/>
           </a:solidFill>
           <a:ln w="15875">
             <a:solidFill>
-              <a:srgbClr val="3D6EA5"/>
+              <a:srgbClr val="2563EB"/>
             </a:solidFill>
           </a:ln>
           <a:effectLst/>
@@ -15281,7 +15985,7 @@
       </p:sp>
       <p:sp>
         <p:nvSpPr>
-          <p:cNvPr id="11" name="Rounded Rectangle 10"/>
+          <p:cNvPr id="12" name="Rounded Rectangle 11"/>
           <p:cNvSpPr/>
           <p:nvPr/>
         </p:nvSpPr>
@@ -15296,7 +16000,7 @@
             </a:avLst>
           </a:prstGeom>
           <a:solidFill>
-            <a:srgbClr val="F28C3C"/>
+            <a:srgbClr val="EA580C"/>
           </a:solidFill>
           <a:ln>
             <a:noFill/>
@@ -15338,7 +16042,7 @@
       </p:sp>
       <p:sp>
         <p:nvSpPr>
-          <p:cNvPr id="12" name="TextBox 11"/>
+          <p:cNvPr id="13" name="TextBox 12"/>
           <p:cNvSpPr txBox="1"/>
           <p:nvPr/>
         </p:nvSpPr>
@@ -15364,7 +16068,7 @@
             <a:r>
               <a:rPr sz="1600" b="0" i="0">
                 <a:solidFill>
-                  <a:srgbClr val="27303A"/>
+                  <a:srgbClr val="0F172A"/>
                 </a:solidFill>
                 <a:latin typeface="Calibri"/>
               </a:rPr>
@@ -15375,7 +16079,7 @@
       </p:sp>
       <p:pic>
         <p:nvPicPr>
-          <p:cNvPr id="13" name="Picture 12" descr="f_lotto_prob.png"/>
+          <p:cNvPr id="14" name="Picture 13" descr="f_lotto_prob.png"/>
           <p:cNvPicPr>
             <a:picLocks noChangeAspect="1"/>
           </p:cNvPicPr>
@@ -15399,7 +16103,7 @@
       </p:pic>
       <p:sp>
         <p:nvSpPr>
-          <p:cNvPr id="14" name="Rounded Rectangle 13"/>
+          <p:cNvPr id="15" name="Rounded Rectangle 14"/>
           <p:cNvSpPr/>
           <p:nvPr/>
         </p:nvSpPr>
@@ -15412,11 +16116,11 @@
             <a:avLst/>
           </a:prstGeom>
           <a:solidFill>
-            <a:srgbClr val="F6C84C"/>
+            <a:srgbClr val="FBBF24"/>
           </a:solidFill>
           <a:ln w="15875">
             <a:solidFill>
-              <a:srgbClr val="F28C3C"/>
+              <a:srgbClr val="EA580C"/>
             </a:solidFill>
           </a:ln>
           <a:effectLst/>
@@ -15445,7 +16149,7 @@
       </p:sp>
       <p:sp>
         <p:nvSpPr>
-          <p:cNvPr id="15" name="TextBox 14"/>
+          <p:cNvPr id="16" name="TextBox 15"/>
           <p:cNvSpPr txBox="1"/>
           <p:nvPr/>
         </p:nvSpPr>
@@ -15471,7 +16175,7 @@
             <a:r>
               <a:rPr sz="1400" b="1" i="0">
                 <a:solidFill>
-                  <a:srgbClr val="1B3A5C"/>
+                  <a:srgbClr val="1E3A8A"/>
                 </a:solidFill>
                 <a:latin typeface="Calibri"/>
               </a:rPr>
@@ -15482,7 +16186,7 @@
       </p:sp>
       <p:sp>
         <p:nvSpPr>
-          <p:cNvPr id="16" name="TextBox 15"/>
+          <p:cNvPr id="17" name="TextBox 16"/>
           <p:cNvSpPr txBox="1"/>
           <p:nvPr/>
         </p:nvSpPr>
@@ -15508,7 +16212,7 @@
             <a:r>
               <a:rPr sz="1100" b="0" i="0">
                 <a:solidFill>
-                  <a:srgbClr val="8A96A6"/>
+                  <a:srgbClr val="64748B"/>
                 </a:solidFill>
                 <a:latin typeface="Calibri"/>
               </a:rPr>

--- a/kombinatorik-praesentation/kombinatorik_praesentation.pptx
+++ b/kombinatorik-praesentation/kombinatorik_praesentation.pptx
@@ -589,7 +589,7 @@
           <a:lstStyle/>
           <a:p>
             <a:r>
-              <a:t>Person C erklärt kurz die Spielregeln und erzeugt Spannung. Wichtig: Schätzungen werden im Kopf behalten oder auf einen Zettel geschrieben – KEIN Taschenrechner, KEIN Gespräch! Dann Überleitung zu Person A für Runde 1.</a:t>
+              <a:t>Daniel erklärt kurz die Spielregeln und erzeugt Spannung. Wichtig: Schätzungen werden im Kopf behalten oder auf einen Zettel geschrieben – KEIN Taschenrechner, KEIN Gespräch! Dann Überleitung zu Max für Runde 1.</a:t>
             </a:r>
           </a:p>
         </p:txBody>
@@ -659,7 +659,7 @@
           <a:lstStyle/>
           <a:p>
             <a:r>
-              <a:t>Person A liest die Frage vor und gibt 30-45 Sekunden Zeit zum Schätzen. Dann kurze Handshow: 'Wer schätzt unter 1.000? Unter 1 Million? Über 1 Milliarde?' Spannung erzeugen, dann Überleitung zu Person B für die Auflösung.</a:t>
+              <a:t>Max liest die Frage vor und gibt 30-45 Sekunden Zeit zum Schätzen. Dann kurze Handshow: 'Wer schätzt unter 1.000? Unter 1 Million? Über 1 Milliarde?' Spannung erzeugen, dann Überleitung zu Simon für die Auflösung.</a:t>
             </a:r>
           </a:p>
         </p:txBody>
@@ -729,7 +729,7 @@
           <a:lstStyle/>
           <a:p>
             <a:r>
-              <a:t>Person B enthüllt die Auflösung: 15! = 1.307.674.368.000 ≈ 1,3 Billionen! Den 'Steinzeit-Vergleich' als Anker verwenden: seit ca. 39.000 v. Chr. eine Reihenfolge pro Sekunde – und man wäre gerade fertig (Homo sapiens war damals gerade auf dem Weg nach Europa!). Kurzes 'WOW' abwarten. Überleitung zu Person C für Runde 2.</a:t>
+              <a:t>Simon enthüllt die Auflösung: 15! = 1.307.674.368.000 ≈ 1,3 Billionen! Den 'Steinzeit-Vergleich' als Anker verwenden: seit ca. 39.000 v. Chr. eine Reihenfolge pro Sekunde – und man wäre gerade fertig (Homo sapiens war damals gerade auf dem Weg nach Europa!). Kurzes 'WOW' abwarten. Überleitung zu Daniel für Runde 2.</a:t>
             </a:r>
           </a:p>
         </p:txBody>
@@ -799,7 +799,7 @@
           <a:lstStyle/>
           <a:p>
             <a:r>
-              <a:t>Person C liest die Frage vor. Diesmal gibt es einen Tipp ('Permutation von 52') damit die Klasse annähernd die Größenordnung einschätzen kann. Gleich: Handshow-Schätzung 'Wer sagt mehr als 1.000? 1 Million? 1 Milliarde? 1 Trillion?' Überleitung zu Person A für die Auflösung.</a:t>
+              <a:t>Daniel liest die Frage vor. Diesmal gibt es einen Tipp ('Permutation von 52') damit die Klasse annähernd die Größenordnung einschätzen kann. Gleich: Handshow-Schätzung 'Wer sagt mehr als 1.000? 1 Million? 1 Milliarde? 1 Trillion?' Überleitung zu Max für die Auflösung.</a:t>
             </a:r>
           </a:p>
         </p:txBody>
@@ -869,7 +869,7 @@
           <a:lstStyle/>
           <a:p>
             <a:r>
-              <a:t>Person A enthüllt 52! ≈ 8,07×10^67. Die drei Bullet-Points nacheinander vorlesen und kurze Pause danach lassen – das 'Fazit' ist ein echter Gesprächsstarter. Überleitung zu Person B: 'Jetzt fassen wir alles nochmal kompakt zusammen – welche Formel, wann?'</a:t>
+              <a:t>Max enthüllt 52! ≈ 8,07×10^67. Die drei Bullet-Points nacheinander vorlesen und kurze Pause danach lassen – das 'Fazit' ist ein echter Gesprächsstarter. Überleitung zu Simon: 'Jetzt fassen wir alles nochmal kompakt zusammen – welche Formel, wann?'</a:t>
             </a:r>
           </a:p>
         </p:txBody>
@@ -939,7 +939,7 @@
           <a:lstStyle/>
           <a:p>
             <a:r>
-              <a:t>Person B fasst alle 5 Konzepte in der Entscheidungstabelle zusammen. Die zwei Fragen (Reihenfolge? Wiederholung?) direkt nennen – das ist der Matura-Trick, der immer funktioniert. Überleitung zu allen drei für die Zusammenfassung.</a:t>
+              <a:t>Simon fasst alle 5 Konzepte in der Entscheidungstabelle zusammen. Die zwei Fragen (Reihenfolge? Wiederholung?) direkt nennen – das ist der Matura-Trick, der immer funktioniert. Überleitung zu allen drei für die Zusammenfassung.</a:t>
             </a:r>
           </a:p>
         </p:txBody>
@@ -1219,7 +1219,7 @@
           <a:lstStyle/>
           <a:p>
             <a:r>
-              <a:t>Person A stellt die Agenda vor und präsentiert die drei Gedankenexperiment-Fragen. Kurze Pause nach jeder Frage – das Publikum soll mental schätzen, NICHT laut antworten. Sagen: 'Diese drei Fragen werden wir heute Schritt für Schritt beantworten!' Überleitung zu Person B für das Zählprinzip.</a:t>
+              <a:t>Max stellt die Agenda vor und präsentiert die drei Gedankenexperiment-Fragen. Kurze Pause nach jeder Frage – das Publikum soll mental schätzen, NICHT laut antworten. Sagen: 'Diese drei Fragen werden wir heute Schritt für Schritt beantworten!' Überleitung zu Simon für das Zählprinzip.</a:t>
             </a:r>
           </a:p>
         </p:txBody>
@@ -1289,7 +1289,7 @@
           <a:lstStyle/>
           <a:p>
             <a:r>
-              <a:t>Person B erklärt das Zählprinzip am Outfit-Beispiel: 3×4=12 Hemd-Hosen-Kombinationen, jede davon × 2 Schuhe = 24. Das Raster macht das visuell greifbar. Betonen: Das Zählprinzip ist die GRUNDLAGE für Permutation, Variation und Kombination! Überleitung zu Person C.</a:t>
+              <a:t>Simon erklärt das Zählprinzip am Outfit-Beispiel: 3×4=12 Hemd-Hosen-Kombinationen, jede davon × 2 Schuhe = 24. Das Raster macht das visuell greifbar. Betonen: Das Zählprinzip ist die GRUNDLAGE für Permutation, Variation und Kombination! Überleitung zu Daniel.</a:t>
             </a:r>
           </a:p>
         </p:txBody>
@@ -1359,7 +1359,7 @@
           <a:lstStyle/>
           <a:p>
             <a:r>
-              <a:t>Person C erklärt Permutation ohne Wiederholung (Baumdiagramm, 3 Freunde = 6 Reihenfolgen, dann 5 Personen = 5!=120). Danach ANANAS mit Wiederholung: 6 Buchstaben, A kommt 3x, N 2x vor → 6!/(3!·2!·1!)=60. Überleitung zu Person A.</a:t>
+              <a:t>Daniel erklärt Permutation ohne Wiederholung (Baumdiagramm, 3 Freunde = 6 Reihenfolgen, dann 5 Personen = 5!=120). Danach ANANAS mit Wiederholung: 6 Buchstaben, A kommt 3x, N 2x vor → 6!/(3!·2!·1!)=60. Überleitung zu Max.</a:t>
             </a:r>
           </a:p>
         </p:txBody>
@@ -1429,7 +1429,7 @@
           <a:lstStyle/>
           <a:p>
             <a:r>
-              <a:t>Person A erklärt Variation ohne Wiederholung (Stockerlplatz: 8 Läufer, nur 3 Plätze, Reihenfolge zählt → V(8,3)=336). Dann Variation MIT Wiederholung und die Auflösung der ersten Gedankenexperiment-Frage: 10^4 = 10.000 PINs! Überleitung zu Person B.</a:t>
+              <a:t>Max erklärt Variation ohne Wiederholung (Stockerlplatz: 8 Läufer, nur 3 Plätze, Reihenfolge zählt → V(8,3)=336). Dann Variation MIT Wiederholung und die Auflösung der ersten Gedankenexperiment-Frage: 10^4 = 10.000 PINs! Überleitung zu Simon.</a:t>
             </a:r>
           </a:p>
         </p:txBody>
@@ -1499,7 +1499,7 @@
           <a:lstStyle/>
           <a:p>
             <a:r>
-              <a:t>Person B erklärt Kombination ohne Wiederholung am Handynummer-Beispiel: 15 Schüler:innen, Reihenfolge egal → C(15,2) = 105 Austausche! Viele Leute erwarten ~15 oder ~30 – 105 überrascht. Das ist die Auflösung von Frage 2! Dann Kombination MIT Wiederholung (Eisbecher). Überleitung zu Person C.</a:t>
+              <a:t>Simon erklärt Kombination ohne Wiederholung am Handynummer-Beispiel: 15 Schüler:innen, Reihenfolge egal → C(15,2) = 105 Austausche! Viele Leute erwarten ~15 oder ~30 – 105 überrascht. Das ist die Auflösung von Frage 2! Dann Kombination MIT Wiederholung (Eisbecher). Überleitung zu Daniel.</a:t>
             </a:r>
           </a:p>
         </p:txBody>
@@ -1569,7 +1569,7 @@
           <a:lstStyle/>
           <a:p>
             <a:r>
-              <a:t>Person C zeigt das Pascal'sche Dreieck: jede Zahl = Summe der zwei Zahlen darüber (Rekursionsformel). Die orange 15 = binom(6,2) – direkte Verbindung zu Kombination. Das Dreieck ist eine fertige Tabelle für alle Binomialkoeffizienten. Überleitung zu Person A.</a:t>
+              <a:t>Daniel zeigt das Pascal'sche Dreieck: jede Zahl = Summe der zwei Zahlen darüber (Rekursionsformel). Die orange 15 = binom(6,2) – direkte Verbindung zu Kombination. Das Dreieck ist eine fertige Tabelle für alle Binomialkoeffizienten. Überleitung zu Max.</a:t>
             </a:r>
           </a:p>
         </p:txBody>
@@ -1639,7 +1639,7 @@
           <a:lstStyle/>
           <a:p>
             <a:r>
-              <a:t>Person A führt die Laplace-Wahrscheinlichkeit ein: P(A)=|A|/|Omega|. Sofort am Beispiel demonstrieren: Würfelpasch. |Omega|=36 (Zählprinzip!), |A|=6 (Diagonale). P(Pasch)=6/36=1/6. Betonen: Kombinatorik UND Wahrscheinlichkeit hängen direkt zusammen. Überleitung zu Person B.</a:t>
+              <a:t>Max führt die Laplace-Wahrscheinlichkeit ein: P(A)=|A|/|Omega|. Sofort am Beispiel demonstrieren: Würfelpasch. |Omega|=36 (Zählprinzip!), |A|=6 (Diagonale). P(Pasch)=6/36=1/6. Betonen: Kombinatorik UND Wahrscheinlichkeit hängen direkt zusammen. Überleitung zu Simon.</a:t>
             </a:r>
           </a:p>
         </p:txBody>
@@ -1709,7 +1709,7 @@
           <a:lstStyle/>
           <a:p>
             <a:r>
-              <a:t>Person B löst die dritte Gedankenexperiment-Frage auf: P(6 Richtige)=1/8.145.060. Den Österreich-Vergleich nutzen, um die Größenordnung greifbar zu machen. Jetzt alle 3 Fragen beantwortet – kurze Pause, dann Überleitung zu Person C für den praktischen Teil.</a:t>
+              <a:t>Simon löst die dritte Gedankenexperiment-Frage auf: P(6 Richtige)=1/8.145.060. Den Österreich-Vergleich nutzen, um die Größenordnung greifbar zu machen. Jetzt alle 3 Fragen beantwortet – kurze Pause, dann Überleitung zu Daniel für den praktischen Teil.</a:t>
             </a:r>
           </a:p>
         </p:txBody>
@@ -4998,7 +4998,7 @@
                 </a:solidFill>
                 <a:latin typeface="Calibri"/>
               </a:rPr>
-              <a:t>Vorgetragen von Person A, Person B &amp; Person C</a:t>
+              <a:t>Vorgetragen von Max Manahl, Simon Schick &amp; Daniel Kornfeld</a:t>
             </a:r>
           </a:p>
         </p:txBody>
@@ -5213,8 +5213,8 @@
         </p:nvSpPr>
         <p:spPr>
           <a:xfrm>
-            <a:off x="10454335" y="329184"/>
-            <a:ext cx="1417320" cy="384048"/>
+            <a:off x="9951415" y="329184"/>
+            <a:ext cx="1920240" cy="384048"/>
           </a:xfrm>
           <a:prstGeom prst="roundRect">
             <a:avLst>
@@ -5251,13 +5251,13 @@
               <a:buNone/>
             </a:pPr>
             <a:r>
-              <a:rPr sz="1300" b="1">
+              <a:rPr sz="1200" b="1">
                 <a:solidFill>
                   <a:srgbClr val="2563EB"/>
                 </a:solidFill>
                 <a:latin typeface="Calibri"/>
               </a:rPr>
-              <a:t>Person C</a:t>
+              <a:t>Daniel Kornfeld</a:t>
             </a:r>
           </a:p>
         </p:txBody>
@@ -5736,8 +5736,8 @@
         </p:nvSpPr>
         <p:spPr>
           <a:xfrm>
-            <a:off x="10454335" y="329184"/>
-            <a:ext cx="1417320" cy="384048"/>
+            <a:off x="9951415" y="329184"/>
+            <a:ext cx="1920240" cy="384048"/>
           </a:xfrm>
           <a:prstGeom prst="roundRect">
             <a:avLst>
@@ -5774,13 +5774,13 @@
               <a:buNone/>
             </a:pPr>
             <a:r>
-              <a:rPr sz="1300" b="1">
+              <a:rPr sz="1200" b="1">
                 <a:solidFill>
                   <a:srgbClr val="1E3A8A"/>
                 </a:solidFill>
                 <a:latin typeface="Calibri"/>
               </a:rPr>
-              <a:t>Person A</a:t>
+              <a:t>Max Manahl</a:t>
             </a:r>
           </a:p>
         </p:txBody>
@@ -6239,8 +6239,8 @@
         </p:nvSpPr>
         <p:spPr>
           <a:xfrm>
-            <a:off x="10454335" y="329184"/>
-            <a:ext cx="1417320" cy="384048"/>
+            <a:off x="9951415" y="329184"/>
+            <a:ext cx="1920240" cy="384048"/>
           </a:xfrm>
           <a:prstGeom prst="roundRect">
             <a:avLst>
@@ -6277,13 +6277,13 @@
               <a:buNone/>
             </a:pPr>
             <a:r>
-              <a:rPr sz="1300" b="1">
+              <a:rPr sz="1200" b="1">
                 <a:solidFill>
                   <a:srgbClr val="EA580C"/>
                 </a:solidFill>
                 <a:latin typeface="Calibri"/>
               </a:rPr>
-              <a:t>Person B</a:t>
+              <a:t>Simon Schick</a:t>
             </a:r>
           </a:p>
         </p:txBody>
@@ -6951,8 +6951,8 @@
         </p:nvSpPr>
         <p:spPr>
           <a:xfrm>
-            <a:off x="10454335" y="329184"/>
-            <a:ext cx="1417320" cy="384048"/>
+            <a:off x="9951415" y="329184"/>
+            <a:ext cx="1920240" cy="384048"/>
           </a:xfrm>
           <a:prstGeom prst="roundRect">
             <a:avLst>
@@ -6989,13 +6989,13 @@
               <a:buNone/>
             </a:pPr>
             <a:r>
-              <a:rPr sz="1300" b="1">
+              <a:rPr sz="1200" b="1">
                 <a:solidFill>
                   <a:srgbClr val="2563EB"/>
                 </a:solidFill>
                 <a:latin typeface="Calibri"/>
               </a:rPr>
-              <a:t>Person C</a:t>
+              <a:t>Daniel Kornfeld</a:t>
             </a:r>
           </a:p>
         </p:txBody>
@@ -7454,8 +7454,8 @@
         </p:nvSpPr>
         <p:spPr>
           <a:xfrm>
-            <a:off x="10454335" y="329184"/>
-            <a:ext cx="1417320" cy="384048"/>
+            <a:off x="9951415" y="329184"/>
+            <a:ext cx="1920240" cy="384048"/>
           </a:xfrm>
           <a:prstGeom prst="roundRect">
             <a:avLst>
@@ -7492,13 +7492,13 @@
               <a:buNone/>
             </a:pPr>
             <a:r>
-              <a:rPr sz="1300" b="1">
+              <a:rPr sz="1200" b="1">
                 <a:solidFill>
                   <a:srgbClr val="1E3A8A"/>
                 </a:solidFill>
                 <a:latin typeface="Calibri"/>
               </a:rPr>
-              <a:t>Person A</a:t>
+              <a:t>Max Manahl</a:t>
             </a:r>
           </a:p>
         </p:txBody>
@@ -8023,8 +8023,8 @@
         </p:nvSpPr>
         <p:spPr>
           <a:xfrm>
-            <a:off x="10454335" y="329184"/>
-            <a:ext cx="1417320" cy="384048"/>
+            <a:off x="9951415" y="329184"/>
+            <a:ext cx="1920240" cy="384048"/>
           </a:xfrm>
           <a:prstGeom prst="roundRect">
             <a:avLst>
@@ -8061,13 +8061,13 @@
               <a:buNone/>
             </a:pPr>
             <a:r>
-              <a:rPr sz="1300" b="1">
+              <a:rPr sz="1200" b="1">
                 <a:solidFill>
                   <a:srgbClr val="EA580C"/>
                 </a:solidFill>
                 <a:latin typeface="Calibri"/>
               </a:rPr>
-              <a:t>Person B</a:t>
+              <a:t>Simon Schick</a:t>
             </a:r>
           </a:p>
         </p:txBody>
@@ -8911,8 +8911,8 @@
         </p:nvSpPr>
         <p:spPr>
           <a:xfrm>
-            <a:off x="10454335" y="329184"/>
-            <a:ext cx="1417320" cy="384048"/>
+            <a:off x="9951415" y="329184"/>
+            <a:ext cx="1920240" cy="384048"/>
           </a:xfrm>
           <a:prstGeom prst="roundRect">
             <a:avLst>
@@ -8949,7 +8949,7 @@
               <a:buNone/>
             </a:pPr>
             <a:r>
-              <a:rPr sz="1300" b="1">
+              <a:rPr sz="1200" b="1">
                 <a:solidFill>
                   <a:srgbClr val="64748B"/>
                 </a:solidFill>
@@ -9584,8 +9584,8 @@
         </p:nvSpPr>
         <p:spPr>
           <a:xfrm>
-            <a:off x="10454335" y="329184"/>
-            <a:ext cx="1417320" cy="384048"/>
+            <a:off x="9951415" y="329184"/>
+            <a:ext cx="1920240" cy="384048"/>
           </a:xfrm>
           <a:prstGeom prst="roundRect">
             <a:avLst>
@@ -9622,7 +9622,7 @@
               <a:buNone/>
             </a:pPr>
             <a:r>
-              <a:rPr sz="1300" b="1">
+              <a:rPr sz="1200" b="1">
                 <a:solidFill>
                   <a:srgbClr val="64748B"/>
                 </a:solidFill>
@@ -10083,7 +10083,7 @@
                 </a:solidFill>
                 <a:latin typeface="Calibri"/>
               </a:rPr>
-              <a:t>Person A  ·  Person B  ·  Person C</a:t>
+              <a:t>Max Manahl  ·  Simon Schick  ·  Daniel Kornfeld</a:t>
             </a:r>
           </a:p>
         </p:txBody>
@@ -10261,8 +10261,8 @@
         </p:nvSpPr>
         <p:spPr>
           <a:xfrm>
-            <a:off x="10454335" y="329184"/>
-            <a:ext cx="1417320" cy="384048"/>
+            <a:off x="9951415" y="329184"/>
+            <a:ext cx="1920240" cy="384048"/>
           </a:xfrm>
           <a:prstGeom prst="roundRect">
             <a:avLst>
@@ -10299,13 +10299,13 @@
               <a:buNone/>
             </a:pPr>
             <a:r>
-              <a:rPr sz="1300" b="1">
+              <a:rPr sz="1200" b="1">
                 <a:solidFill>
                   <a:srgbClr val="1E3A8A"/>
                 </a:solidFill>
                 <a:latin typeface="Calibri"/>
               </a:rPr>
-              <a:t>Person A</a:t>
+              <a:t>Max Manahl</a:t>
             </a:r>
           </a:p>
         </p:txBody>
@@ -11078,8 +11078,8 @@
         </p:nvSpPr>
         <p:spPr>
           <a:xfrm>
-            <a:off x="10454335" y="329184"/>
-            <a:ext cx="1417320" cy="384048"/>
+            <a:off x="9951415" y="329184"/>
+            <a:ext cx="1920240" cy="384048"/>
           </a:xfrm>
           <a:prstGeom prst="roundRect">
             <a:avLst>
@@ -11116,13 +11116,13 @@
               <a:buNone/>
             </a:pPr>
             <a:r>
-              <a:rPr sz="1300" b="1">
+              <a:rPr sz="1200" b="1">
                 <a:solidFill>
                   <a:srgbClr val="EA580C"/>
                 </a:solidFill>
                 <a:latin typeface="Calibri"/>
               </a:rPr>
-              <a:t>Person B</a:t>
+              <a:t>Simon Schick</a:t>
             </a:r>
           </a:p>
         </p:txBody>
@@ -11637,8 +11637,8 @@
         </p:nvSpPr>
         <p:spPr>
           <a:xfrm>
-            <a:off x="10454335" y="329184"/>
-            <a:ext cx="1417320" cy="384048"/>
+            <a:off x="9951415" y="329184"/>
+            <a:ext cx="1920240" cy="384048"/>
           </a:xfrm>
           <a:prstGeom prst="roundRect">
             <a:avLst>
@@ -11675,13 +11675,13 @@
               <a:buNone/>
             </a:pPr>
             <a:r>
-              <a:rPr sz="1300" b="1">
+              <a:rPr sz="1200" b="1">
                 <a:solidFill>
                   <a:srgbClr val="2563EB"/>
                 </a:solidFill>
                 <a:latin typeface="Calibri"/>
               </a:rPr>
-              <a:t>Person C</a:t>
+              <a:t>Daniel Kornfeld</a:t>
             </a:r>
           </a:p>
         </p:txBody>
@@ -12454,8 +12454,8 @@
         </p:nvSpPr>
         <p:spPr>
           <a:xfrm>
-            <a:off x="10454335" y="329184"/>
-            <a:ext cx="1417320" cy="384048"/>
+            <a:off x="9951415" y="329184"/>
+            <a:ext cx="1920240" cy="384048"/>
           </a:xfrm>
           <a:prstGeom prst="roundRect">
             <a:avLst>
@@ -12492,13 +12492,13 @@
               <a:buNone/>
             </a:pPr>
             <a:r>
-              <a:rPr sz="1300" b="1">
+              <a:rPr sz="1200" b="1">
                 <a:solidFill>
                   <a:srgbClr val="1E3A8A"/>
                 </a:solidFill>
                 <a:latin typeface="Calibri"/>
               </a:rPr>
-              <a:t>Person A</a:t>
+              <a:t>Max Manahl</a:t>
             </a:r>
           </a:p>
         </p:txBody>
@@ -13484,8 +13484,8 @@
         </p:nvSpPr>
         <p:spPr>
           <a:xfrm>
-            <a:off x="10454335" y="329184"/>
-            <a:ext cx="1417320" cy="384048"/>
+            <a:off x="9951415" y="329184"/>
+            <a:ext cx="1920240" cy="384048"/>
           </a:xfrm>
           <a:prstGeom prst="roundRect">
             <a:avLst>
@@ -13522,13 +13522,13 @@
               <a:buNone/>
             </a:pPr>
             <a:r>
-              <a:rPr sz="1300" b="1">
+              <a:rPr sz="1200" b="1">
                 <a:solidFill>
                   <a:srgbClr val="EA580C"/>
                 </a:solidFill>
                 <a:latin typeface="Calibri"/>
               </a:rPr>
-              <a:t>Person B</a:t>
+              <a:t>Simon Schick</a:t>
             </a:r>
           </a:p>
         </p:txBody>
@@ -14290,8 +14290,8 @@
         </p:nvSpPr>
         <p:spPr>
           <a:xfrm>
-            <a:off x="10454335" y="329184"/>
-            <a:ext cx="1417320" cy="384048"/>
+            <a:off x="9951415" y="329184"/>
+            <a:ext cx="1920240" cy="384048"/>
           </a:xfrm>
           <a:prstGeom prst="roundRect">
             <a:avLst>
@@ -14328,13 +14328,13 @@
               <a:buNone/>
             </a:pPr>
             <a:r>
-              <a:rPr sz="1300" b="1">
+              <a:rPr sz="1200" b="1">
                 <a:solidFill>
                   <a:srgbClr val="2563EB"/>
                 </a:solidFill>
                 <a:latin typeface="Calibri"/>
               </a:rPr>
-              <a:t>Person C</a:t>
+              <a:t>Daniel Kornfeld</a:t>
             </a:r>
           </a:p>
         </p:txBody>
@@ -14878,8 +14878,8 @@
         </p:nvSpPr>
         <p:spPr>
           <a:xfrm>
-            <a:off x="10454335" y="329184"/>
-            <a:ext cx="1417320" cy="384048"/>
+            <a:off x="9951415" y="329184"/>
+            <a:ext cx="1920240" cy="384048"/>
           </a:xfrm>
           <a:prstGeom prst="roundRect">
             <a:avLst>
@@ -14916,13 +14916,13 @@
               <a:buNone/>
             </a:pPr>
             <a:r>
-              <a:rPr sz="1300" b="1">
+              <a:rPr sz="1200" b="1">
                 <a:solidFill>
                   <a:srgbClr val="1E3A8A"/>
                 </a:solidFill>
                 <a:latin typeface="Calibri"/>
               </a:rPr>
-              <a:t>Person A</a:t>
+              <a:t>Max Manahl</a:t>
             </a:r>
           </a:p>
         </p:txBody>
@@ -15680,8 +15680,8 @@
         </p:nvSpPr>
         <p:spPr>
           <a:xfrm>
-            <a:off x="10454335" y="329184"/>
-            <a:ext cx="1417320" cy="384048"/>
+            <a:off x="9951415" y="329184"/>
+            <a:ext cx="1920240" cy="384048"/>
           </a:xfrm>
           <a:prstGeom prst="roundRect">
             <a:avLst>
@@ -15718,13 +15718,13 @@
               <a:buNone/>
             </a:pPr>
             <a:r>
-              <a:rPr sz="1300" b="1">
+              <a:rPr sz="1200" b="1">
                 <a:solidFill>
                   <a:srgbClr val="EA580C"/>
                 </a:solidFill>
                 <a:latin typeface="Calibri"/>
               </a:rPr>
-              <a:t>Person B</a:t>
+              <a:t>Simon Schick</a:t>
             </a:r>
           </a:p>
         </p:txBody>
